--- a/Документация/origin.pptx
+++ b/Документация/origin.pptx
@@ -11,11 +11,12 @@
     <p:sldId id="259" r:id="rId5"/>
     <p:sldId id="260" r:id="rId6"/>
     <p:sldId id="261" r:id="rId7"/>
-    <p:sldId id="262" r:id="rId8"/>
-    <p:sldId id="263" r:id="rId9"/>
-    <p:sldId id="264" r:id="rId10"/>
-    <p:sldId id="265" r:id="rId11"/>
-    <p:sldId id="266" r:id="rId12"/>
+    <p:sldId id="267" r:id="rId8"/>
+    <p:sldId id="262" r:id="rId9"/>
+    <p:sldId id="263" r:id="rId10"/>
+    <p:sldId id="264" r:id="rId11"/>
+    <p:sldId id="265" r:id="rId12"/>
+    <p:sldId id="266" r:id="rId13"/>
   </p:sldIdLst>
   <p:sldSz cx="12192000" cy="6858000"/>
   <p:notesSz cx="6858000" cy="9144000"/>
@@ -114,6 +115,11 @@
       </a:defRPr>
     </a:lvl9pPr>
   </p:defaultTextStyle>
+  <p:extLst>
+    <p:ext uri="{EFAFB233-063F-42B5-8137-9DF3F51BA10A}">
+      <p15:sldGuideLst xmlns:p15="http://schemas.microsoft.com/office/powerpoint/2012/main"/>
+    </p:ext>
+  </p:extLst>
 </p:presentation>
 </file>
 
@@ -212,7 +218,7 @@
           <a:effectLst/>
           <a:extLst>
             <a:ext uri="{91240B29-F687-4f45-9708-019B960494DF}">
-              <a14:hiddenLine xmlns:a14="http://schemas.microsoft.com/office/drawing/2010/main" xmlns="" w="9525">
+              <a14:hiddenLine xmlns="" xmlns:a14="http://schemas.microsoft.com/office/drawing/2010/main" w="9525">
                 <a:solidFill>
                   <a:srgbClr val="000000"/>
                 </a:solidFill>
@@ -411,7 +417,7 @@
           <a:p>
             <a:fld id="{347CDDA7-3639-427C-82C8-5EF73E14CBE3}" type="datetimeFigureOut">
               <a:rPr lang="ru-RU" smtClean="0"/>
-              <a:t>10.01.2026</a:t>
+              <a:t>16.01.2026</a:t>
             </a:fld>
             <a:endParaRPr lang="ru-RU"/>
           </a:p>
@@ -729,7 +735,7 @@
           <a:p>
             <a:fld id="{347CDDA7-3639-427C-82C8-5EF73E14CBE3}" type="datetimeFigureOut">
               <a:rPr lang="ru-RU" smtClean="0"/>
-              <a:t>10.01.2026</a:t>
+              <a:t>16.01.2026</a:t>
             </a:fld>
             <a:endParaRPr lang="ru-RU"/>
           </a:p>
@@ -1224,7 +1230,7 @@
           <a:p>
             <a:fld id="{347CDDA7-3639-427C-82C8-5EF73E14CBE3}" type="datetimeFigureOut">
               <a:rPr lang="ru-RU" smtClean="0"/>
-              <a:t>10.01.2026</a:t>
+              <a:t>16.01.2026</a:t>
             </a:fld>
             <a:endParaRPr lang="ru-RU"/>
           </a:p>
@@ -1600,7 +1606,7 @@
           <a:p>
             <a:fld id="{347CDDA7-3639-427C-82C8-5EF73E14CBE3}" type="datetimeFigureOut">
               <a:rPr lang="ru-RU" smtClean="0"/>
-              <a:t>10.01.2026</a:t>
+              <a:t>16.01.2026</a:t>
             </a:fld>
             <a:endParaRPr lang="ru-RU"/>
           </a:p>
@@ -1755,7 +1761,7 @@
           <a:ln/>
           <a:extLst>
             <a:ext uri="{91240B29-F687-4f45-9708-019B960494DF}">
-              <a14:hiddenLine xmlns:a14="http://schemas.microsoft.com/office/drawing/2010/main" xmlns="" w="9525">
+              <a14:hiddenLine xmlns="" xmlns:a14="http://schemas.microsoft.com/office/drawing/2010/main" w="9525">
                 <a:solidFill>
                   <a:srgbClr val="000000"/>
                 </a:solidFill>
@@ -1880,7 +1886,7 @@
           <a:p>
             <a:fld id="{347CDDA7-3639-427C-82C8-5EF73E14CBE3}" type="datetimeFigureOut">
               <a:rPr lang="ru-RU" smtClean="0"/>
-              <a:t>10.01.2026</a:t>
+              <a:t>16.01.2026</a:t>
             </a:fld>
             <a:endParaRPr lang="ru-RU"/>
           </a:p>
@@ -2037,7 +2043,7 @@
           <a:ln/>
           <a:extLst>
             <a:ext uri="{91240B29-F687-4f45-9708-019B960494DF}">
-              <a14:hiddenLine xmlns:a14="http://schemas.microsoft.com/office/drawing/2010/main" xmlns="" w="9525">
+              <a14:hiddenLine xmlns="" xmlns:a14="http://schemas.microsoft.com/office/drawing/2010/main" w="9525">
                 <a:solidFill>
                   <a:srgbClr val="000000"/>
                 </a:solidFill>
@@ -2172,7 +2178,7 @@
           <a:p>
             <a:fld id="{347CDDA7-3639-427C-82C8-5EF73E14CBE3}" type="datetimeFigureOut">
               <a:rPr lang="ru-RU" smtClean="0"/>
-              <a:t>10.01.2026</a:t>
+              <a:t>16.01.2026</a:t>
             </a:fld>
             <a:endParaRPr lang="ru-RU"/>
           </a:p>
@@ -2327,7 +2333,7 @@
           <a:ln/>
           <a:extLst>
             <a:ext uri="{91240B29-F687-4f45-9708-019B960494DF}">
-              <a14:hiddenLine xmlns:a14="http://schemas.microsoft.com/office/drawing/2010/main" xmlns="" w="9525">
+              <a14:hiddenLine xmlns="" xmlns:a14="http://schemas.microsoft.com/office/drawing/2010/main" w="9525">
                 <a:solidFill>
                   <a:srgbClr val="000000"/>
                 </a:solidFill>
@@ -2462,7 +2468,7 @@
           <a:p>
             <a:fld id="{347CDDA7-3639-427C-82C8-5EF73E14CBE3}" type="datetimeFigureOut">
               <a:rPr lang="ru-RU" smtClean="0"/>
-              <a:t>10.01.2026</a:t>
+              <a:t>16.01.2026</a:t>
             </a:fld>
             <a:endParaRPr lang="ru-RU"/>
           </a:p>
@@ -2812,7 +2818,7 @@
           <a:p>
             <a:fld id="{347CDDA7-3639-427C-82C8-5EF73E14CBE3}" type="datetimeFigureOut">
               <a:rPr lang="ru-RU" smtClean="0"/>
-              <a:t>10.01.2026</a:t>
+              <a:t>16.01.2026</a:t>
             </a:fld>
             <a:endParaRPr lang="ru-RU"/>
           </a:p>
@@ -2967,7 +2973,7 @@
           <a:ln/>
           <a:extLst>
             <a:ext uri="{91240B29-F687-4f45-9708-019B960494DF}">
-              <a14:hiddenLine xmlns:a14="http://schemas.microsoft.com/office/drawing/2010/main" xmlns="" w="9525">
+              <a14:hiddenLine xmlns="" xmlns:a14="http://schemas.microsoft.com/office/drawing/2010/main" w="9525">
                 <a:solidFill>
                   <a:srgbClr val="000000"/>
                 </a:solidFill>
@@ -3158,7 +3164,7 @@
           <a:p>
             <a:fld id="{347CDDA7-3639-427C-82C8-5EF73E14CBE3}" type="datetimeFigureOut">
               <a:rPr lang="ru-RU" smtClean="0"/>
-              <a:t>10.01.2026</a:t>
+              <a:t>16.01.2026</a:t>
             </a:fld>
             <a:endParaRPr lang="ru-RU"/>
           </a:p>
@@ -3313,7 +3319,7 @@
           <a:ln/>
           <a:extLst>
             <a:ext uri="{91240B29-F687-4f45-9708-019B960494DF}">
-              <a14:hiddenLine xmlns:a14="http://schemas.microsoft.com/office/drawing/2010/main" xmlns="" w="9525">
+              <a14:hiddenLine xmlns="" xmlns:a14="http://schemas.microsoft.com/office/drawing/2010/main" w="9525">
                 <a:solidFill>
                   <a:srgbClr val="000000"/>
                 </a:solidFill>
@@ -3642,7 +3648,7 @@
           <a:p>
             <a:fld id="{347CDDA7-3639-427C-82C8-5EF73E14CBE3}" type="datetimeFigureOut">
               <a:rPr lang="ru-RU" smtClean="0"/>
-              <a:t>10.01.2026</a:t>
+              <a:t>16.01.2026</a:t>
             </a:fld>
             <a:endParaRPr lang="ru-RU"/>
           </a:p>
@@ -3797,7 +3803,7 @@
           <a:ln/>
           <a:extLst>
             <a:ext uri="{91240B29-F687-4f45-9708-019B960494DF}">
-              <a14:hiddenLine xmlns:a14="http://schemas.microsoft.com/office/drawing/2010/main" xmlns="" w="9525">
+              <a14:hiddenLine xmlns="" xmlns:a14="http://schemas.microsoft.com/office/drawing/2010/main" w="9525">
                 <a:solidFill>
                   <a:srgbClr val="000000"/>
                 </a:solidFill>
@@ -3870,7 +3876,7 @@
           <a:p>
             <a:fld id="{347CDDA7-3639-427C-82C8-5EF73E14CBE3}" type="datetimeFigureOut">
               <a:rPr lang="ru-RU" smtClean="0"/>
-              <a:t>10.01.2026</a:t>
+              <a:t>16.01.2026</a:t>
             </a:fld>
             <a:endParaRPr lang="ru-RU"/>
           </a:p>
@@ -3965,7 +3971,7 @@
           <a:p>
             <a:fld id="{347CDDA7-3639-427C-82C8-5EF73E14CBE3}" type="datetimeFigureOut">
               <a:rPr lang="ru-RU" smtClean="0"/>
-              <a:t>10.01.2026</a:t>
+              <a:t>16.01.2026</a:t>
             </a:fld>
             <a:endParaRPr lang="ru-RU"/>
           </a:p>
@@ -4233,7 +4239,7 @@
           <a:ln/>
           <a:extLst>
             <a:ext uri="{91240B29-F687-4f45-9708-019B960494DF}">
-              <a14:hiddenLine xmlns:a14="http://schemas.microsoft.com/office/drawing/2010/main" xmlns="" w="9525">
+              <a14:hiddenLine xmlns="" xmlns:a14="http://schemas.microsoft.com/office/drawing/2010/main" w="9525">
                 <a:solidFill>
                   <a:srgbClr val="000000"/>
                 </a:solidFill>
@@ -4439,7 +4445,7 @@
           <a:p>
             <a:fld id="{347CDDA7-3639-427C-82C8-5EF73E14CBE3}" type="datetimeFigureOut">
               <a:rPr lang="ru-RU" smtClean="0"/>
-              <a:t>10.01.2026</a:t>
+              <a:t>16.01.2026</a:t>
             </a:fld>
             <a:endParaRPr lang="ru-RU"/>
           </a:p>
@@ -4752,7 +4758,7 @@
           <a:p>
             <a:fld id="{347CDDA7-3639-427C-82C8-5EF73E14CBE3}" type="datetimeFigureOut">
               <a:rPr lang="ru-RU" smtClean="0"/>
-              <a:t>10.01.2026</a:t>
+              <a:t>16.01.2026</a:t>
             </a:fld>
             <a:endParaRPr lang="ru-RU"/>
           </a:p>
@@ -5022,7 +5028,7 @@
           <a:p>
             <a:fld id="{347CDDA7-3639-427C-82C8-5EF73E14CBE3}" type="datetimeFigureOut">
               <a:rPr lang="ru-RU" smtClean="0"/>
-              <a:t>10.01.2026</a:t>
+              <a:t>16.01.2026</a:t>
             </a:fld>
             <a:endParaRPr lang="ru-RU"/>
           </a:p>
@@ -5521,6 +5527,17 @@
               </a:rPr>
               <a:t>«ТЕКСТОВЫЙ КВЕСТ НА ЯЗЫКЕ ПРОГРАММИРОВАНИЯ PYTHON С ИСПОЛЬЗОВАНИЕМ ВНЕШНЕЙ БИБЛИОТЕКИ PYGAME»</a:t>
             </a:r>
+            <a:r>
+              <a:rPr lang="ru-RU" spc="-10" dirty="0">
+                <a:solidFill>
+                  <a:schemeClr val="tx1"/>
+                </a:solidFill>
+                <a:latin typeface="Times New Roman"/>
+                <a:ea typeface="Times New Roman"/>
+                <a:cs typeface="Times New Roman"/>
+              </a:rPr>
+              <a:t/>
+            </a:r>
             <a:br>
               <a:rPr lang="ru-RU" spc="-10" dirty="0">
                 <a:solidFill>
@@ -5866,6 +5883,100 @@
           <p:cNvPr id="2" name="Заголовок 1">
             <a:extLst>
               <a:ext uri="{FF2B5EF4-FFF2-40B4-BE49-F238E27FC236}">
+                <a16:creationId xmlns:a16="http://schemas.microsoft.com/office/drawing/2014/main" id="{1DB0DD21-71E9-BE84-8E00-9CE16289D288}"/>
+              </a:ext>
+            </a:extLst>
+          </p:cNvPr>
+          <p:cNvSpPr>
+            <a:spLocks noGrp="1"/>
+          </p:cNvSpPr>
+          <p:nvPr>
+            <p:ph type="title"/>
+          </p:nvPr>
+        </p:nvSpPr>
+        <p:spPr/>
+        <p:txBody>
+          <a:bodyPr/>
+          <a:lstStyle/>
+          <a:p>
+            <a:r>
+              <a:rPr lang="ru-RU" dirty="0"/>
+              <a:t>Дальнейшее развитие проекта</a:t>
+            </a:r>
+          </a:p>
+        </p:txBody>
+      </p:sp>
+      <p:sp>
+        <p:nvSpPr>
+          <p:cNvPr id="3" name="Объект 2">
+            <a:extLst>
+              <a:ext uri="{FF2B5EF4-FFF2-40B4-BE49-F238E27FC236}">
+                <a16:creationId xmlns:a16="http://schemas.microsoft.com/office/drawing/2014/main" id="{07BF2EF1-F377-C4F2-FC96-4B0A712EE747}"/>
+              </a:ext>
+            </a:extLst>
+          </p:cNvPr>
+          <p:cNvSpPr>
+            <a:spLocks noGrp="1"/>
+          </p:cNvSpPr>
+          <p:nvPr>
+            <p:ph idx="1"/>
+          </p:nvPr>
+        </p:nvSpPr>
+        <p:spPr>
+          <a:xfrm>
+            <a:off x="420359" y="1706240"/>
+            <a:ext cx="10554574" cy="3636511"/>
+          </a:xfrm>
+        </p:spPr>
+        <p:txBody>
+          <a:bodyPr/>
+          <a:lstStyle/>
+          <a:p>
+            <a:r>
+              <a:rPr lang="ru-RU" dirty="0"/>
+              <a:t>В будущем планируется продолжить разработку нашей игры. Также планируется добавить систему миссий и заданий, выполняя которые игрок будет получать игровую валюту, которую сможет обменять на улучшенную броню или оружие. </a:t>
+            </a:r>
+          </a:p>
+          <a:p>
+            <a:endParaRPr lang="ru-RU" dirty="0"/>
+          </a:p>
+        </p:txBody>
+      </p:sp>
+    </p:spTree>
+    <p:extLst>
+      <p:ext uri="{BB962C8B-B14F-4D97-AF65-F5344CB8AC3E}">
+        <p14:creationId xmlns:p14="http://schemas.microsoft.com/office/powerpoint/2010/main" val="1433178001"/>
+      </p:ext>
+    </p:extLst>
+  </p:cSld>
+  <p:clrMapOvr>
+    <a:masterClrMapping/>
+  </p:clrMapOvr>
+</p:sld>
+</file>
+
+<file path=ppt/slides/slide11.xml><?xml version="1.0" encoding="utf-8"?>
+<p:sld xmlns:a="http://schemas.openxmlformats.org/drawingml/2006/main" xmlns:r="http://schemas.openxmlformats.org/officeDocument/2006/relationships" xmlns:p="http://schemas.openxmlformats.org/presentationml/2006/main">
+  <p:cSld>
+    <p:spTree>
+      <p:nvGrpSpPr>
+        <p:cNvPr id="1" name=""/>
+        <p:cNvGrpSpPr/>
+        <p:nvPr/>
+      </p:nvGrpSpPr>
+      <p:grpSpPr>
+        <a:xfrm>
+          <a:off x="0" y="0"/>
+          <a:ext cx="0" cy="0"/>
+          <a:chOff x="0" y="0"/>
+          <a:chExt cx="0" cy="0"/>
+        </a:xfrm>
+      </p:grpSpPr>
+      <p:sp>
+        <p:nvSpPr>
+          <p:cNvPr id="2" name="Заголовок 1">
+            <a:extLst>
+              <a:ext uri="{FF2B5EF4-FFF2-40B4-BE49-F238E27FC236}">
                 <a16:creationId xmlns:a16="http://schemas.microsoft.com/office/drawing/2014/main" id="{267A4D73-96C1-92C1-C364-962CC71115E2}"/>
               </a:ext>
             </a:extLst>
@@ -6065,7 +6176,7 @@
                 <a:hlinkClick r:id="rId4">
                   <a:extLst>
                     <a:ext uri="{A12FA001-AC4F-418D-AE19-62706E023703}">
-                      <ahyp:hlinkClr xmlns:ahyp="http://schemas.microsoft.com/office/drawing/2018/hyperlinkcolor" val="tx"/>
+                      <ahyp:hlinkClr xmlns:ahyp="http://schemas.microsoft.com/office/drawing/2018/hyperlinkcolor" xmlns="" val="tx"/>
                     </a:ext>
                   </a:extLst>
                 </a:hlinkClick>
@@ -6133,7 +6244,7 @@
 </p:sld>
 </file>
 
-<file path=ppt/slides/slide11.xml><?xml version="1.0" encoding="utf-8"?>
+<file path=ppt/slides/slide12.xml><?xml version="1.0" encoding="utf-8"?>
 <p:sld xmlns:a="http://schemas.openxmlformats.org/drawingml/2006/main" xmlns:r="http://schemas.openxmlformats.org/officeDocument/2006/relationships" xmlns:p="http://schemas.openxmlformats.org/presentationml/2006/main">
   <p:cSld>
     <p:spTree>
@@ -6753,7 +6864,7 @@
           <p:nvPr/>
         </p:nvPicPr>
         <p:blipFill>
-          <a:blip r:embed="rId2">
+          <a:blip r:embed="rId2" cstate="hqprint">
             <a:extLst>
               <a:ext uri="{28A0092B-C50C-407E-A947-70E740481C1C}">
                 <a14:useLocalDpi xmlns:a14="http://schemas.microsoft.com/office/drawing/2010/main" val="0"/>
@@ -6786,15 +6897,7 @@
           <a:effectLst>
             <a:reflection blurRad="12700" stA="38000" endPos="28000" dist="5000" dir="5400000" sy="-100000" algn="bl" rotWithShape="0"/>
           </a:effectLst>
-          <a:extLst>
-            <a:ext uri="{909E8E84-426E-40DD-AFC4-6F175D3DCCD1}">
-              <a14:hiddenFill xmlns:a14="http://schemas.microsoft.com/office/drawing/2010/main">
-                <a:solidFill>
-                  <a:srgbClr val="FFFFFF"/>
-                </a:solidFill>
-              </a14:hiddenFill>
-            </a:ext>
-          </a:extLst>
+          <a:extLst/>
         </p:spPr>
       </p:pic>
       <p:sp>
@@ -7093,6 +7196,142 @@
       </p:grpSpPr>
       <p:sp>
         <p:nvSpPr>
+          <p:cNvPr id="2" name="Заголовок 1"/>
+          <p:cNvSpPr>
+            <a:spLocks noGrp="1"/>
+          </p:cNvSpPr>
+          <p:nvPr>
+            <p:ph type="title"/>
+          </p:nvPr>
+        </p:nvSpPr>
+        <p:spPr/>
+        <p:txBody>
+          <a:bodyPr/>
+          <a:lstStyle/>
+          <a:p>
+            <a:r>
+              <a:rPr lang="ru-RU" dirty="0" smtClean="0"/>
+              <a:t>Структура игры</a:t>
+            </a:r>
+            <a:endParaRPr lang="ru-RU" dirty="0"/>
+          </a:p>
+        </p:txBody>
+      </p:sp>
+      <p:sp>
+        <p:nvSpPr>
+          <p:cNvPr id="3" name="Объект 2"/>
+          <p:cNvSpPr>
+            <a:spLocks noGrp="1"/>
+          </p:cNvSpPr>
+          <p:nvPr>
+            <p:ph idx="1"/>
+          </p:nvPr>
+        </p:nvSpPr>
+        <p:spPr/>
+        <p:txBody>
+          <a:bodyPr/>
+          <a:lstStyle/>
+          <a:p>
+            <a:r>
+              <a:rPr lang="ru-RU" dirty="0" smtClean="0"/>
+              <a:t>На</a:t>
+            </a:r>
+            <a:r>
+              <a:rPr lang="ru-RU" dirty="0"/>
+              <a:t>ш</a:t>
+            </a:r>
+            <a:r>
+              <a:rPr lang="ru-RU" dirty="0" smtClean="0"/>
+              <a:t> </a:t>
+            </a:r>
+            <a:r>
+              <a:rPr lang="ru-RU" dirty="0"/>
+              <a:t>проект состоит из трех основных компонентов:</a:t>
+            </a:r>
+          </a:p>
+          <a:p>
+            <a:pPr lvl="1">
+              <a:buFont typeface="+mj-lt"/>
+              <a:buAutoNum type="arabicPeriod"/>
+            </a:pPr>
+            <a:r>
+              <a:rPr lang="ru-RU" dirty="0"/>
+              <a:t>Лаунчер. </a:t>
+            </a:r>
+          </a:p>
+          <a:p>
+            <a:pPr lvl="1">
+              <a:buFont typeface="+mj-lt"/>
+              <a:buAutoNum type="arabicPeriod"/>
+            </a:pPr>
+            <a:r>
+              <a:rPr lang="ru-RU" dirty="0"/>
+              <a:t>Клиент. </a:t>
+            </a:r>
+          </a:p>
+          <a:p>
+            <a:pPr lvl="1">
+              <a:buFont typeface="+mj-lt"/>
+              <a:buAutoNum type="arabicPeriod"/>
+            </a:pPr>
+            <a:r>
+              <a:rPr lang="ru-RU" dirty="0" smtClean="0"/>
+              <a:t>Сервер</a:t>
+            </a:r>
+            <a:endParaRPr lang="en-US" dirty="0" smtClean="0"/>
+          </a:p>
+          <a:p>
+            <a:pPr lvl="1">
+              <a:buFont typeface="+mj-lt"/>
+              <a:buAutoNum type="arabicPeriod"/>
+            </a:pPr>
+            <a:endParaRPr lang="ru-RU" dirty="0"/>
+          </a:p>
+          <a:p>
+            <a:r>
+              <a:rPr lang="ru-RU" b="1" dirty="0"/>
+              <a:t>Лаунчер</a:t>
+            </a:r>
+            <a:r>
+              <a:rPr lang="ru-RU" dirty="0"/>
+              <a:t> – это отдельное приложение, которое включает в себя регистрацию и вход с проверкой в базе данных, автоматическую проверку при каждом запуске, загрузку новых версий с прогресс-баром и отображением статуса, безопасную передачу токена авторизации в игру и запуск игры с правильными параметрами подключения</a:t>
+            </a:r>
+            <a:endParaRPr lang="ru-RU" dirty="0"/>
+          </a:p>
+        </p:txBody>
+      </p:sp>
+    </p:spTree>
+    <p:extLst>
+      <p:ext uri="{BB962C8B-B14F-4D97-AF65-F5344CB8AC3E}">
+        <p14:creationId xmlns:p14="http://schemas.microsoft.com/office/powerpoint/2010/main" val="2218982717"/>
+      </p:ext>
+    </p:extLst>
+  </p:cSld>
+  <p:clrMapOvr>
+    <a:masterClrMapping/>
+  </p:clrMapOvr>
+</p:sld>
+</file>
+
+<file path=ppt/slides/slide8.xml><?xml version="1.0" encoding="utf-8"?>
+<p:sld xmlns:a="http://schemas.openxmlformats.org/drawingml/2006/main" xmlns:r="http://schemas.openxmlformats.org/officeDocument/2006/relationships" xmlns:p="http://schemas.openxmlformats.org/presentationml/2006/main">
+  <p:cSld>
+    <p:spTree>
+      <p:nvGrpSpPr>
+        <p:cNvPr id="1" name=""/>
+        <p:cNvGrpSpPr/>
+        <p:nvPr/>
+      </p:nvGrpSpPr>
+      <p:grpSpPr>
+        <a:xfrm>
+          <a:off x="0" y="0"/>
+          <a:ext cx="0" cy="0"/>
+          <a:chOff x="0" y="0"/>
+          <a:chExt cx="0" cy="0"/>
+        </a:xfrm>
+      </p:grpSpPr>
+      <p:sp>
+        <p:nvSpPr>
           <p:cNvPr id="2" name="Заголовок 1">
             <a:extLst>
               <a:ext uri="{FF2B5EF4-FFF2-40B4-BE49-F238E27FC236}">
@@ -7305,7 +7544,7 @@
           <p:nvPr/>
         </p:nvPicPr>
         <p:blipFill>
-          <a:blip r:embed="rId2">
+          <a:blip r:embed="rId2" cstate="hqprint">
             <a:extLst>
               <a:ext uri="{28A0092B-C50C-407E-A947-70E740481C1C}">
                 <a14:useLocalDpi xmlns:a14="http://schemas.microsoft.com/office/drawing/2010/main" val="0"/>
@@ -7341,7 +7580,7 @@
           <p:nvPr/>
         </p:nvPicPr>
         <p:blipFill>
-          <a:blip r:embed="rId3">
+          <a:blip r:embed="rId3" cstate="hqprint">
             <a:extLst>
               <a:ext uri="{28A0092B-C50C-407E-A947-70E740481C1C}">
                 <a14:useLocalDpi xmlns:a14="http://schemas.microsoft.com/office/drawing/2010/main" val="0"/>
@@ -7451,142 +7690,6 @@
     <p:extLst>
       <p:ext uri="{BB962C8B-B14F-4D97-AF65-F5344CB8AC3E}">
         <p14:creationId xmlns:p14="http://schemas.microsoft.com/office/powerpoint/2010/main" val="2087852851"/>
-      </p:ext>
-    </p:extLst>
-  </p:cSld>
-  <p:clrMapOvr>
-    <a:masterClrMapping/>
-  </p:clrMapOvr>
-</p:sld>
-</file>
-
-<file path=ppt/slides/slide8.xml><?xml version="1.0" encoding="utf-8"?>
-<p:sld xmlns:a="http://schemas.openxmlformats.org/drawingml/2006/main" xmlns:r="http://schemas.openxmlformats.org/officeDocument/2006/relationships" xmlns:p="http://schemas.openxmlformats.org/presentationml/2006/main">
-  <p:cSld>
-    <p:spTree>
-      <p:nvGrpSpPr>
-        <p:cNvPr id="1" name=""/>
-        <p:cNvGrpSpPr/>
-        <p:nvPr/>
-      </p:nvGrpSpPr>
-      <p:grpSpPr>
-        <a:xfrm>
-          <a:off x="0" y="0"/>
-          <a:ext cx="0" cy="0"/>
-          <a:chOff x="0" y="0"/>
-          <a:chExt cx="0" cy="0"/>
-        </a:xfrm>
-      </p:grpSpPr>
-      <p:sp>
-        <p:nvSpPr>
-          <p:cNvPr id="2" name="Заголовок 1">
-            <a:extLst>
-              <a:ext uri="{FF2B5EF4-FFF2-40B4-BE49-F238E27FC236}">
-                <a16:creationId xmlns:a16="http://schemas.microsoft.com/office/drawing/2014/main" id="{F806401E-A251-F1E3-CF12-471095BD7730}"/>
-              </a:ext>
-            </a:extLst>
-          </p:cNvPr>
-          <p:cNvSpPr>
-            <a:spLocks noGrp="1"/>
-          </p:cNvSpPr>
-          <p:nvPr>
-            <p:ph type="title"/>
-          </p:nvPr>
-        </p:nvSpPr>
-        <p:spPr/>
-        <p:txBody>
-          <a:bodyPr/>
-          <a:lstStyle/>
-          <a:p>
-            <a:r>
-              <a:rPr lang="ru-RU" dirty="0"/>
-              <a:t>Заключение</a:t>
-            </a:r>
-          </a:p>
-        </p:txBody>
-      </p:sp>
-      <p:sp>
-        <p:nvSpPr>
-          <p:cNvPr id="3" name="Объект 2">
-            <a:extLst>
-              <a:ext uri="{FF2B5EF4-FFF2-40B4-BE49-F238E27FC236}">
-                <a16:creationId xmlns:a16="http://schemas.microsoft.com/office/drawing/2014/main" id="{1CC2F877-A019-C601-8155-8423107E1A9B}"/>
-              </a:ext>
-            </a:extLst>
-          </p:cNvPr>
-          <p:cNvSpPr>
-            <a:spLocks noGrp="1"/>
-          </p:cNvSpPr>
-          <p:nvPr>
-            <p:ph idx="1"/>
-          </p:nvPr>
-        </p:nvSpPr>
-        <p:spPr/>
-        <p:txBody>
-          <a:bodyPr/>
-          <a:lstStyle/>
-          <a:p>
-            <a:r>
-              <a:rPr lang="ru-RU" dirty="0">
-                <a:latin typeface="Century Gothic (Основной текст)"/>
-              </a:rPr>
-              <a:t>В результате проделанной работы была разработана полноценная 2</a:t>
-            </a:r>
-            <a:r>
-              <a:rPr lang="en-US" dirty="0">
-                <a:latin typeface="Century Gothic (Основной текст)"/>
-              </a:rPr>
-              <a:t>d</a:t>
-            </a:r>
-            <a:r>
-              <a:rPr lang="ru-RU" dirty="0">
-                <a:latin typeface="Century Gothic (Основной текст)"/>
-              </a:rPr>
-              <a:t> онлайн игра с системой битв, сюжетом и изображениями. Также в игре можно открыть настройки как в меню, так и во время игры. </a:t>
-            </a:r>
-          </a:p>
-          <a:p>
-            <a:r>
-              <a:rPr lang="ru-RU" dirty="0">
-                <a:latin typeface="Century Gothic (Основной текст)"/>
-                <a:ea typeface="Times New Roman"/>
-                <a:cs typeface="Times New Roman" panose="02020603050405020304" pitchFamily="18" charset="0"/>
-              </a:rPr>
-              <a:t>Нами были получены знания по игровой разработке в небольшой команде, а так же мы получили большой опыт в работе с нейросетями.</a:t>
-            </a:r>
-            <a:r>
-              <a:rPr lang="en-US" dirty="0">
-                <a:latin typeface="Century Gothic (Основной текст)"/>
-                <a:ea typeface="Times New Roman"/>
-                <a:cs typeface="Times New Roman" panose="02020603050405020304" pitchFamily="18" charset="0"/>
-              </a:rPr>
-              <a:t> </a:t>
-            </a:r>
-            <a:r>
-              <a:rPr lang="ru-RU" dirty="0">
-                <a:latin typeface="Century Gothic (Основной текст)"/>
-                <a:ea typeface="Times New Roman"/>
-                <a:cs typeface="Times New Roman" panose="02020603050405020304" pitchFamily="18" charset="0"/>
-              </a:rPr>
-              <a:t>Полученные навыки программирования позволят нам дальше развивать свой продукт и создавать новые увлекательные игры.</a:t>
-            </a:r>
-          </a:p>
-          <a:p>
-            <a:endParaRPr lang="ru-RU" dirty="0">
-              <a:latin typeface="Times New Roman" panose="02020603050405020304" pitchFamily="18" charset="0"/>
-              <a:ea typeface="Times New Roman"/>
-              <a:cs typeface="Times New Roman" panose="02020603050405020304" pitchFamily="18" charset="0"/>
-            </a:endParaRPr>
-          </a:p>
-          <a:p>
-            <a:endParaRPr lang="ru-RU" dirty="0"/>
-          </a:p>
-        </p:txBody>
-      </p:sp>
-    </p:spTree>
-    <p:extLst>
-      <p:ext uri="{BB962C8B-B14F-4D97-AF65-F5344CB8AC3E}">
-        <p14:creationId xmlns:p14="http://schemas.microsoft.com/office/powerpoint/2010/main" val="2255097546"/>
       </p:ext>
     </p:extLst>
   </p:cSld>
@@ -7618,7 +7721,7 @@
           <p:cNvPr id="2" name="Заголовок 1">
             <a:extLst>
               <a:ext uri="{FF2B5EF4-FFF2-40B4-BE49-F238E27FC236}">
-                <a16:creationId xmlns:a16="http://schemas.microsoft.com/office/drawing/2014/main" id="{1DB0DD21-71E9-BE84-8E00-9CE16289D288}"/>
+                <a16:creationId xmlns:a16="http://schemas.microsoft.com/office/drawing/2014/main" id="{F806401E-A251-F1E3-CF12-471095BD7730}"/>
               </a:ext>
             </a:extLst>
           </p:cNvPr>
@@ -7636,7 +7739,7 @@
           <a:p>
             <a:r>
               <a:rPr lang="ru-RU" dirty="0"/>
-              <a:t>Дальнейшее развитие проекта</a:t>
+              <a:t>Заключение</a:t>
             </a:r>
           </a:p>
         </p:txBody>
@@ -7646,7 +7749,7 @@
           <p:cNvPr id="3" name="Объект 2">
             <a:extLst>
               <a:ext uri="{FF2B5EF4-FFF2-40B4-BE49-F238E27FC236}">
-                <a16:creationId xmlns:a16="http://schemas.microsoft.com/office/drawing/2014/main" id="{07BF2EF1-F377-C4F2-FC96-4B0A712EE747}"/>
+                <a16:creationId xmlns:a16="http://schemas.microsoft.com/office/drawing/2014/main" id="{1CC2F877-A019-C601-8155-8423107E1A9B}"/>
               </a:ext>
             </a:extLst>
           </p:cNvPr>
@@ -7657,20 +7760,62 @@
             <p:ph idx="1"/>
           </p:nvPr>
         </p:nvSpPr>
-        <p:spPr>
-          <a:xfrm>
-            <a:off x="420359" y="1706240"/>
-            <a:ext cx="10554574" cy="3636511"/>
-          </a:xfrm>
-        </p:spPr>
+        <p:spPr/>
         <p:txBody>
           <a:bodyPr/>
           <a:lstStyle/>
           <a:p>
             <a:r>
-              <a:rPr lang="ru-RU" dirty="0"/>
-              <a:t>В будущем планируется продолжить разработку нашей игры. Также планируется добавить систему миссий и заданий, выполняя которые игрок будет получать игровую валюту, которую сможет обменять на улучшенную броню или оружие. </a:t>
-            </a:r>
+              <a:rPr lang="ru-RU" dirty="0">
+                <a:latin typeface="Century Gothic (Основной текст)"/>
+              </a:rPr>
+              <a:t>В результате проделанной работы была разработана полноценная 2</a:t>
+            </a:r>
+            <a:r>
+              <a:rPr lang="en-US" dirty="0">
+                <a:latin typeface="Century Gothic (Основной текст)"/>
+              </a:rPr>
+              <a:t>d</a:t>
+            </a:r>
+            <a:r>
+              <a:rPr lang="ru-RU" dirty="0">
+                <a:latin typeface="Century Gothic (Основной текст)"/>
+              </a:rPr>
+              <a:t> онлайн игра с системой битв, сюжетом и изображениями. Также в игре можно открыть настройки как в меню, так и во время игры. </a:t>
+            </a:r>
+          </a:p>
+          <a:p>
+            <a:r>
+              <a:rPr lang="ru-RU" dirty="0">
+                <a:latin typeface="Century Gothic (Основной текст)"/>
+                <a:ea typeface="Times New Roman"/>
+                <a:cs typeface="Times New Roman" panose="02020603050405020304" pitchFamily="18" charset="0"/>
+              </a:rPr>
+              <a:t>Нами были получены знания по игровой разработке в небольшой команде, а так же мы получили большой опыт в работе с нейросетями.</a:t>
+            </a:r>
+            <a:r>
+              <a:rPr lang="en-US" dirty="0">
+                <a:latin typeface="Century Gothic (Основной текст)"/>
+                <a:ea typeface="Times New Roman"/>
+                <a:cs typeface="Times New Roman" panose="02020603050405020304" pitchFamily="18" charset="0"/>
+              </a:rPr>
+              <a:t> </a:t>
+            </a:r>
+            <a:r>
+              <a:rPr lang="ru-RU" dirty="0">
+                <a:latin typeface="Century Gothic (Основной текст)"/>
+                <a:ea typeface="Times New Roman"/>
+                <a:cs typeface="Times New Roman" panose="02020603050405020304" pitchFamily="18" charset="0"/>
+              </a:rPr>
+              <a:t>Полученные навыки программирования позволят нам дальше развивать свой продукт и создавать новые увлекательные игры.</a:t>
+            </a:r>
+          </a:p>
+          <a:p>
+            <a:endParaRPr lang="ru-RU" dirty="0">
+              <a:latin typeface="Times New Roman" panose="02020603050405020304" pitchFamily="18" charset="0"/>
+              <a:ea typeface="Times New Roman"/>
+              <a:cs typeface="Times New Roman" panose="02020603050405020304" pitchFamily="18" charset="0"/>
+            </a:endParaRPr>
           </a:p>
           <a:p>
             <a:endParaRPr lang="ru-RU" dirty="0"/>
@@ -7680,7 +7825,7 @@
     </p:spTree>
     <p:extLst>
       <p:ext uri="{BB962C8B-B14F-4D97-AF65-F5344CB8AC3E}">
-        <p14:creationId xmlns:p14="http://schemas.microsoft.com/office/powerpoint/2010/main" val="1433178001"/>
+        <p14:creationId xmlns:p14="http://schemas.microsoft.com/office/powerpoint/2010/main" val="2255097546"/>
       </p:ext>
     </p:extLst>
   </p:cSld>

--- a/Документация/origin.pptx
+++ b/Документация/origin.pptx
@@ -218,7 +218,7 @@
           <a:effectLst/>
           <a:extLst>
             <a:ext uri="{91240B29-F687-4f45-9708-019B960494DF}">
-              <a14:hiddenLine xmlns="" xmlns:a14="http://schemas.microsoft.com/office/drawing/2010/main" w="9525">
+              <a14:hiddenLine xmlns:a14="http://schemas.microsoft.com/office/drawing/2010/main" xmlns="" w="9525">
                 <a:solidFill>
                   <a:srgbClr val="000000"/>
                 </a:solidFill>
@@ -417,7 +417,7 @@
           <a:p>
             <a:fld id="{347CDDA7-3639-427C-82C8-5EF73E14CBE3}" type="datetimeFigureOut">
               <a:rPr lang="ru-RU" smtClean="0"/>
-              <a:t>16.01.2026</a:t>
+              <a:t>19.01.2026</a:t>
             </a:fld>
             <a:endParaRPr lang="ru-RU"/>
           </a:p>
@@ -735,7 +735,7 @@
           <a:p>
             <a:fld id="{347CDDA7-3639-427C-82C8-5EF73E14CBE3}" type="datetimeFigureOut">
               <a:rPr lang="ru-RU" smtClean="0"/>
-              <a:t>16.01.2026</a:t>
+              <a:t>19.01.2026</a:t>
             </a:fld>
             <a:endParaRPr lang="ru-RU"/>
           </a:p>
@@ -1230,7 +1230,7 @@
           <a:p>
             <a:fld id="{347CDDA7-3639-427C-82C8-5EF73E14CBE3}" type="datetimeFigureOut">
               <a:rPr lang="ru-RU" smtClean="0"/>
-              <a:t>16.01.2026</a:t>
+              <a:t>19.01.2026</a:t>
             </a:fld>
             <a:endParaRPr lang="ru-RU"/>
           </a:p>
@@ -1606,7 +1606,7 @@
           <a:p>
             <a:fld id="{347CDDA7-3639-427C-82C8-5EF73E14CBE3}" type="datetimeFigureOut">
               <a:rPr lang="ru-RU" smtClean="0"/>
-              <a:t>16.01.2026</a:t>
+              <a:t>19.01.2026</a:t>
             </a:fld>
             <a:endParaRPr lang="ru-RU"/>
           </a:p>
@@ -1761,7 +1761,7 @@
           <a:ln/>
           <a:extLst>
             <a:ext uri="{91240B29-F687-4f45-9708-019B960494DF}">
-              <a14:hiddenLine xmlns="" xmlns:a14="http://schemas.microsoft.com/office/drawing/2010/main" w="9525">
+              <a14:hiddenLine xmlns:a14="http://schemas.microsoft.com/office/drawing/2010/main" xmlns="" w="9525">
                 <a:solidFill>
                   <a:srgbClr val="000000"/>
                 </a:solidFill>
@@ -1886,7 +1886,7 @@
           <a:p>
             <a:fld id="{347CDDA7-3639-427C-82C8-5EF73E14CBE3}" type="datetimeFigureOut">
               <a:rPr lang="ru-RU" smtClean="0"/>
-              <a:t>16.01.2026</a:t>
+              <a:t>19.01.2026</a:t>
             </a:fld>
             <a:endParaRPr lang="ru-RU"/>
           </a:p>
@@ -2043,7 +2043,7 @@
           <a:ln/>
           <a:extLst>
             <a:ext uri="{91240B29-F687-4f45-9708-019B960494DF}">
-              <a14:hiddenLine xmlns="" xmlns:a14="http://schemas.microsoft.com/office/drawing/2010/main" w="9525">
+              <a14:hiddenLine xmlns:a14="http://schemas.microsoft.com/office/drawing/2010/main" xmlns="" w="9525">
                 <a:solidFill>
                   <a:srgbClr val="000000"/>
                 </a:solidFill>
@@ -2178,7 +2178,7 @@
           <a:p>
             <a:fld id="{347CDDA7-3639-427C-82C8-5EF73E14CBE3}" type="datetimeFigureOut">
               <a:rPr lang="ru-RU" smtClean="0"/>
-              <a:t>16.01.2026</a:t>
+              <a:t>19.01.2026</a:t>
             </a:fld>
             <a:endParaRPr lang="ru-RU"/>
           </a:p>
@@ -2333,7 +2333,7 @@
           <a:ln/>
           <a:extLst>
             <a:ext uri="{91240B29-F687-4f45-9708-019B960494DF}">
-              <a14:hiddenLine xmlns="" xmlns:a14="http://schemas.microsoft.com/office/drawing/2010/main" w="9525">
+              <a14:hiddenLine xmlns:a14="http://schemas.microsoft.com/office/drawing/2010/main" xmlns="" w="9525">
                 <a:solidFill>
                   <a:srgbClr val="000000"/>
                 </a:solidFill>
@@ -2468,7 +2468,7 @@
           <a:p>
             <a:fld id="{347CDDA7-3639-427C-82C8-5EF73E14CBE3}" type="datetimeFigureOut">
               <a:rPr lang="ru-RU" smtClean="0"/>
-              <a:t>16.01.2026</a:t>
+              <a:t>19.01.2026</a:t>
             </a:fld>
             <a:endParaRPr lang="ru-RU"/>
           </a:p>
@@ -2818,7 +2818,7 @@
           <a:p>
             <a:fld id="{347CDDA7-3639-427C-82C8-5EF73E14CBE3}" type="datetimeFigureOut">
               <a:rPr lang="ru-RU" smtClean="0"/>
-              <a:t>16.01.2026</a:t>
+              <a:t>19.01.2026</a:t>
             </a:fld>
             <a:endParaRPr lang="ru-RU"/>
           </a:p>
@@ -2973,7 +2973,7 @@
           <a:ln/>
           <a:extLst>
             <a:ext uri="{91240B29-F687-4f45-9708-019B960494DF}">
-              <a14:hiddenLine xmlns="" xmlns:a14="http://schemas.microsoft.com/office/drawing/2010/main" w="9525">
+              <a14:hiddenLine xmlns:a14="http://schemas.microsoft.com/office/drawing/2010/main" xmlns="" w="9525">
                 <a:solidFill>
                   <a:srgbClr val="000000"/>
                 </a:solidFill>
@@ -3164,7 +3164,7 @@
           <a:p>
             <a:fld id="{347CDDA7-3639-427C-82C8-5EF73E14CBE3}" type="datetimeFigureOut">
               <a:rPr lang="ru-RU" smtClean="0"/>
-              <a:t>16.01.2026</a:t>
+              <a:t>19.01.2026</a:t>
             </a:fld>
             <a:endParaRPr lang="ru-RU"/>
           </a:p>
@@ -3319,7 +3319,7 @@
           <a:ln/>
           <a:extLst>
             <a:ext uri="{91240B29-F687-4f45-9708-019B960494DF}">
-              <a14:hiddenLine xmlns="" xmlns:a14="http://schemas.microsoft.com/office/drawing/2010/main" w="9525">
+              <a14:hiddenLine xmlns:a14="http://schemas.microsoft.com/office/drawing/2010/main" xmlns="" w="9525">
                 <a:solidFill>
                   <a:srgbClr val="000000"/>
                 </a:solidFill>
@@ -3648,7 +3648,7 @@
           <a:p>
             <a:fld id="{347CDDA7-3639-427C-82C8-5EF73E14CBE3}" type="datetimeFigureOut">
               <a:rPr lang="ru-RU" smtClean="0"/>
-              <a:t>16.01.2026</a:t>
+              <a:t>19.01.2026</a:t>
             </a:fld>
             <a:endParaRPr lang="ru-RU"/>
           </a:p>
@@ -3803,7 +3803,7 @@
           <a:ln/>
           <a:extLst>
             <a:ext uri="{91240B29-F687-4f45-9708-019B960494DF}">
-              <a14:hiddenLine xmlns="" xmlns:a14="http://schemas.microsoft.com/office/drawing/2010/main" w="9525">
+              <a14:hiddenLine xmlns:a14="http://schemas.microsoft.com/office/drawing/2010/main" xmlns="" w="9525">
                 <a:solidFill>
                   <a:srgbClr val="000000"/>
                 </a:solidFill>
@@ -3876,7 +3876,7 @@
           <a:p>
             <a:fld id="{347CDDA7-3639-427C-82C8-5EF73E14CBE3}" type="datetimeFigureOut">
               <a:rPr lang="ru-RU" smtClean="0"/>
-              <a:t>16.01.2026</a:t>
+              <a:t>19.01.2026</a:t>
             </a:fld>
             <a:endParaRPr lang="ru-RU"/>
           </a:p>
@@ -3971,7 +3971,7 @@
           <a:p>
             <a:fld id="{347CDDA7-3639-427C-82C8-5EF73E14CBE3}" type="datetimeFigureOut">
               <a:rPr lang="ru-RU" smtClean="0"/>
-              <a:t>16.01.2026</a:t>
+              <a:t>19.01.2026</a:t>
             </a:fld>
             <a:endParaRPr lang="ru-RU"/>
           </a:p>
@@ -4239,7 +4239,7 @@
           <a:ln/>
           <a:extLst>
             <a:ext uri="{91240B29-F687-4f45-9708-019B960494DF}">
-              <a14:hiddenLine xmlns="" xmlns:a14="http://schemas.microsoft.com/office/drawing/2010/main" w="9525">
+              <a14:hiddenLine xmlns:a14="http://schemas.microsoft.com/office/drawing/2010/main" xmlns="" w="9525">
                 <a:solidFill>
                   <a:srgbClr val="000000"/>
                 </a:solidFill>
@@ -4445,7 +4445,7 @@
           <a:p>
             <a:fld id="{347CDDA7-3639-427C-82C8-5EF73E14CBE3}" type="datetimeFigureOut">
               <a:rPr lang="ru-RU" smtClean="0"/>
-              <a:t>16.01.2026</a:t>
+              <a:t>19.01.2026</a:t>
             </a:fld>
             <a:endParaRPr lang="ru-RU"/>
           </a:p>
@@ -4758,7 +4758,7 @@
           <a:p>
             <a:fld id="{347CDDA7-3639-427C-82C8-5EF73E14CBE3}" type="datetimeFigureOut">
               <a:rPr lang="ru-RU" smtClean="0"/>
-              <a:t>16.01.2026</a:t>
+              <a:t>19.01.2026</a:t>
             </a:fld>
             <a:endParaRPr lang="ru-RU"/>
           </a:p>
@@ -5028,7 +5028,7 @@
           <a:p>
             <a:fld id="{347CDDA7-3639-427C-82C8-5EF73E14CBE3}" type="datetimeFigureOut">
               <a:rPr lang="ru-RU" smtClean="0"/>
-              <a:t>16.01.2026</a:t>
+              <a:t>19.01.2026</a:t>
             </a:fld>
             <a:endParaRPr lang="ru-RU"/>
           </a:p>
@@ -6176,7 +6176,7 @@
                 <a:hlinkClick r:id="rId4">
                   <a:extLst>
                     <a:ext uri="{A12FA001-AC4F-418D-AE19-62706E023703}">
-                      <ahyp:hlinkClr xmlns:ahyp="http://schemas.microsoft.com/office/drawing/2018/hyperlinkcolor" xmlns="" val="tx"/>
+                      <ahyp:hlinkClr xmlns="" xmlns:ahyp="http://schemas.microsoft.com/office/drawing/2018/hyperlinkcolor" val="tx"/>
                     </a:ext>
                   </a:extLst>
                 </a:hlinkClick>
@@ -7146,9 +7146,16 @@
             <p:ph idx="1"/>
           </p:nvPr>
         </p:nvSpPr>
-        <p:spPr/>
-        <p:txBody>
-          <a:bodyPr/>
+        <p:spPr>
+          <a:xfrm>
+            <a:off x="625282" y="2380548"/>
+            <a:ext cx="4623726" cy="3636511"/>
+          </a:xfrm>
+        </p:spPr>
+        <p:txBody>
+          <a:bodyPr>
+            <a:normAutofit fontScale="92500" lnSpcReduction="20000"/>
+          </a:bodyPr>
           <a:lstStyle/>
           <a:p>
             <a:r>
@@ -7161,6 +7168,82 @@
               <a:rPr lang="ru-RU" dirty="0"/>
               <a:t>Основной цикл игры предполагает постоянную проверку и обработку событий, таких как нажатие клавиш, клики мыши. Также игровой цикл предполагает обновление состояний, таких как обновление анимации, отправка данных на сервер.</a:t>
             </a:r>
+          </a:p>
+        </p:txBody>
+      </p:sp>
+      <p:pic>
+        <p:nvPicPr>
+          <p:cNvPr id="4" name="Рисунок 3"/>
+          <p:cNvPicPr>
+            <a:picLocks noChangeAspect="1"/>
+          </p:cNvPicPr>
+          <p:nvPr/>
+        </p:nvPicPr>
+        <p:blipFill>
+          <a:blip r:embed="rId2">
+            <a:extLst>
+              <a:ext uri="{28A0092B-C50C-407E-A947-70E740481C1C}">
+                <a14:useLocalDpi xmlns:a14="http://schemas.microsoft.com/office/drawing/2010/main" val="0"/>
+              </a:ext>
+            </a:extLst>
+          </a:blip>
+          <a:stretch>
+            <a:fillRect/>
+          </a:stretch>
+        </p:blipFill>
+        <p:spPr>
+          <a:xfrm>
+            <a:off x="8127779" y="2074983"/>
+            <a:ext cx="3254219" cy="3464169"/>
+          </a:xfrm>
+          <a:prstGeom prst="rect">
+            <a:avLst/>
+          </a:prstGeom>
+        </p:spPr>
+      </p:pic>
+      <p:sp>
+        <p:nvSpPr>
+          <p:cNvPr id="6" name="TextBox 5"/>
+          <p:cNvSpPr txBox="1"/>
+          <p:nvPr/>
+        </p:nvSpPr>
+        <p:spPr>
+          <a:xfrm>
+            <a:off x="8531191" y="5520186"/>
+            <a:ext cx="3544268" cy="553998"/>
+          </a:xfrm>
+          <a:prstGeom prst="rect">
+            <a:avLst/>
+          </a:prstGeom>
+          <a:noFill/>
+        </p:spPr>
+        <p:txBody>
+          <a:bodyPr wrap="square" rtlCol="0">
+            <a:spAutoFit/>
+          </a:bodyPr>
+          <a:lstStyle/>
+          <a:p>
+            <a:r>
+              <a:rPr lang="ru-RU" sz="1500" dirty="0" smtClean="0"/>
+              <a:t>Рис.3 – пример обработки нажатия клавиш «</a:t>
+            </a:r>
+            <a:r>
+              <a:rPr lang="en-US" sz="1500" dirty="0" smtClean="0"/>
+              <a:t>t</a:t>
+            </a:r>
+            <a:r>
+              <a:rPr lang="ru-RU" sz="1500" dirty="0" smtClean="0"/>
+              <a:t>» и «</a:t>
+            </a:r>
+            <a:r>
+              <a:rPr lang="en-US" sz="1500" dirty="0" smtClean="0"/>
+              <a:t>Esc</a:t>
+            </a:r>
+            <a:r>
+              <a:rPr lang="ru-RU" sz="1500" dirty="0" smtClean="0"/>
+              <a:t>»</a:t>
+            </a:r>
+            <a:endParaRPr lang="ru-RU" sz="1500" dirty="0"/>
           </a:p>
         </p:txBody>
       </p:sp>
@@ -7227,9 +7310,16 @@
             <p:ph idx="1"/>
           </p:nvPr>
         </p:nvSpPr>
-        <p:spPr/>
-        <p:txBody>
-          <a:bodyPr/>
+        <p:spPr>
+          <a:xfrm>
+            <a:off x="291174" y="2354172"/>
+            <a:ext cx="6083250" cy="3636511"/>
+          </a:xfrm>
+        </p:spPr>
+        <p:txBody>
+          <a:bodyPr>
+            <a:normAutofit fontScale="92500" lnSpcReduction="20000"/>
+          </a:bodyPr>
           <a:lstStyle/>
           <a:p>
             <a:r>
@@ -7295,6 +7385,73 @@
             <a:r>
               <a:rPr lang="ru-RU" dirty="0"/>
               <a:t> – это отдельное приложение, которое включает в себя регистрацию и вход с проверкой в базе данных, автоматическую проверку при каждом запуске, загрузку новых версий с прогресс-баром и отображением статуса, безопасную передачу токена авторизации в игру и запуск игры с правильными параметрами подключения</a:t>
+            </a:r>
+          </a:p>
+        </p:txBody>
+      </p:sp>
+      <p:pic>
+        <p:nvPicPr>
+          <p:cNvPr id="4" name="Рисунок 3"/>
+          <p:cNvPicPr>
+            <a:picLocks noChangeAspect="1"/>
+          </p:cNvPicPr>
+          <p:nvPr/>
+        </p:nvPicPr>
+        <p:blipFill>
+          <a:blip r:embed="rId2">
+            <a:extLst>
+              <a:ext uri="{28A0092B-C50C-407E-A947-70E740481C1C}">
+                <a14:useLocalDpi xmlns:a14="http://schemas.microsoft.com/office/drawing/2010/main" val="0"/>
+              </a:ext>
+            </a:extLst>
+          </a:blip>
+          <a:stretch>
+            <a:fillRect/>
+          </a:stretch>
+        </p:blipFill>
+        <p:spPr>
+          <a:xfrm>
+            <a:off x="8337375" y="2269706"/>
+            <a:ext cx="3373979" cy="3252667"/>
+          </a:xfrm>
+          <a:prstGeom prst="rect">
+            <a:avLst/>
+          </a:prstGeom>
+        </p:spPr>
+      </p:pic>
+      <p:sp>
+        <p:nvSpPr>
+          <p:cNvPr id="5" name="TextBox 4"/>
+          <p:cNvSpPr txBox="1"/>
+          <p:nvPr/>
+        </p:nvSpPr>
+        <p:spPr>
+          <a:xfrm>
+            <a:off x="8862646" y="5621351"/>
+            <a:ext cx="2611612" cy="369332"/>
+          </a:xfrm>
+          <a:prstGeom prst="rect">
+            <a:avLst/>
+          </a:prstGeom>
+          <a:noFill/>
+        </p:spPr>
+        <p:txBody>
+          <a:bodyPr wrap="none" rtlCol="0">
+            <a:spAutoFit/>
+          </a:bodyPr>
+          <a:lstStyle/>
+          <a:p>
+            <a:r>
+              <a:rPr lang="ru-RU" dirty="0" smtClean="0"/>
+              <a:t>Рис.3 – </a:t>
+            </a:r>
+            <a:r>
+              <a:rPr lang="ru-RU" dirty="0" err="1" smtClean="0"/>
+              <a:t>лаунчер</a:t>
+            </a:r>
+            <a:r>
+              <a:rPr lang="ru-RU" dirty="0" smtClean="0"/>
+              <a:t> игры</a:t>
             </a:r>
             <a:endParaRPr lang="ru-RU" dirty="0"/>
           </a:p>

--- a/Документация/origin.pptx
+++ b/Документация/origin.pptx
@@ -5858,6 +5858,13 @@
   <p:clrMapOvr>
     <a:masterClrMapping/>
   </p:clrMapOvr>
+  <p:timing>
+    <p:tnLst>
+      <p:par>
+        <p:cTn id="1" dur="indefinite" restart="never" nodeType="tmRoot"/>
+      </p:par>
+    </p:tnLst>
+  </p:timing>
 </p:sld>
 </file>
 
@@ -5952,6 +5959,13 @@
   <p:clrMapOvr>
     <a:masterClrMapping/>
   </p:clrMapOvr>
+  <p:timing>
+    <p:tnLst>
+      <p:par>
+        <p:cTn id="1" dur="indefinite" restart="never" nodeType="tmRoot"/>
+      </p:par>
+    </p:tnLst>
+  </p:timing>
 </p:sld>
 </file>
 
@@ -6241,6 +6255,13 @@
   <p:clrMapOvr>
     <a:masterClrMapping/>
   </p:clrMapOvr>
+  <p:timing>
+    <p:tnLst>
+      <p:par>
+        <p:cTn id="1" dur="indefinite" restart="never" nodeType="tmRoot"/>
+      </p:par>
+    </p:tnLst>
+  </p:timing>
 </p:sld>
 </file>
 
@@ -6334,6 +6355,13 @@
   <p:clrMapOvr>
     <a:masterClrMapping/>
   </p:clrMapOvr>
+  <p:timing>
+    <p:tnLst>
+      <p:par>
+        <p:cTn id="1" dur="indefinite" restart="never" nodeType="tmRoot"/>
+      </p:par>
+    </p:tnLst>
+  </p:timing>
 </p:sld>
 </file>
 
@@ -6547,6 +6575,13 @@
   <p:clrMapOvr>
     <a:masterClrMapping/>
   </p:clrMapOvr>
+  <p:timing>
+    <p:tnLst>
+      <p:par>
+        <p:cTn id="1" dur="indefinite" restart="never" nodeType="tmRoot"/>
+      </p:par>
+    </p:tnLst>
+  </p:timing>
 </p:sld>
 </file>
 
@@ -6744,6 +6779,13 @@
   <p:clrMapOvr>
     <a:masterClrMapping/>
   </p:clrMapOvr>
+  <p:timing>
+    <p:tnLst>
+      <p:par>
+        <p:cTn id="1" dur="indefinite" restart="never" nodeType="tmRoot"/>
+      </p:par>
+    </p:tnLst>
+  </p:timing>
 </p:sld>
 </file>
 
@@ -6945,6 +6987,13 @@
   <p:clrMapOvr>
     <a:masterClrMapping/>
   </p:clrMapOvr>
+  <p:timing>
+    <p:tnLst>
+      <p:par>
+        <p:cTn id="1" dur="indefinite" restart="never" nodeType="tmRoot"/>
+      </p:par>
+    </p:tnLst>
+  </p:timing>
 </p:sld>
 </file>
 
@@ -7082,6 +7131,13 @@
   <p:clrMapOvr>
     <a:masterClrMapping/>
   </p:clrMapOvr>
+  <p:timing>
+    <p:tnLst>
+      <p:par>
+        <p:cTn id="1" dur="indefinite" restart="never" nodeType="tmRoot"/>
+      </p:par>
+    </p:tnLst>
+  </p:timing>
 </p:sld>
 </file>
 
@@ -7257,6 +7313,13 @@
   <p:clrMapOvr>
     <a:masterClrMapping/>
   </p:clrMapOvr>
+  <p:timing>
+    <p:tnLst>
+      <p:par>
+        <p:cTn id="1" dur="indefinite" restart="never" nodeType="tmRoot"/>
+      </p:par>
+    </p:tnLst>
+  </p:timing>
 </p:sld>
 </file>
 
@@ -7467,6 +7530,13 @@
   <p:clrMapOvr>
     <a:masterClrMapping/>
   </p:clrMapOvr>
+  <p:timing>
+    <p:tnLst>
+      <p:par>
+        <p:cTn id="1" dur="indefinite" restart="never" nodeType="tmRoot"/>
+      </p:par>
+    </p:tnLst>
+  </p:timing>
 </p:sld>
 </file>
 
@@ -7853,6 +7923,13 @@
   <p:clrMapOvr>
     <a:masterClrMapping/>
   </p:clrMapOvr>
+  <p:timing>
+    <p:tnLst>
+      <p:par>
+        <p:cTn id="1" dur="indefinite" restart="never" nodeType="tmRoot"/>
+      </p:par>
+    </p:tnLst>
+  </p:timing>
 </p:sld>
 </file>
 
@@ -7964,8 +8041,52 @@
                 <a:ea typeface="Times New Roman"/>
                 <a:cs typeface="Times New Roman" panose="02020603050405020304" pitchFamily="18" charset="0"/>
               </a:rPr>
-              <a:t>Полученные навыки программирования позволят нам дальше развивать свой продукт и создавать новые увлекательные игры.</a:t>
-            </a:r>
+              <a:t>Полученные навыки программирования позволят нам дальше развивать свой продукт и создавать новые увлекательные игры</a:t>
+            </a:r>
+            <a:r>
+              <a:rPr lang="ru-RU" dirty="0" smtClean="0">
+                <a:latin typeface="Century Gothic (Основной текст)"/>
+                <a:ea typeface="Times New Roman"/>
+                <a:cs typeface="Times New Roman" panose="02020603050405020304" pitchFamily="18" charset="0"/>
+              </a:rPr>
+              <a:t>.</a:t>
+            </a:r>
+            <a:endParaRPr lang="en-US" dirty="0" smtClean="0">
+              <a:latin typeface="Century Gothic (Основной текст)"/>
+              <a:ea typeface="Times New Roman"/>
+              <a:cs typeface="Times New Roman" panose="02020603050405020304" pitchFamily="18" charset="0"/>
+            </a:endParaRPr>
+          </a:p>
+          <a:p>
+            <a:r>
+              <a:rPr lang="en-US" dirty="0" smtClean="0">
+                <a:latin typeface="Century Gothic (Основной текст)"/>
+                <a:ea typeface="Times New Roman"/>
+                <a:cs typeface="Times New Roman" panose="02020603050405020304" pitchFamily="18" charset="0"/>
+              </a:rPr>
+              <a:t>QR-</a:t>
+            </a:r>
+            <a:r>
+              <a:rPr lang="ru-RU" dirty="0" smtClean="0">
+                <a:latin typeface="Century Gothic (Основной текст)"/>
+                <a:ea typeface="Times New Roman"/>
+                <a:cs typeface="Times New Roman" panose="02020603050405020304" pitchFamily="18" charset="0"/>
+              </a:rPr>
+              <a:t>код на репозиторий </a:t>
+            </a:r>
+            <a:r>
+              <a:rPr lang="en-US" dirty="0" smtClean="0">
+                <a:latin typeface="Century Gothic (Основной текст)"/>
+                <a:ea typeface="Times New Roman"/>
+                <a:cs typeface="Times New Roman" panose="02020603050405020304" pitchFamily="18" charset="0"/>
+              </a:rPr>
+              <a:t>Github:</a:t>
+            </a:r>
+            <a:endParaRPr lang="ru-RU" dirty="0">
+              <a:latin typeface="Century Gothic (Основной текст)"/>
+              <a:ea typeface="Times New Roman"/>
+              <a:cs typeface="Times New Roman" panose="02020603050405020304" pitchFamily="18" charset="0"/>
+            </a:endParaRPr>
           </a:p>
           <a:p>
             <a:endParaRPr lang="ru-RU" dirty="0">
@@ -7979,6 +8100,49 @@
           </a:p>
         </p:txBody>
       </p:sp>
+      <p:pic>
+        <p:nvPicPr>
+          <p:cNvPr id="4" name="Рисунок 3"/>
+          <p:cNvPicPr>
+            <a:picLocks noChangeAspect="1"/>
+          </p:cNvPicPr>
+          <p:nvPr/>
+        </p:nvPicPr>
+        <p:blipFill>
+          <a:blip r:embed="rId2" cstate="hqprint">
+            <a:extLst>
+              <a:ext uri="{28A0092B-C50C-407E-A947-70E740481C1C}">
+                <a14:useLocalDpi xmlns:a14="http://schemas.microsoft.com/office/drawing/2010/main" val="0"/>
+              </a:ext>
+            </a:extLst>
+          </a:blip>
+          <a:stretch>
+            <a:fillRect/>
+          </a:stretch>
+        </p:blipFill>
+        <p:spPr>
+          <a:xfrm>
+            <a:off x="4765431" y="4515192"/>
+            <a:ext cx="1858108" cy="1858108"/>
+          </a:xfrm>
+          <a:prstGeom prst="roundRect">
+            <a:avLst>
+              <a:gd name="adj" fmla="val 8594"/>
+            </a:avLst>
+          </a:prstGeom>
+          <a:solidFill>
+            <a:srgbClr val="FFFFFF">
+              <a:shade val="85000"/>
+            </a:srgbClr>
+          </a:solidFill>
+          <a:ln>
+            <a:noFill/>
+          </a:ln>
+          <a:effectLst>
+            <a:reflection blurRad="12700" stA="38000" endPos="28000" dist="5000" dir="5400000" sy="-100000" algn="bl" rotWithShape="0"/>
+          </a:effectLst>
+        </p:spPr>
+      </p:pic>
     </p:spTree>
     <p:extLst>
       <p:ext uri="{BB962C8B-B14F-4D97-AF65-F5344CB8AC3E}">
@@ -7989,6 +8153,13 @@
   <p:clrMapOvr>
     <a:masterClrMapping/>
   </p:clrMapOvr>
+  <p:timing>
+    <p:tnLst>
+      <p:par>
+        <p:cTn id="1" dur="indefinite" restart="never" nodeType="tmRoot"/>
+      </p:par>
+    </p:tnLst>
+  </p:timing>
 </p:sld>
 </file>
 

--- a/Документация/origin.pptx
+++ b/Документация/origin.pptx
@@ -218,7 +218,7 @@
           <a:effectLst/>
           <a:extLst>
             <a:ext uri="{91240B29-F687-4f45-9708-019B960494DF}">
-              <a14:hiddenLine xmlns:a14="http://schemas.microsoft.com/office/drawing/2010/main" xmlns="" w="9525">
+              <a14:hiddenLine xmlns="" xmlns:a14="http://schemas.microsoft.com/office/drawing/2010/main" w="9525">
                 <a:solidFill>
                   <a:srgbClr val="000000"/>
                 </a:solidFill>
@@ -1761,7 +1761,7 @@
           <a:ln/>
           <a:extLst>
             <a:ext uri="{91240B29-F687-4f45-9708-019B960494DF}">
-              <a14:hiddenLine xmlns:a14="http://schemas.microsoft.com/office/drawing/2010/main" xmlns="" w="9525">
+              <a14:hiddenLine xmlns="" xmlns:a14="http://schemas.microsoft.com/office/drawing/2010/main" w="9525">
                 <a:solidFill>
                   <a:srgbClr val="000000"/>
                 </a:solidFill>
@@ -2043,7 +2043,7 @@
           <a:ln/>
           <a:extLst>
             <a:ext uri="{91240B29-F687-4f45-9708-019B960494DF}">
-              <a14:hiddenLine xmlns:a14="http://schemas.microsoft.com/office/drawing/2010/main" xmlns="" w="9525">
+              <a14:hiddenLine xmlns="" xmlns:a14="http://schemas.microsoft.com/office/drawing/2010/main" w="9525">
                 <a:solidFill>
                   <a:srgbClr val="000000"/>
                 </a:solidFill>
@@ -2333,7 +2333,7 @@
           <a:ln/>
           <a:extLst>
             <a:ext uri="{91240B29-F687-4f45-9708-019B960494DF}">
-              <a14:hiddenLine xmlns:a14="http://schemas.microsoft.com/office/drawing/2010/main" xmlns="" w="9525">
+              <a14:hiddenLine xmlns="" xmlns:a14="http://schemas.microsoft.com/office/drawing/2010/main" w="9525">
                 <a:solidFill>
                   <a:srgbClr val="000000"/>
                 </a:solidFill>
@@ -2973,7 +2973,7 @@
           <a:ln/>
           <a:extLst>
             <a:ext uri="{91240B29-F687-4f45-9708-019B960494DF}">
-              <a14:hiddenLine xmlns:a14="http://schemas.microsoft.com/office/drawing/2010/main" xmlns="" w="9525">
+              <a14:hiddenLine xmlns="" xmlns:a14="http://schemas.microsoft.com/office/drawing/2010/main" w="9525">
                 <a:solidFill>
                   <a:srgbClr val="000000"/>
                 </a:solidFill>
@@ -3319,7 +3319,7 @@
           <a:ln/>
           <a:extLst>
             <a:ext uri="{91240B29-F687-4f45-9708-019B960494DF}">
-              <a14:hiddenLine xmlns:a14="http://schemas.microsoft.com/office/drawing/2010/main" xmlns="" w="9525">
+              <a14:hiddenLine xmlns="" xmlns:a14="http://schemas.microsoft.com/office/drawing/2010/main" w="9525">
                 <a:solidFill>
                   <a:srgbClr val="000000"/>
                 </a:solidFill>
@@ -3803,7 +3803,7 @@
           <a:ln/>
           <a:extLst>
             <a:ext uri="{91240B29-F687-4f45-9708-019B960494DF}">
-              <a14:hiddenLine xmlns:a14="http://schemas.microsoft.com/office/drawing/2010/main" xmlns="" w="9525">
+              <a14:hiddenLine xmlns="" xmlns:a14="http://schemas.microsoft.com/office/drawing/2010/main" w="9525">
                 <a:solidFill>
                   <a:srgbClr val="000000"/>
                 </a:solidFill>
@@ -4239,7 +4239,7 @@
           <a:ln/>
           <a:extLst>
             <a:ext uri="{91240B29-F687-4f45-9708-019B960494DF}">
-              <a14:hiddenLine xmlns:a14="http://schemas.microsoft.com/office/drawing/2010/main" xmlns="" w="9525">
+              <a14:hiddenLine xmlns="" xmlns:a14="http://schemas.microsoft.com/office/drawing/2010/main" w="9525">
                 <a:solidFill>
                   <a:srgbClr val="000000"/>
                 </a:solidFill>
@@ -5520,12 +5520,51 @@
               </a:rPr>
             </a:br>
             <a:r>
-              <a:rPr lang="ru-RU" sz="2000" dirty="0">
+              <a:rPr lang="ru-RU" sz="2000" dirty="0" smtClean="0">
                 <a:latin typeface="Times New Roman"/>
                 <a:ea typeface="Times New Roman"/>
                 <a:cs typeface="Times New Roman"/>
               </a:rPr>
-              <a:t>«ТЕКСТОВЫЙ КВЕСТ НА ЯЗЫКЕ ПРОГРАММИРОВАНИЯ PYTHON С ИСПОЛЬЗОВАНИЕМ ВНЕШНЕЙ БИБЛИОТЕКИ PYGAME»</a:t>
+              <a:t>«МНОГОПОЛЬЗОВАТЕЛЬСКАЯ </a:t>
+            </a:r>
+            <a:r>
+              <a:rPr lang="en-US" sz="2000" dirty="0" smtClean="0">
+                <a:latin typeface="Times New Roman"/>
+                <a:ea typeface="Times New Roman"/>
+                <a:cs typeface="Times New Roman"/>
+              </a:rPr>
+              <a:t>2D</a:t>
+            </a:r>
+            <a:r>
+              <a:rPr lang="ru-RU" sz="2000" dirty="0" smtClean="0">
+                <a:latin typeface="Times New Roman"/>
+                <a:ea typeface="Times New Roman"/>
+                <a:cs typeface="Times New Roman"/>
+              </a:rPr>
+              <a:t> ОНЛАЙН ИГРА </a:t>
+            </a:r>
+            <a:br>
+              <a:rPr lang="ru-RU" sz="2000" dirty="0" smtClean="0">
+                <a:latin typeface="Times New Roman"/>
+                <a:ea typeface="Times New Roman"/>
+                <a:cs typeface="Times New Roman"/>
+              </a:rPr>
+            </a:br>
+            <a:r>
+              <a:rPr lang="ru-RU" sz="2000" dirty="0" smtClean="0">
+                <a:latin typeface="Times New Roman"/>
+                <a:ea typeface="Times New Roman"/>
+                <a:cs typeface="Times New Roman"/>
+              </a:rPr>
+              <a:t>С КЛИЕНТ-СЕРВЕРНОЙ АРХИТЕКТУРОЙ</a:t>
+            </a:r>
+            <a:r>
+              <a:rPr lang="ru-RU" sz="2000" dirty="0" smtClean="0">
+                <a:latin typeface="Times New Roman"/>
+                <a:ea typeface="Times New Roman"/>
+                <a:cs typeface="Times New Roman"/>
+              </a:rPr>
+              <a:t>»</a:t>
             </a:r>
             <a:r>
               <a:rPr lang="ru-RU" spc="-10" dirty="0">
@@ -6190,7 +6229,7 @@
                 <a:hlinkClick r:id="rId4">
                   <a:extLst>
                     <a:ext uri="{A12FA001-AC4F-418D-AE19-62706E023703}">
-                      <ahyp:hlinkClr xmlns="" xmlns:ahyp="http://schemas.microsoft.com/office/drawing/2018/hyperlinkcolor" val="tx"/>
+                      <ahyp:hlinkClr xmlns:ahyp="http://schemas.microsoft.com/office/drawing/2018/hyperlinkcolor" xmlns="" val="tx"/>
                     </a:ext>
                   </a:extLst>
                 </a:hlinkClick>

--- a/Документация/origin.pptx
+++ b/Документация/origin.pptx
@@ -1,9 +1,12 @@
 
 <file path=ppt/presentation.xml><?xml version="1.0" encoding="utf-8"?>
-<p:presentation xmlns:a="http://schemas.openxmlformats.org/drawingml/2006/main" xmlns:r="http://schemas.openxmlformats.org/officeDocument/2006/relationships" xmlns:p="http://schemas.openxmlformats.org/presentationml/2006/main" saveSubsetFonts="1">
+<p:presentation xmlns:a="http://schemas.openxmlformats.org/drawingml/2006/main" xmlns:r="http://schemas.openxmlformats.org/officeDocument/2006/relationships" xmlns:p="http://schemas.openxmlformats.org/presentationml/2006/main" showSpecialPlsOnTitleSld="0" saveSubsetFonts="1">
   <p:sldMasterIdLst>
     <p:sldMasterId id="2147483678" r:id="rId1"/>
   </p:sldMasterIdLst>
+  <p:notesMasterIdLst>
+    <p:notesMasterId r:id="rId14"/>
+  </p:notesMasterIdLst>
   <p:sldIdLst>
     <p:sldId id="256" r:id="rId2"/>
     <p:sldId id="257" r:id="rId3"/>
@@ -123,6 +126,356 @@
 </p:presentation>
 </file>
 
+<file path=ppt/notesMasters/notesMaster1.xml><?xml version="1.0" encoding="utf-8"?>
+<p:notesMaster xmlns:a="http://schemas.openxmlformats.org/drawingml/2006/main" xmlns:r="http://schemas.openxmlformats.org/officeDocument/2006/relationships" xmlns:p="http://schemas.openxmlformats.org/presentationml/2006/main">
+  <p:cSld>
+    <p:bg>
+      <p:bgRef idx="1001">
+        <a:schemeClr val="bg1"/>
+      </p:bgRef>
+    </p:bg>
+    <p:spTree>
+      <p:nvGrpSpPr>
+        <p:cNvPr id="1" name=""/>
+        <p:cNvGrpSpPr/>
+        <p:nvPr/>
+      </p:nvGrpSpPr>
+      <p:grpSpPr>
+        <a:xfrm>
+          <a:off x="0" y="0"/>
+          <a:ext cx="0" cy="0"/>
+          <a:chOff x="0" y="0"/>
+          <a:chExt cx="0" cy="0"/>
+        </a:xfrm>
+      </p:grpSpPr>
+      <p:sp>
+        <p:nvSpPr>
+          <p:cNvPr id="2" name="Верхний колонтитул 1"/>
+          <p:cNvSpPr>
+            <a:spLocks noGrp="1"/>
+          </p:cNvSpPr>
+          <p:nvPr>
+            <p:ph type="hdr" sz="quarter"/>
+          </p:nvPr>
+        </p:nvSpPr>
+        <p:spPr>
+          <a:xfrm>
+            <a:off x="0" y="0"/>
+            <a:ext cx="2971800" cy="458788"/>
+          </a:xfrm>
+          <a:prstGeom prst="rect">
+            <a:avLst/>
+          </a:prstGeom>
+        </p:spPr>
+        <p:txBody>
+          <a:bodyPr vert="horz" lIns="91440" tIns="45720" rIns="91440" bIns="45720" rtlCol="0"/>
+          <a:lstStyle>
+            <a:lvl1pPr algn="l">
+              <a:defRPr sz="1200"/>
+            </a:lvl1pPr>
+          </a:lstStyle>
+          <a:p>
+            <a:endParaRPr lang="ru-RU"/>
+          </a:p>
+        </p:txBody>
+      </p:sp>
+      <p:sp>
+        <p:nvSpPr>
+          <p:cNvPr id="3" name="Дата 2"/>
+          <p:cNvSpPr>
+            <a:spLocks noGrp="1"/>
+          </p:cNvSpPr>
+          <p:nvPr>
+            <p:ph type="dt" idx="1"/>
+          </p:nvPr>
+        </p:nvSpPr>
+        <p:spPr>
+          <a:xfrm>
+            <a:off x="3884613" y="0"/>
+            <a:ext cx="2971800" cy="458788"/>
+          </a:xfrm>
+          <a:prstGeom prst="rect">
+            <a:avLst/>
+          </a:prstGeom>
+        </p:spPr>
+        <p:txBody>
+          <a:bodyPr vert="horz" lIns="91440" tIns="45720" rIns="91440" bIns="45720" rtlCol="0"/>
+          <a:lstStyle>
+            <a:lvl1pPr algn="r">
+              <a:defRPr sz="1200"/>
+            </a:lvl1pPr>
+          </a:lstStyle>
+          <a:p>
+            <a:fld id="{71AEE8C5-8279-4FDE-9148-3B4506582D84}" type="datetimeFigureOut">
+              <a:rPr lang="ru-RU" smtClean="0"/>
+              <a:t>02.02.2026</a:t>
+            </a:fld>
+            <a:endParaRPr lang="ru-RU"/>
+          </a:p>
+        </p:txBody>
+      </p:sp>
+      <p:sp>
+        <p:nvSpPr>
+          <p:cNvPr id="4" name="Образ слайда 3"/>
+          <p:cNvSpPr>
+            <a:spLocks noGrp="1" noRot="1" noChangeAspect="1"/>
+          </p:cNvSpPr>
+          <p:nvPr>
+            <p:ph type="sldImg" idx="2"/>
+          </p:nvPr>
+        </p:nvSpPr>
+        <p:spPr>
+          <a:xfrm>
+            <a:off x="685800" y="1143000"/>
+            <a:ext cx="5486400" cy="3086100"/>
+          </a:xfrm>
+          <a:prstGeom prst="rect">
+            <a:avLst/>
+          </a:prstGeom>
+          <a:noFill/>
+          <a:ln w="12700">
+            <a:solidFill>
+              <a:prstClr val="black"/>
+            </a:solidFill>
+          </a:ln>
+        </p:spPr>
+        <p:txBody>
+          <a:bodyPr vert="horz" lIns="91440" tIns="45720" rIns="91440" bIns="45720" rtlCol="0" anchor="ctr"/>
+          <a:lstStyle/>
+          <a:p>
+            <a:endParaRPr lang="ru-RU"/>
+          </a:p>
+        </p:txBody>
+      </p:sp>
+      <p:sp>
+        <p:nvSpPr>
+          <p:cNvPr id="5" name="Заметки 4"/>
+          <p:cNvSpPr>
+            <a:spLocks noGrp="1"/>
+          </p:cNvSpPr>
+          <p:nvPr>
+            <p:ph type="body" sz="quarter" idx="3"/>
+          </p:nvPr>
+        </p:nvSpPr>
+        <p:spPr>
+          <a:xfrm>
+            <a:off x="685800" y="4400550"/>
+            <a:ext cx="5486400" cy="3600450"/>
+          </a:xfrm>
+          <a:prstGeom prst="rect">
+            <a:avLst/>
+          </a:prstGeom>
+        </p:spPr>
+        <p:txBody>
+          <a:bodyPr vert="horz" lIns="91440" tIns="45720" rIns="91440" bIns="45720" rtlCol="0"/>
+          <a:lstStyle/>
+          <a:p>
+            <a:pPr lvl="0"/>
+            <a:r>
+              <a:rPr lang="ru-RU" smtClean="0"/>
+              <a:t>Образец текста</a:t>
+            </a:r>
+          </a:p>
+          <a:p>
+            <a:pPr lvl="1"/>
+            <a:r>
+              <a:rPr lang="ru-RU" smtClean="0"/>
+              <a:t>Второй уровень</a:t>
+            </a:r>
+          </a:p>
+          <a:p>
+            <a:pPr lvl="2"/>
+            <a:r>
+              <a:rPr lang="ru-RU" smtClean="0"/>
+              <a:t>Третий уровень</a:t>
+            </a:r>
+          </a:p>
+          <a:p>
+            <a:pPr lvl="3"/>
+            <a:r>
+              <a:rPr lang="ru-RU" smtClean="0"/>
+              <a:t>Четвертый уровень</a:t>
+            </a:r>
+          </a:p>
+          <a:p>
+            <a:pPr lvl="4"/>
+            <a:r>
+              <a:rPr lang="ru-RU" smtClean="0"/>
+              <a:t>Пятый уровень</a:t>
+            </a:r>
+            <a:endParaRPr lang="ru-RU"/>
+          </a:p>
+        </p:txBody>
+      </p:sp>
+      <p:sp>
+        <p:nvSpPr>
+          <p:cNvPr id="6" name="Нижний колонтитул 5"/>
+          <p:cNvSpPr>
+            <a:spLocks noGrp="1"/>
+          </p:cNvSpPr>
+          <p:nvPr>
+            <p:ph type="ftr" sz="quarter" idx="4"/>
+          </p:nvPr>
+        </p:nvSpPr>
+        <p:spPr>
+          <a:xfrm>
+            <a:off x="0" y="8685213"/>
+            <a:ext cx="2971800" cy="458787"/>
+          </a:xfrm>
+          <a:prstGeom prst="rect">
+            <a:avLst/>
+          </a:prstGeom>
+        </p:spPr>
+        <p:txBody>
+          <a:bodyPr vert="horz" lIns="91440" tIns="45720" rIns="91440" bIns="45720" rtlCol="0" anchor="b"/>
+          <a:lstStyle>
+            <a:lvl1pPr algn="l">
+              <a:defRPr sz="1200"/>
+            </a:lvl1pPr>
+          </a:lstStyle>
+          <a:p>
+            <a:endParaRPr lang="ru-RU"/>
+          </a:p>
+        </p:txBody>
+      </p:sp>
+      <p:sp>
+        <p:nvSpPr>
+          <p:cNvPr id="7" name="Номер слайда 6"/>
+          <p:cNvSpPr>
+            <a:spLocks noGrp="1"/>
+          </p:cNvSpPr>
+          <p:nvPr>
+            <p:ph type="sldNum" sz="quarter" idx="5"/>
+          </p:nvPr>
+        </p:nvSpPr>
+        <p:spPr>
+          <a:xfrm>
+            <a:off x="3884613" y="8685213"/>
+            <a:ext cx="2971800" cy="458787"/>
+          </a:xfrm>
+          <a:prstGeom prst="rect">
+            <a:avLst/>
+          </a:prstGeom>
+        </p:spPr>
+        <p:txBody>
+          <a:bodyPr vert="horz" lIns="91440" tIns="45720" rIns="91440" bIns="45720" rtlCol="0" anchor="b"/>
+          <a:lstStyle>
+            <a:lvl1pPr algn="r">
+              <a:defRPr sz="1200"/>
+            </a:lvl1pPr>
+          </a:lstStyle>
+          <a:p>
+            <a:fld id="{61071110-C687-4687-BF9B-535760648F62}" type="slidenum">
+              <a:rPr lang="ru-RU" smtClean="0"/>
+              <a:t>‹#›</a:t>
+            </a:fld>
+            <a:endParaRPr lang="ru-RU"/>
+          </a:p>
+        </p:txBody>
+      </p:sp>
+    </p:spTree>
+    <p:extLst>
+      <p:ext uri="{BB962C8B-B14F-4D97-AF65-F5344CB8AC3E}">
+        <p14:creationId xmlns:p14="http://schemas.microsoft.com/office/powerpoint/2010/main" val="3074483850"/>
+      </p:ext>
+    </p:extLst>
+  </p:cSld>
+  <p:clrMap bg1="lt1" tx1="dk1" bg2="lt2" tx2="dk2" accent1="accent1" accent2="accent2" accent3="accent3" accent4="accent4" accent5="accent5" accent6="accent6" hlink="hlink" folHlink="folHlink"/>
+  <p:notesStyle>
+    <a:lvl1pPr marL="0" algn="l" defTabSz="914400" rtl="0" eaLnBrk="1" latinLnBrk="0" hangingPunct="1">
+      <a:defRPr sz="1200" kern="1200">
+        <a:solidFill>
+          <a:schemeClr val="tx1"/>
+        </a:solidFill>
+        <a:latin typeface="+mn-lt"/>
+        <a:ea typeface="+mn-ea"/>
+        <a:cs typeface="+mn-cs"/>
+      </a:defRPr>
+    </a:lvl1pPr>
+    <a:lvl2pPr marL="457200" algn="l" defTabSz="914400" rtl="0" eaLnBrk="1" latinLnBrk="0" hangingPunct="1">
+      <a:defRPr sz="1200" kern="1200">
+        <a:solidFill>
+          <a:schemeClr val="tx1"/>
+        </a:solidFill>
+        <a:latin typeface="+mn-lt"/>
+        <a:ea typeface="+mn-ea"/>
+        <a:cs typeface="+mn-cs"/>
+      </a:defRPr>
+    </a:lvl2pPr>
+    <a:lvl3pPr marL="914400" algn="l" defTabSz="914400" rtl="0" eaLnBrk="1" latinLnBrk="0" hangingPunct="1">
+      <a:defRPr sz="1200" kern="1200">
+        <a:solidFill>
+          <a:schemeClr val="tx1"/>
+        </a:solidFill>
+        <a:latin typeface="+mn-lt"/>
+        <a:ea typeface="+mn-ea"/>
+        <a:cs typeface="+mn-cs"/>
+      </a:defRPr>
+    </a:lvl3pPr>
+    <a:lvl4pPr marL="1371600" algn="l" defTabSz="914400" rtl="0" eaLnBrk="1" latinLnBrk="0" hangingPunct="1">
+      <a:defRPr sz="1200" kern="1200">
+        <a:solidFill>
+          <a:schemeClr val="tx1"/>
+        </a:solidFill>
+        <a:latin typeface="+mn-lt"/>
+        <a:ea typeface="+mn-ea"/>
+        <a:cs typeface="+mn-cs"/>
+      </a:defRPr>
+    </a:lvl4pPr>
+    <a:lvl5pPr marL="1828800" algn="l" defTabSz="914400" rtl="0" eaLnBrk="1" latinLnBrk="0" hangingPunct="1">
+      <a:defRPr sz="1200" kern="1200">
+        <a:solidFill>
+          <a:schemeClr val="tx1"/>
+        </a:solidFill>
+        <a:latin typeface="+mn-lt"/>
+        <a:ea typeface="+mn-ea"/>
+        <a:cs typeface="+mn-cs"/>
+      </a:defRPr>
+    </a:lvl5pPr>
+    <a:lvl6pPr marL="2286000" algn="l" defTabSz="914400" rtl="0" eaLnBrk="1" latinLnBrk="0" hangingPunct="1">
+      <a:defRPr sz="1200" kern="1200">
+        <a:solidFill>
+          <a:schemeClr val="tx1"/>
+        </a:solidFill>
+        <a:latin typeface="+mn-lt"/>
+        <a:ea typeface="+mn-ea"/>
+        <a:cs typeface="+mn-cs"/>
+      </a:defRPr>
+    </a:lvl6pPr>
+    <a:lvl7pPr marL="2743200" algn="l" defTabSz="914400" rtl="0" eaLnBrk="1" latinLnBrk="0" hangingPunct="1">
+      <a:defRPr sz="1200" kern="1200">
+        <a:solidFill>
+          <a:schemeClr val="tx1"/>
+        </a:solidFill>
+        <a:latin typeface="+mn-lt"/>
+        <a:ea typeface="+mn-ea"/>
+        <a:cs typeface="+mn-cs"/>
+      </a:defRPr>
+    </a:lvl7pPr>
+    <a:lvl8pPr marL="3200400" algn="l" defTabSz="914400" rtl="0" eaLnBrk="1" latinLnBrk="0" hangingPunct="1">
+      <a:defRPr sz="1200" kern="1200">
+        <a:solidFill>
+          <a:schemeClr val="tx1"/>
+        </a:solidFill>
+        <a:latin typeface="+mn-lt"/>
+        <a:ea typeface="+mn-ea"/>
+        <a:cs typeface="+mn-cs"/>
+      </a:defRPr>
+    </a:lvl8pPr>
+    <a:lvl9pPr marL="3657600" algn="l" defTabSz="914400" rtl="0" eaLnBrk="1" latinLnBrk="0" hangingPunct="1">
+      <a:defRPr sz="1200" kern="1200">
+        <a:solidFill>
+          <a:schemeClr val="tx1"/>
+        </a:solidFill>
+        <a:latin typeface="+mn-lt"/>
+        <a:ea typeface="+mn-ea"/>
+        <a:cs typeface="+mn-cs"/>
+      </a:defRPr>
+    </a:lvl9pPr>
+  </p:notesStyle>
+</p:notesMaster>
+</file>
+
 <file path=ppt/slideLayouts/slideLayout1.xml><?xml version="1.0" encoding="utf-8"?>
 <p:sldLayout xmlns:a="http://schemas.openxmlformats.org/drawingml/2006/main" xmlns:r="http://schemas.openxmlformats.org/officeDocument/2006/relationships" xmlns:p="http://schemas.openxmlformats.org/presentationml/2006/main" type="title" preserve="1">
   <p:cSld name="Титульный слайд">
@@ -218,7 +571,7 @@
           <a:effectLst/>
           <a:extLst>
             <a:ext uri="{91240B29-F687-4f45-9708-019B960494DF}">
-              <a14:hiddenLine xmlns="" xmlns:a14="http://schemas.microsoft.com/office/drawing/2010/main" w="9525">
+              <a14:hiddenLine xmlns:a14="http://schemas.microsoft.com/office/drawing/2010/main" xmlns="" w="9525">
                 <a:solidFill>
                   <a:srgbClr val="000000"/>
                 </a:solidFill>
@@ -415,9 +768,9 @@
           <a:bodyPr/>
           <a:lstStyle/>
           <a:p>
-            <a:fld id="{347CDDA7-3639-427C-82C8-5EF73E14CBE3}" type="datetimeFigureOut">
+            <a:fld id="{1EC35548-4F83-49B2-A7AB-D4843DB60E91}" type="datetime1">
               <a:rPr lang="ru-RU" smtClean="0"/>
-              <a:t>19.01.2026</a:t>
+              <a:t>02.02.2026</a:t>
             </a:fld>
             <a:endParaRPr lang="ru-RU"/>
           </a:p>
@@ -733,9 +1086,9 @@
           <a:bodyPr/>
           <a:lstStyle/>
           <a:p>
-            <a:fld id="{347CDDA7-3639-427C-82C8-5EF73E14CBE3}" type="datetimeFigureOut">
+            <a:fld id="{0A36D536-2DD5-4C39-9454-AB46C95E6941}" type="datetime1">
               <a:rPr lang="ru-RU" smtClean="0"/>
-              <a:t>19.01.2026</a:t>
+              <a:t>02.02.2026</a:t>
             </a:fld>
             <a:endParaRPr lang="ru-RU"/>
           </a:p>
@@ -1228,9 +1581,9 @@
           <a:bodyPr/>
           <a:lstStyle/>
           <a:p>
-            <a:fld id="{347CDDA7-3639-427C-82C8-5EF73E14CBE3}" type="datetimeFigureOut">
+            <a:fld id="{F4C862DE-A2C3-4049-9C1A-6A2A9B79ACD8}" type="datetime1">
               <a:rPr lang="ru-RU" smtClean="0"/>
-              <a:t>19.01.2026</a:t>
+              <a:t>02.02.2026</a:t>
             </a:fld>
             <a:endParaRPr lang="ru-RU"/>
           </a:p>
@@ -1604,9 +1957,9 @@
           <a:bodyPr/>
           <a:lstStyle/>
           <a:p>
-            <a:fld id="{347CDDA7-3639-427C-82C8-5EF73E14CBE3}" type="datetimeFigureOut">
+            <a:fld id="{D1264567-3522-49E2-9063-427B29A8CE0A}" type="datetime1">
               <a:rPr lang="ru-RU" smtClean="0"/>
-              <a:t>19.01.2026</a:t>
+              <a:t>02.02.2026</a:t>
             </a:fld>
             <a:endParaRPr lang="ru-RU"/>
           </a:p>
@@ -1761,7 +2114,7 @@
           <a:ln/>
           <a:extLst>
             <a:ext uri="{91240B29-F687-4f45-9708-019B960494DF}">
-              <a14:hiddenLine xmlns="" xmlns:a14="http://schemas.microsoft.com/office/drawing/2010/main" w="9525">
+              <a14:hiddenLine xmlns:a14="http://schemas.microsoft.com/office/drawing/2010/main" xmlns="" w="9525">
                 <a:solidFill>
                   <a:srgbClr val="000000"/>
                 </a:solidFill>
@@ -1884,9 +2237,9 @@
           <a:bodyPr/>
           <a:lstStyle/>
           <a:p>
-            <a:fld id="{347CDDA7-3639-427C-82C8-5EF73E14CBE3}" type="datetimeFigureOut">
+            <a:fld id="{A865C36C-D19A-4863-B956-E4E02F4FE93B}" type="datetime1">
               <a:rPr lang="ru-RU" smtClean="0"/>
-              <a:t>19.01.2026</a:t>
+              <a:t>02.02.2026</a:t>
             </a:fld>
             <a:endParaRPr lang="ru-RU"/>
           </a:p>
@@ -2043,7 +2396,7 @@
           <a:ln/>
           <a:extLst>
             <a:ext uri="{91240B29-F687-4f45-9708-019B960494DF}">
-              <a14:hiddenLine xmlns="" xmlns:a14="http://schemas.microsoft.com/office/drawing/2010/main" w="9525">
+              <a14:hiddenLine xmlns:a14="http://schemas.microsoft.com/office/drawing/2010/main" xmlns="" w="9525">
                 <a:solidFill>
                   <a:srgbClr val="000000"/>
                 </a:solidFill>
@@ -2176,9 +2529,9 @@
           <a:bodyPr/>
           <a:lstStyle/>
           <a:p>
-            <a:fld id="{347CDDA7-3639-427C-82C8-5EF73E14CBE3}" type="datetimeFigureOut">
+            <a:fld id="{101F712A-670B-4ABE-A1BD-33F99A97D204}" type="datetime1">
               <a:rPr lang="ru-RU" smtClean="0"/>
-              <a:t>19.01.2026</a:t>
+              <a:t>02.02.2026</a:t>
             </a:fld>
             <a:endParaRPr lang="ru-RU"/>
           </a:p>
@@ -2333,7 +2686,7 @@
           <a:ln/>
           <a:extLst>
             <a:ext uri="{91240B29-F687-4f45-9708-019B960494DF}">
-              <a14:hiddenLine xmlns="" xmlns:a14="http://schemas.microsoft.com/office/drawing/2010/main" w="9525">
+              <a14:hiddenLine xmlns:a14="http://schemas.microsoft.com/office/drawing/2010/main" xmlns="" w="9525">
                 <a:solidFill>
                   <a:srgbClr val="000000"/>
                 </a:solidFill>
@@ -2466,9 +2819,9 @@
           <a:bodyPr/>
           <a:lstStyle/>
           <a:p>
-            <a:fld id="{347CDDA7-3639-427C-82C8-5EF73E14CBE3}" type="datetimeFigureOut">
+            <a:fld id="{5F041A9C-C627-432A-8B05-89A034F6D7B4}" type="datetime1">
               <a:rPr lang="ru-RU" smtClean="0"/>
-              <a:t>19.01.2026</a:t>
+              <a:t>02.02.2026</a:t>
             </a:fld>
             <a:endParaRPr lang="ru-RU"/>
           </a:p>
@@ -2816,9 +3169,9 @@
           <a:bodyPr/>
           <a:lstStyle/>
           <a:p>
-            <a:fld id="{347CDDA7-3639-427C-82C8-5EF73E14CBE3}" type="datetimeFigureOut">
+            <a:fld id="{0BE2CFD5-3E28-4018-BF22-1FA4E14B1436}" type="datetime1">
               <a:rPr lang="ru-RU" smtClean="0"/>
-              <a:t>19.01.2026</a:t>
+              <a:t>02.02.2026</a:t>
             </a:fld>
             <a:endParaRPr lang="ru-RU"/>
           </a:p>
@@ -2973,7 +3326,7 @@
           <a:ln/>
           <a:extLst>
             <a:ext uri="{91240B29-F687-4f45-9708-019B960494DF}">
-              <a14:hiddenLine xmlns="" xmlns:a14="http://schemas.microsoft.com/office/drawing/2010/main" w="9525">
+              <a14:hiddenLine xmlns:a14="http://schemas.microsoft.com/office/drawing/2010/main" xmlns="" w="9525">
                 <a:solidFill>
                   <a:srgbClr val="000000"/>
                 </a:solidFill>
@@ -3162,9 +3515,9 @@
           <a:bodyPr/>
           <a:lstStyle/>
           <a:p>
-            <a:fld id="{347CDDA7-3639-427C-82C8-5EF73E14CBE3}" type="datetimeFigureOut">
+            <a:fld id="{81B37B97-1415-49CB-8880-C6D78B24423E}" type="datetime1">
               <a:rPr lang="ru-RU" smtClean="0"/>
-              <a:t>19.01.2026</a:t>
+              <a:t>02.02.2026</a:t>
             </a:fld>
             <a:endParaRPr lang="ru-RU"/>
           </a:p>
@@ -3319,7 +3672,7 @@
           <a:ln/>
           <a:extLst>
             <a:ext uri="{91240B29-F687-4f45-9708-019B960494DF}">
-              <a14:hiddenLine xmlns="" xmlns:a14="http://schemas.microsoft.com/office/drawing/2010/main" w="9525">
+              <a14:hiddenLine xmlns:a14="http://schemas.microsoft.com/office/drawing/2010/main" xmlns="" w="9525">
                 <a:solidFill>
                   <a:srgbClr val="000000"/>
                 </a:solidFill>
@@ -3646,9 +3999,9 @@
           <a:bodyPr/>
           <a:lstStyle/>
           <a:p>
-            <a:fld id="{347CDDA7-3639-427C-82C8-5EF73E14CBE3}" type="datetimeFigureOut">
+            <a:fld id="{250A7B65-7FFB-44F4-8764-3CE8F30DAE89}" type="datetime1">
               <a:rPr lang="ru-RU" smtClean="0"/>
-              <a:t>19.01.2026</a:t>
+              <a:t>02.02.2026</a:t>
             </a:fld>
             <a:endParaRPr lang="ru-RU"/>
           </a:p>
@@ -3803,7 +4156,7 @@
           <a:ln/>
           <a:extLst>
             <a:ext uri="{91240B29-F687-4f45-9708-019B960494DF}">
-              <a14:hiddenLine xmlns="" xmlns:a14="http://schemas.microsoft.com/office/drawing/2010/main" w="9525">
+              <a14:hiddenLine xmlns:a14="http://schemas.microsoft.com/office/drawing/2010/main" xmlns="" w="9525">
                 <a:solidFill>
                   <a:srgbClr val="000000"/>
                 </a:solidFill>
@@ -3874,9 +4227,9 @@
           <a:bodyPr/>
           <a:lstStyle/>
           <a:p>
-            <a:fld id="{347CDDA7-3639-427C-82C8-5EF73E14CBE3}" type="datetimeFigureOut">
+            <a:fld id="{1E31790E-27A4-447C-AEBC-BE2C20AE3D18}" type="datetime1">
               <a:rPr lang="ru-RU" smtClean="0"/>
-              <a:t>19.01.2026</a:t>
+              <a:t>02.02.2026</a:t>
             </a:fld>
             <a:endParaRPr lang="ru-RU"/>
           </a:p>
@@ -3969,9 +4322,9 @@
           <a:bodyPr/>
           <a:lstStyle/>
           <a:p>
-            <a:fld id="{347CDDA7-3639-427C-82C8-5EF73E14CBE3}" type="datetimeFigureOut">
+            <a:fld id="{E1367333-94A1-4AB1-A98D-E391A09FA504}" type="datetime1">
               <a:rPr lang="ru-RU" smtClean="0"/>
-              <a:t>19.01.2026</a:t>
+              <a:t>02.02.2026</a:t>
             </a:fld>
             <a:endParaRPr lang="ru-RU"/>
           </a:p>
@@ -4239,7 +4592,7 @@
           <a:ln/>
           <a:extLst>
             <a:ext uri="{91240B29-F687-4f45-9708-019B960494DF}">
-              <a14:hiddenLine xmlns="" xmlns:a14="http://schemas.microsoft.com/office/drawing/2010/main" w="9525">
+              <a14:hiddenLine xmlns:a14="http://schemas.microsoft.com/office/drawing/2010/main" xmlns="" w="9525">
                 <a:solidFill>
                   <a:srgbClr val="000000"/>
                 </a:solidFill>
@@ -4443,9 +4796,9 @@
           <a:bodyPr/>
           <a:lstStyle/>
           <a:p>
-            <a:fld id="{347CDDA7-3639-427C-82C8-5EF73E14CBE3}" type="datetimeFigureOut">
+            <a:fld id="{72A8D224-4AB8-49FF-9C9F-8AA46DFC38A0}" type="datetime1">
               <a:rPr lang="ru-RU" smtClean="0"/>
-              <a:t>19.01.2026</a:t>
+              <a:t>02.02.2026</a:t>
             </a:fld>
             <a:endParaRPr lang="ru-RU"/>
           </a:p>
@@ -4756,9 +5109,9 @@
           <a:bodyPr/>
           <a:lstStyle/>
           <a:p>
-            <a:fld id="{347CDDA7-3639-427C-82C8-5EF73E14CBE3}" type="datetimeFigureOut">
+            <a:fld id="{68858ADD-0B0F-49D7-9B32-E2636E38013B}" type="datetime1">
               <a:rPr lang="ru-RU" smtClean="0"/>
-              <a:t>19.01.2026</a:t>
+              <a:t>02.02.2026</a:t>
             </a:fld>
             <a:endParaRPr lang="ru-RU"/>
           </a:p>
@@ -5026,9 +5379,9 @@
             </a:lvl1pPr>
           </a:lstStyle>
           <a:p>
-            <a:fld id="{347CDDA7-3639-427C-82C8-5EF73E14CBE3}" type="datetimeFigureOut">
+            <a:fld id="{45820E88-D671-4A9E-80AE-8C841FC0CFB6}" type="datetime1">
               <a:rPr lang="ru-RU" smtClean="0"/>
-              <a:t>19.01.2026</a:t>
+              <a:t>02.02.2026</a:t>
             </a:fld>
             <a:endParaRPr lang="ru-RU"/>
           </a:p>
@@ -5097,6 +5450,7 @@
     <p:sldLayoutId id="2147483691" r:id="rId13"/>
     <p:sldLayoutId id="2147483692" r:id="rId14"/>
   </p:sldLayoutIdLst>
+  <p:hf hdr="0" ftr="0" dt="0"/>
   <p:txStyles>
     <p:titleStyle>
       <a:lvl1pPr algn="l" defTabSz="457200" rtl="0" eaLnBrk="1" latinLnBrk="0" hangingPunct="1">
@@ -5510,7 +5864,7 @@
                 <a:ea typeface="Times New Roman"/>
                 <a:cs typeface="Times New Roman"/>
               </a:rPr>
-              <a:t>Проектная работа </a:t>
+              <a:t/>
             </a:r>
             <a:br>
               <a:rPr lang="ru-RU" sz="2000" dirty="0">
@@ -5556,15 +5910,7 @@
                 <a:ea typeface="Times New Roman"/>
                 <a:cs typeface="Times New Roman"/>
               </a:rPr>
-              <a:t>С КЛИЕНТ-СЕРВЕРНОЙ АРХИТЕКТУРОЙ</a:t>
-            </a:r>
-            <a:r>
-              <a:rPr lang="ru-RU" sz="2000" dirty="0" smtClean="0">
-                <a:latin typeface="Times New Roman"/>
-                <a:ea typeface="Times New Roman"/>
-                <a:cs typeface="Times New Roman"/>
-              </a:rPr>
-              <a:t>»</a:t>
+              <a:t>С КЛИЕНТ-СЕРВЕРНОЙ АРХИТЕКТУРОЙ»</a:t>
             </a:r>
             <a:r>
               <a:rPr lang="ru-RU" spc="-10" dirty="0">
@@ -5988,6 +6334,29 @@
           </a:p>
         </p:txBody>
       </p:sp>
+      <p:sp>
+        <p:nvSpPr>
+          <p:cNvPr id="4" name="Номер слайда 3"/>
+          <p:cNvSpPr>
+            <a:spLocks noGrp="1"/>
+          </p:cNvSpPr>
+          <p:nvPr>
+            <p:ph type="sldNum" sz="quarter" idx="12"/>
+          </p:nvPr>
+        </p:nvSpPr>
+        <p:spPr/>
+        <p:txBody>
+          <a:bodyPr/>
+          <a:lstStyle/>
+          <a:p>
+            <a:fld id="{CE008903-557F-423E-A0C0-FB243518669E}" type="slidenum">
+              <a:rPr lang="ru-RU" smtClean="0"/>
+              <a:t>10</a:t>
+            </a:fld>
+            <a:endParaRPr lang="ru-RU"/>
+          </a:p>
+        </p:txBody>
+      </p:sp>
     </p:spTree>
     <p:extLst>
       <p:ext uri="{BB962C8B-B14F-4D97-AF65-F5344CB8AC3E}">
@@ -6229,7 +6598,7 @@
                 <a:hlinkClick r:id="rId4">
                   <a:extLst>
                     <a:ext uri="{A12FA001-AC4F-418D-AE19-62706E023703}">
-                      <ahyp:hlinkClr xmlns:ahyp="http://schemas.microsoft.com/office/drawing/2018/hyperlinkcolor" xmlns="" val="tx"/>
+                      <ahyp:hlinkClr xmlns="" xmlns:ahyp="http://schemas.microsoft.com/office/drawing/2018/hyperlinkcolor" val="tx"/>
                     </a:ext>
                   </a:extLst>
                 </a:hlinkClick>
@@ -6281,6 +6650,29 @@
               <a:t>https://companiesmarketcap.com/video-games/largest-video-game-companies-by-market-cap</a:t>
             </a:r>
             <a:endParaRPr lang="ru-RU" dirty="0"/>
+          </a:p>
+        </p:txBody>
+      </p:sp>
+      <p:sp>
+        <p:nvSpPr>
+          <p:cNvPr id="4" name="Номер слайда 3"/>
+          <p:cNvSpPr>
+            <a:spLocks noGrp="1"/>
+          </p:cNvSpPr>
+          <p:nvPr>
+            <p:ph type="sldNum" sz="quarter" idx="12"/>
+          </p:nvPr>
+        </p:nvSpPr>
+        <p:spPr/>
+        <p:txBody>
+          <a:bodyPr/>
+          <a:lstStyle/>
+          <a:p>
+            <a:fld id="{CE008903-557F-423E-A0C0-FB243518669E}" type="slidenum">
+              <a:rPr lang="ru-RU" smtClean="0"/>
+              <a:t>11</a:t>
+            </a:fld>
+            <a:endParaRPr lang="ru-RU"/>
           </a:p>
         </p:txBody>
       </p:sp>
@@ -6384,6 +6776,29 @@
           </a:xfrm>
         </p:spPr>
       </p:pic>
+      <p:sp>
+        <p:nvSpPr>
+          <p:cNvPr id="3" name="Номер слайда 2"/>
+          <p:cNvSpPr>
+            <a:spLocks noGrp="1"/>
+          </p:cNvSpPr>
+          <p:nvPr>
+            <p:ph type="sldNum" sz="quarter" idx="12"/>
+          </p:nvPr>
+        </p:nvSpPr>
+        <p:spPr/>
+        <p:txBody>
+          <a:bodyPr/>
+          <a:lstStyle/>
+          <a:p>
+            <a:fld id="{CE008903-557F-423E-A0C0-FB243518669E}" type="slidenum">
+              <a:rPr lang="ru-RU" smtClean="0"/>
+              <a:t>12</a:t>
+            </a:fld>
+            <a:endParaRPr lang="ru-RU"/>
+          </a:p>
+        </p:txBody>
+      </p:sp>
     </p:spTree>
     <p:extLst>
       <p:ext uri="{BB962C8B-B14F-4D97-AF65-F5344CB8AC3E}">
@@ -6604,6 +7019,29 @@
           </a:p>
         </p:txBody>
       </p:sp>
+      <p:sp>
+        <p:nvSpPr>
+          <p:cNvPr id="4" name="Номер слайда 3"/>
+          <p:cNvSpPr>
+            <a:spLocks noGrp="1"/>
+          </p:cNvSpPr>
+          <p:nvPr>
+            <p:ph type="sldNum" sz="quarter" idx="12"/>
+          </p:nvPr>
+        </p:nvSpPr>
+        <p:spPr/>
+        <p:txBody>
+          <a:bodyPr/>
+          <a:lstStyle/>
+          <a:p>
+            <a:fld id="{CE008903-557F-423E-A0C0-FB243518669E}" type="slidenum">
+              <a:rPr lang="ru-RU" smtClean="0"/>
+              <a:t>2</a:t>
+            </a:fld>
+            <a:endParaRPr lang="ru-RU"/>
+          </a:p>
+        </p:txBody>
+      </p:sp>
     </p:spTree>
     <p:extLst>
       <p:ext uri="{BB962C8B-B14F-4D97-AF65-F5344CB8AC3E}">
@@ -6805,6 +7243,29 @@
               <a:buNone/>
             </a:pPr>
             <a:endParaRPr lang="en-US" dirty="0"/>
+          </a:p>
+        </p:txBody>
+      </p:sp>
+      <p:sp>
+        <p:nvSpPr>
+          <p:cNvPr id="4" name="Номер слайда 3"/>
+          <p:cNvSpPr>
+            <a:spLocks noGrp="1"/>
+          </p:cNvSpPr>
+          <p:nvPr>
+            <p:ph type="sldNum" sz="quarter" idx="12"/>
+          </p:nvPr>
+        </p:nvSpPr>
+        <p:spPr/>
+        <p:txBody>
+          <a:bodyPr/>
+          <a:lstStyle/>
+          <a:p>
+            <a:fld id="{CE008903-557F-423E-A0C0-FB243518669E}" type="slidenum">
+              <a:rPr lang="ru-RU" smtClean="0"/>
+              <a:t>3</a:t>
+            </a:fld>
+            <a:endParaRPr lang="ru-RU"/>
           </a:p>
         </p:txBody>
       </p:sp>
@@ -7016,6 +7477,29 @@
           </a:p>
         </p:txBody>
       </p:sp>
+      <p:sp>
+        <p:nvSpPr>
+          <p:cNvPr id="5" name="Номер слайда 4"/>
+          <p:cNvSpPr>
+            <a:spLocks noGrp="1"/>
+          </p:cNvSpPr>
+          <p:nvPr>
+            <p:ph type="sldNum" sz="quarter" idx="12"/>
+          </p:nvPr>
+        </p:nvSpPr>
+        <p:spPr/>
+        <p:txBody>
+          <a:bodyPr/>
+          <a:lstStyle/>
+          <a:p>
+            <a:fld id="{CE008903-557F-423E-A0C0-FB243518669E}" type="slidenum">
+              <a:rPr lang="ru-RU" smtClean="0"/>
+              <a:t>4</a:t>
+            </a:fld>
+            <a:endParaRPr lang="ru-RU"/>
+          </a:p>
+        </p:txBody>
+      </p:sp>
     </p:spTree>
     <p:extLst>
       <p:ext uri="{BB962C8B-B14F-4D97-AF65-F5344CB8AC3E}">
@@ -7160,6 +7644,29 @@
           </a:p>
         </p:txBody>
       </p:sp>
+      <p:sp>
+        <p:nvSpPr>
+          <p:cNvPr id="3" name="Номер слайда 2"/>
+          <p:cNvSpPr>
+            <a:spLocks noGrp="1"/>
+          </p:cNvSpPr>
+          <p:nvPr>
+            <p:ph type="sldNum" sz="quarter" idx="12"/>
+          </p:nvPr>
+        </p:nvSpPr>
+        <p:spPr/>
+        <p:txBody>
+          <a:bodyPr/>
+          <a:lstStyle/>
+          <a:p>
+            <a:fld id="{CE008903-557F-423E-A0C0-FB243518669E}" type="slidenum">
+              <a:rPr lang="ru-RU" smtClean="0"/>
+              <a:t>5</a:t>
+            </a:fld>
+            <a:endParaRPr lang="ru-RU"/>
+          </a:p>
+        </p:txBody>
+      </p:sp>
     </p:spTree>
     <p:extLst>
       <p:ext uri="{BB962C8B-B14F-4D97-AF65-F5344CB8AC3E}">
@@ -7342,6 +7849,29 @@
           </a:p>
         </p:txBody>
       </p:sp>
+      <p:sp>
+        <p:nvSpPr>
+          <p:cNvPr id="5" name="Номер слайда 4"/>
+          <p:cNvSpPr>
+            <a:spLocks noGrp="1"/>
+          </p:cNvSpPr>
+          <p:nvPr>
+            <p:ph type="sldNum" sz="quarter" idx="12"/>
+          </p:nvPr>
+        </p:nvSpPr>
+        <p:spPr/>
+        <p:txBody>
+          <a:bodyPr/>
+          <a:lstStyle/>
+          <a:p>
+            <a:fld id="{CE008903-557F-423E-A0C0-FB243518669E}" type="slidenum">
+              <a:rPr lang="ru-RU" smtClean="0"/>
+              <a:t>6</a:t>
+            </a:fld>
+            <a:endParaRPr lang="ru-RU"/>
+          </a:p>
+        </p:txBody>
+      </p:sp>
     </p:spTree>
     <p:extLst>
       <p:ext uri="{BB962C8B-B14F-4D97-AF65-F5344CB8AC3E}">
@@ -7556,6 +8086,29 @@
               <a:t> игры</a:t>
             </a:r>
             <a:endParaRPr lang="ru-RU" dirty="0"/>
+          </a:p>
+        </p:txBody>
+      </p:sp>
+      <p:sp>
+        <p:nvSpPr>
+          <p:cNvPr id="6" name="Номер слайда 5"/>
+          <p:cNvSpPr>
+            <a:spLocks noGrp="1"/>
+          </p:cNvSpPr>
+          <p:nvPr>
+            <p:ph type="sldNum" sz="quarter" idx="12"/>
+          </p:nvPr>
+        </p:nvSpPr>
+        <p:spPr/>
+        <p:txBody>
+          <a:bodyPr/>
+          <a:lstStyle/>
+          <a:p>
+            <a:fld id="{CE008903-557F-423E-A0C0-FB243518669E}" type="slidenum">
+              <a:rPr lang="ru-RU" smtClean="0"/>
+              <a:t>7</a:t>
+            </a:fld>
+            <a:endParaRPr lang="ru-RU"/>
           </a:p>
         </p:txBody>
       </p:sp>
@@ -7952,6 +8505,29 @@
           </a:p>
         </p:txBody>
       </p:sp>
+      <p:sp>
+        <p:nvSpPr>
+          <p:cNvPr id="4" name="Номер слайда 3"/>
+          <p:cNvSpPr>
+            <a:spLocks noGrp="1"/>
+          </p:cNvSpPr>
+          <p:nvPr>
+            <p:ph type="sldNum" sz="quarter" idx="12"/>
+          </p:nvPr>
+        </p:nvSpPr>
+        <p:spPr/>
+        <p:txBody>
+          <a:bodyPr/>
+          <a:lstStyle/>
+          <a:p>
+            <a:fld id="{CE008903-557F-423E-A0C0-FB243518669E}" type="slidenum">
+              <a:rPr lang="ru-RU" smtClean="0"/>
+              <a:t>8</a:t>
+            </a:fld>
+            <a:endParaRPr lang="ru-RU"/>
+          </a:p>
+        </p:txBody>
+      </p:sp>
     </p:spTree>
     <p:extLst>
       <p:ext uri="{BB962C8B-B14F-4D97-AF65-F5344CB8AC3E}">
@@ -8182,6 +8758,29 @@
           </a:effectLst>
         </p:spPr>
       </p:pic>
+      <p:sp>
+        <p:nvSpPr>
+          <p:cNvPr id="5" name="Номер слайда 4"/>
+          <p:cNvSpPr>
+            <a:spLocks noGrp="1"/>
+          </p:cNvSpPr>
+          <p:nvPr>
+            <p:ph type="sldNum" sz="quarter" idx="12"/>
+          </p:nvPr>
+        </p:nvSpPr>
+        <p:spPr/>
+        <p:txBody>
+          <a:bodyPr/>
+          <a:lstStyle/>
+          <a:p>
+            <a:fld id="{CE008903-557F-423E-A0C0-FB243518669E}" type="slidenum">
+              <a:rPr lang="ru-RU" smtClean="0"/>
+              <a:t>9</a:t>
+            </a:fld>
+            <a:endParaRPr lang="ru-RU"/>
+          </a:p>
+        </p:txBody>
+      </p:sp>
     </p:spTree>
     <p:extLst>
       <p:ext uri="{BB962C8B-B14F-4D97-AF65-F5344CB8AC3E}">
@@ -8437,4 +9036,265 @@
     </a:ext>
   </a:extLst>
 </a:theme>
+</file>
+
+<file path=ppt/theme/theme2.xml><?xml version="1.0" encoding="utf-8"?>
+<a:theme xmlns:a="http://schemas.openxmlformats.org/drawingml/2006/main" name="Тема Office">
+  <a:themeElements>
+    <a:clrScheme name="Стандартная">
+      <a:dk1>
+        <a:sysClr val="windowText" lastClr="000000"/>
+      </a:dk1>
+      <a:lt1>
+        <a:sysClr val="window" lastClr="FFFFFF"/>
+      </a:lt1>
+      <a:dk2>
+        <a:srgbClr val="44546A"/>
+      </a:dk2>
+      <a:lt2>
+        <a:srgbClr val="E7E6E6"/>
+      </a:lt2>
+      <a:accent1>
+        <a:srgbClr val="5B9BD5"/>
+      </a:accent1>
+      <a:accent2>
+        <a:srgbClr val="ED7D31"/>
+      </a:accent2>
+      <a:accent3>
+        <a:srgbClr val="A5A5A5"/>
+      </a:accent3>
+      <a:accent4>
+        <a:srgbClr val="FFC000"/>
+      </a:accent4>
+      <a:accent5>
+        <a:srgbClr val="4472C4"/>
+      </a:accent5>
+      <a:accent6>
+        <a:srgbClr val="70AD47"/>
+      </a:accent6>
+      <a:hlink>
+        <a:srgbClr val="0563C1"/>
+      </a:hlink>
+      <a:folHlink>
+        <a:srgbClr val="954F72"/>
+      </a:folHlink>
+    </a:clrScheme>
+    <a:fontScheme name="Стандартная">
+      <a:majorFont>
+        <a:latin typeface="Calibri Light" panose="020F0302020204030204"/>
+        <a:ea typeface=""/>
+        <a:cs typeface=""/>
+        <a:font script="Jpan" typeface="游ゴシック Light"/>
+        <a:font script="Hang" typeface="맑은 고딕"/>
+        <a:font script="Hans" typeface="等线 Light"/>
+        <a:font script="Hant" typeface="新細明體"/>
+        <a:font script="Arab" typeface="Times New Roman"/>
+        <a:font script="Hebr" typeface="Times New Roman"/>
+        <a:font script="Thai" typeface="Angsana New"/>
+        <a:font script="Ethi" typeface="Nyala"/>
+        <a:font script="Beng" typeface="Vrinda"/>
+        <a:font script="Gujr" typeface="Shruti"/>
+        <a:font script="Khmr" typeface="MoolBoran"/>
+        <a:font script="Knda" typeface="Tunga"/>
+        <a:font script="Guru" typeface="Raavi"/>
+        <a:font script="Cans" typeface="Euphemia"/>
+        <a:font script="Cher" typeface="Plantagenet Cherokee"/>
+        <a:font script="Yiii" typeface="Microsoft Yi Baiti"/>
+        <a:font script="Tibt" typeface="Microsoft Himalaya"/>
+        <a:font script="Thaa" typeface="MV Boli"/>
+        <a:font script="Deva" typeface="Mangal"/>
+        <a:font script="Telu" typeface="Gautami"/>
+        <a:font script="Taml" typeface="Latha"/>
+        <a:font script="Syrc" typeface="Estrangelo Edessa"/>
+        <a:font script="Orya" typeface="Kalinga"/>
+        <a:font script="Mlym" typeface="Kartika"/>
+        <a:font script="Laoo" typeface="DokChampa"/>
+        <a:font script="Sinh" typeface="Iskoola Pota"/>
+        <a:font script="Mong" typeface="Mongolian Baiti"/>
+        <a:font script="Viet" typeface="Times New Roman"/>
+        <a:font script="Uigh" typeface="Microsoft Uighur"/>
+        <a:font script="Geor" typeface="Sylfaen"/>
+      </a:majorFont>
+      <a:minorFont>
+        <a:latin typeface="Calibri" panose="020F0502020204030204"/>
+        <a:ea typeface=""/>
+        <a:cs typeface=""/>
+        <a:font script="Jpan" typeface="游ゴシック"/>
+        <a:font script="Hang" typeface="맑은 고딕"/>
+        <a:font script="Hans" typeface="等线"/>
+        <a:font script="Hant" typeface="新細明體"/>
+        <a:font script="Arab" typeface="Arial"/>
+        <a:font script="Hebr" typeface="Arial"/>
+        <a:font script="Thai" typeface="Cordia New"/>
+        <a:font script="Ethi" typeface="Nyala"/>
+        <a:font script="Beng" typeface="Vrinda"/>
+        <a:font script="Gujr" typeface="Shruti"/>
+        <a:font script="Khmr" typeface="DaunPenh"/>
+        <a:font script="Knda" typeface="Tunga"/>
+        <a:font script="Guru" typeface="Raavi"/>
+        <a:font script="Cans" typeface="Euphemia"/>
+        <a:font script="Cher" typeface="Plantagenet Cherokee"/>
+        <a:font script="Yiii" typeface="Microsoft Yi Baiti"/>
+        <a:font script="Tibt" typeface="Microsoft Himalaya"/>
+        <a:font script="Thaa" typeface="MV Boli"/>
+        <a:font script="Deva" typeface="Mangal"/>
+        <a:font script="Telu" typeface="Gautami"/>
+        <a:font script="Taml" typeface="Latha"/>
+        <a:font script="Syrc" typeface="Estrangelo Edessa"/>
+        <a:font script="Orya" typeface="Kalinga"/>
+        <a:font script="Mlym" typeface="Kartika"/>
+        <a:font script="Laoo" typeface="DokChampa"/>
+        <a:font script="Sinh" typeface="Iskoola Pota"/>
+        <a:font script="Mong" typeface="Mongolian Baiti"/>
+        <a:font script="Viet" typeface="Arial"/>
+        <a:font script="Uigh" typeface="Microsoft Uighur"/>
+        <a:font script="Geor" typeface="Sylfaen"/>
+      </a:minorFont>
+    </a:fontScheme>
+    <a:fmtScheme name="Стандартная">
+      <a:fillStyleLst>
+        <a:solidFill>
+          <a:schemeClr val="phClr"/>
+        </a:solidFill>
+        <a:gradFill rotWithShape="1">
+          <a:gsLst>
+            <a:gs pos="0">
+              <a:schemeClr val="phClr">
+                <a:lumMod val="110000"/>
+                <a:satMod val="105000"/>
+                <a:tint val="67000"/>
+              </a:schemeClr>
+            </a:gs>
+            <a:gs pos="50000">
+              <a:schemeClr val="phClr">
+                <a:lumMod val="105000"/>
+                <a:satMod val="103000"/>
+                <a:tint val="73000"/>
+              </a:schemeClr>
+            </a:gs>
+            <a:gs pos="100000">
+              <a:schemeClr val="phClr">
+                <a:lumMod val="105000"/>
+                <a:satMod val="109000"/>
+                <a:tint val="81000"/>
+              </a:schemeClr>
+            </a:gs>
+          </a:gsLst>
+          <a:lin ang="5400000" scaled="0"/>
+        </a:gradFill>
+        <a:gradFill rotWithShape="1">
+          <a:gsLst>
+            <a:gs pos="0">
+              <a:schemeClr val="phClr">
+                <a:satMod val="103000"/>
+                <a:lumMod val="102000"/>
+                <a:tint val="94000"/>
+              </a:schemeClr>
+            </a:gs>
+            <a:gs pos="50000">
+              <a:schemeClr val="phClr">
+                <a:satMod val="110000"/>
+                <a:lumMod val="100000"/>
+                <a:shade val="100000"/>
+              </a:schemeClr>
+            </a:gs>
+            <a:gs pos="100000">
+              <a:schemeClr val="phClr">
+                <a:lumMod val="99000"/>
+                <a:satMod val="120000"/>
+                <a:shade val="78000"/>
+              </a:schemeClr>
+            </a:gs>
+          </a:gsLst>
+          <a:lin ang="5400000" scaled="0"/>
+        </a:gradFill>
+      </a:fillStyleLst>
+      <a:lnStyleLst>
+        <a:ln w="6350" cap="flat" cmpd="sng" algn="ctr">
+          <a:solidFill>
+            <a:schemeClr val="phClr"/>
+          </a:solidFill>
+          <a:prstDash val="solid"/>
+          <a:miter lim="800000"/>
+        </a:ln>
+        <a:ln w="12700" cap="flat" cmpd="sng" algn="ctr">
+          <a:solidFill>
+            <a:schemeClr val="phClr"/>
+          </a:solidFill>
+          <a:prstDash val="solid"/>
+          <a:miter lim="800000"/>
+        </a:ln>
+        <a:ln w="19050" cap="flat" cmpd="sng" algn="ctr">
+          <a:solidFill>
+            <a:schemeClr val="phClr"/>
+          </a:solidFill>
+          <a:prstDash val="solid"/>
+          <a:miter lim="800000"/>
+        </a:ln>
+      </a:lnStyleLst>
+      <a:effectStyleLst>
+        <a:effectStyle>
+          <a:effectLst/>
+        </a:effectStyle>
+        <a:effectStyle>
+          <a:effectLst/>
+        </a:effectStyle>
+        <a:effectStyle>
+          <a:effectLst>
+            <a:outerShdw blurRad="57150" dist="19050" dir="5400000" algn="ctr" rotWithShape="0">
+              <a:srgbClr val="000000">
+                <a:alpha val="63000"/>
+              </a:srgbClr>
+            </a:outerShdw>
+          </a:effectLst>
+        </a:effectStyle>
+      </a:effectStyleLst>
+      <a:bgFillStyleLst>
+        <a:solidFill>
+          <a:schemeClr val="phClr"/>
+        </a:solidFill>
+        <a:solidFill>
+          <a:schemeClr val="phClr">
+            <a:tint val="95000"/>
+            <a:satMod val="170000"/>
+          </a:schemeClr>
+        </a:solidFill>
+        <a:gradFill rotWithShape="1">
+          <a:gsLst>
+            <a:gs pos="0">
+              <a:schemeClr val="phClr">
+                <a:tint val="93000"/>
+                <a:satMod val="150000"/>
+                <a:shade val="98000"/>
+                <a:lumMod val="102000"/>
+              </a:schemeClr>
+            </a:gs>
+            <a:gs pos="50000">
+              <a:schemeClr val="phClr">
+                <a:tint val="98000"/>
+                <a:satMod val="130000"/>
+                <a:shade val="90000"/>
+                <a:lumMod val="103000"/>
+              </a:schemeClr>
+            </a:gs>
+            <a:gs pos="100000">
+              <a:schemeClr val="phClr">
+                <a:shade val="63000"/>
+                <a:satMod val="120000"/>
+              </a:schemeClr>
+            </a:gs>
+          </a:gsLst>
+          <a:lin ang="5400000" scaled="0"/>
+        </a:gradFill>
+      </a:bgFillStyleLst>
+    </a:fmtScheme>
+  </a:themeElements>
+  <a:objectDefaults/>
+  <a:extraClrSchemeLst/>
+  <a:extLst>
+    <a:ext uri="{05A4C25C-085E-4340-85A3-A5531E510DB2}">
+      <thm15:themeFamily xmlns:thm15="http://schemas.microsoft.com/office/thememl/2012/main" name="Office Theme" id="{62F939B6-93AF-4DB8-9C6B-D6C7DFDC589F}" vid="{4A3C46E8-61CC-4603-A589-7422A47A8E4A}"/>
+    </a:ext>
+  </a:extLst>
+</a:theme>
 </file>
--- a/Документация/origin.pptx
+++ b/Документация/origin.pptx
@@ -208,7 +208,7 @@
           <a:p>
             <a:fld id="{71AEE8C5-8279-4FDE-9148-3B4506582D84}" type="datetimeFigureOut">
               <a:rPr lang="ru-RU" smtClean="0"/>
-              <a:t>02.02.2026</a:t>
+              <a:t>05.02.2026</a:t>
             </a:fld>
             <a:endParaRPr lang="ru-RU"/>
           </a:p>
@@ -272,38 +272,37 @@
           <a:p>
             <a:pPr lvl="0"/>
             <a:r>
-              <a:rPr lang="ru-RU" smtClean="0"/>
+              <a:rPr lang="ru-RU"/>
               <a:t>Образец текста</a:t>
             </a:r>
           </a:p>
           <a:p>
             <a:pPr lvl="1"/>
             <a:r>
-              <a:rPr lang="ru-RU" smtClean="0"/>
+              <a:rPr lang="ru-RU"/>
               <a:t>Второй уровень</a:t>
             </a:r>
           </a:p>
           <a:p>
             <a:pPr lvl="2"/>
             <a:r>
-              <a:rPr lang="ru-RU" smtClean="0"/>
+              <a:rPr lang="ru-RU"/>
               <a:t>Третий уровень</a:t>
             </a:r>
           </a:p>
           <a:p>
             <a:pPr lvl="3"/>
             <a:r>
-              <a:rPr lang="ru-RU" smtClean="0"/>
+              <a:rPr lang="ru-RU"/>
               <a:t>Четвертый уровень</a:t>
             </a:r>
           </a:p>
           <a:p>
             <a:pPr lvl="4"/>
             <a:r>
-              <a:rPr lang="ru-RU" smtClean="0"/>
+              <a:rPr lang="ru-RU"/>
               <a:t>Пятый уровень</a:t>
             </a:r>
-            <a:endParaRPr lang="ru-RU"/>
           </a:p>
         </p:txBody>
       </p:sp>
@@ -571,7 +570,7 @@
           <a:effectLst/>
           <a:extLst>
             <a:ext uri="{91240B29-F687-4f45-9708-019B960494DF}">
-              <a14:hiddenLine xmlns:a14="http://schemas.microsoft.com/office/drawing/2010/main" xmlns="" w="9525">
+              <a14:hiddenLine xmlns="" xmlns:a14="http://schemas.microsoft.com/office/drawing/2010/main" w="9525">
                 <a:solidFill>
                   <a:srgbClr val="000000"/>
                 </a:solidFill>
@@ -770,7 +769,7 @@
           <a:p>
             <a:fld id="{1EC35548-4F83-49B2-A7AB-D4843DB60E91}" type="datetime1">
               <a:rPr lang="ru-RU" smtClean="0"/>
-              <a:t>02.02.2026</a:t>
+              <a:t>05.02.2026</a:t>
             </a:fld>
             <a:endParaRPr lang="ru-RU"/>
           </a:p>
@@ -1088,7 +1087,7 @@
           <a:p>
             <a:fld id="{0A36D536-2DD5-4C39-9454-AB46C95E6941}" type="datetime1">
               <a:rPr lang="ru-RU" smtClean="0"/>
-              <a:t>02.02.2026</a:t>
+              <a:t>05.02.2026</a:t>
             </a:fld>
             <a:endParaRPr lang="ru-RU"/>
           </a:p>
@@ -1583,7 +1582,7 @@
           <a:p>
             <a:fld id="{F4C862DE-A2C3-4049-9C1A-6A2A9B79ACD8}" type="datetime1">
               <a:rPr lang="ru-RU" smtClean="0"/>
-              <a:t>02.02.2026</a:t>
+              <a:t>05.02.2026</a:t>
             </a:fld>
             <a:endParaRPr lang="ru-RU"/>
           </a:p>
@@ -1959,7 +1958,7 @@
           <a:p>
             <a:fld id="{D1264567-3522-49E2-9063-427B29A8CE0A}" type="datetime1">
               <a:rPr lang="ru-RU" smtClean="0"/>
-              <a:t>02.02.2026</a:t>
+              <a:t>05.02.2026</a:t>
             </a:fld>
             <a:endParaRPr lang="ru-RU"/>
           </a:p>
@@ -2114,7 +2113,7 @@
           <a:ln/>
           <a:extLst>
             <a:ext uri="{91240B29-F687-4f45-9708-019B960494DF}">
-              <a14:hiddenLine xmlns:a14="http://schemas.microsoft.com/office/drawing/2010/main" xmlns="" w="9525">
+              <a14:hiddenLine xmlns="" xmlns:a14="http://schemas.microsoft.com/office/drawing/2010/main" w="9525">
                 <a:solidFill>
                   <a:srgbClr val="000000"/>
                 </a:solidFill>
@@ -2239,7 +2238,7 @@
           <a:p>
             <a:fld id="{A865C36C-D19A-4863-B956-E4E02F4FE93B}" type="datetime1">
               <a:rPr lang="ru-RU" smtClean="0"/>
-              <a:t>02.02.2026</a:t>
+              <a:t>05.02.2026</a:t>
             </a:fld>
             <a:endParaRPr lang="ru-RU"/>
           </a:p>
@@ -2396,7 +2395,7 @@
           <a:ln/>
           <a:extLst>
             <a:ext uri="{91240B29-F687-4f45-9708-019B960494DF}">
-              <a14:hiddenLine xmlns:a14="http://schemas.microsoft.com/office/drawing/2010/main" xmlns="" w="9525">
+              <a14:hiddenLine xmlns="" xmlns:a14="http://schemas.microsoft.com/office/drawing/2010/main" w="9525">
                 <a:solidFill>
                   <a:srgbClr val="000000"/>
                 </a:solidFill>
@@ -2531,7 +2530,7 @@
           <a:p>
             <a:fld id="{101F712A-670B-4ABE-A1BD-33F99A97D204}" type="datetime1">
               <a:rPr lang="ru-RU" smtClean="0"/>
-              <a:t>02.02.2026</a:t>
+              <a:t>05.02.2026</a:t>
             </a:fld>
             <a:endParaRPr lang="ru-RU"/>
           </a:p>
@@ -2686,7 +2685,7 @@
           <a:ln/>
           <a:extLst>
             <a:ext uri="{91240B29-F687-4f45-9708-019B960494DF}">
-              <a14:hiddenLine xmlns:a14="http://schemas.microsoft.com/office/drawing/2010/main" xmlns="" w="9525">
+              <a14:hiddenLine xmlns="" xmlns:a14="http://schemas.microsoft.com/office/drawing/2010/main" w="9525">
                 <a:solidFill>
                   <a:srgbClr val="000000"/>
                 </a:solidFill>
@@ -2821,7 +2820,7 @@
           <a:p>
             <a:fld id="{5F041A9C-C627-432A-8B05-89A034F6D7B4}" type="datetime1">
               <a:rPr lang="ru-RU" smtClean="0"/>
-              <a:t>02.02.2026</a:t>
+              <a:t>05.02.2026</a:t>
             </a:fld>
             <a:endParaRPr lang="ru-RU"/>
           </a:p>
@@ -3171,7 +3170,7 @@
           <a:p>
             <a:fld id="{0BE2CFD5-3E28-4018-BF22-1FA4E14B1436}" type="datetime1">
               <a:rPr lang="ru-RU" smtClean="0"/>
-              <a:t>02.02.2026</a:t>
+              <a:t>05.02.2026</a:t>
             </a:fld>
             <a:endParaRPr lang="ru-RU"/>
           </a:p>
@@ -3326,7 +3325,7 @@
           <a:ln/>
           <a:extLst>
             <a:ext uri="{91240B29-F687-4f45-9708-019B960494DF}">
-              <a14:hiddenLine xmlns:a14="http://schemas.microsoft.com/office/drawing/2010/main" xmlns="" w="9525">
+              <a14:hiddenLine xmlns="" xmlns:a14="http://schemas.microsoft.com/office/drawing/2010/main" w="9525">
                 <a:solidFill>
                   <a:srgbClr val="000000"/>
                 </a:solidFill>
@@ -3517,7 +3516,7 @@
           <a:p>
             <a:fld id="{81B37B97-1415-49CB-8880-C6D78B24423E}" type="datetime1">
               <a:rPr lang="ru-RU" smtClean="0"/>
-              <a:t>02.02.2026</a:t>
+              <a:t>05.02.2026</a:t>
             </a:fld>
             <a:endParaRPr lang="ru-RU"/>
           </a:p>
@@ -3672,7 +3671,7 @@
           <a:ln/>
           <a:extLst>
             <a:ext uri="{91240B29-F687-4f45-9708-019B960494DF}">
-              <a14:hiddenLine xmlns:a14="http://schemas.microsoft.com/office/drawing/2010/main" xmlns="" w="9525">
+              <a14:hiddenLine xmlns="" xmlns:a14="http://schemas.microsoft.com/office/drawing/2010/main" w="9525">
                 <a:solidFill>
                   <a:srgbClr val="000000"/>
                 </a:solidFill>
@@ -4001,7 +4000,7 @@
           <a:p>
             <a:fld id="{250A7B65-7FFB-44F4-8764-3CE8F30DAE89}" type="datetime1">
               <a:rPr lang="ru-RU" smtClean="0"/>
-              <a:t>02.02.2026</a:t>
+              <a:t>05.02.2026</a:t>
             </a:fld>
             <a:endParaRPr lang="ru-RU"/>
           </a:p>
@@ -4156,7 +4155,7 @@
           <a:ln/>
           <a:extLst>
             <a:ext uri="{91240B29-F687-4f45-9708-019B960494DF}">
-              <a14:hiddenLine xmlns:a14="http://schemas.microsoft.com/office/drawing/2010/main" xmlns="" w="9525">
+              <a14:hiddenLine xmlns="" xmlns:a14="http://schemas.microsoft.com/office/drawing/2010/main" w="9525">
                 <a:solidFill>
                   <a:srgbClr val="000000"/>
                 </a:solidFill>
@@ -4229,7 +4228,7 @@
           <a:p>
             <a:fld id="{1E31790E-27A4-447C-AEBC-BE2C20AE3D18}" type="datetime1">
               <a:rPr lang="ru-RU" smtClean="0"/>
-              <a:t>02.02.2026</a:t>
+              <a:t>05.02.2026</a:t>
             </a:fld>
             <a:endParaRPr lang="ru-RU"/>
           </a:p>
@@ -4324,7 +4323,7 @@
           <a:p>
             <a:fld id="{E1367333-94A1-4AB1-A98D-E391A09FA504}" type="datetime1">
               <a:rPr lang="ru-RU" smtClean="0"/>
-              <a:t>02.02.2026</a:t>
+              <a:t>05.02.2026</a:t>
             </a:fld>
             <a:endParaRPr lang="ru-RU"/>
           </a:p>
@@ -4592,7 +4591,7 @@
           <a:ln/>
           <a:extLst>
             <a:ext uri="{91240B29-F687-4f45-9708-019B960494DF}">
-              <a14:hiddenLine xmlns:a14="http://schemas.microsoft.com/office/drawing/2010/main" xmlns="" w="9525">
+              <a14:hiddenLine xmlns="" xmlns:a14="http://schemas.microsoft.com/office/drawing/2010/main" w="9525">
                 <a:solidFill>
                   <a:srgbClr val="000000"/>
                 </a:solidFill>
@@ -4798,7 +4797,7 @@
           <a:p>
             <a:fld id="{72A8D224-4AB8-49FF-9C9F-8AA46DFC38A0}" type="datetime1">
               <a:rPr lang="ru-RU" smtClean="0"/>
-              <a:t>02.02.2026</a:t>
+              <a:t>05.02.2026</a:t>
             </a:fld>
             <a:endParaRPr lang="ru-RU"/>
           </a:p>
@@ -5111,7 +5110,7 @@
           <a:p>
             <a:fld id="{68858ADD-0B0F-49D7-9B32-E2636E38013B}" type="datetime1">
               <a:rPr lang="ru-RU" smtClean="0"/>
-              <a:t>02.02.2026</a:t>
+              <a:t>05.02.2026</a:t>
             </a:fld>
             <a:endParaRPr lang="ru-RU"/>
           </a:p>
@@ -5381,7 +5380,7 @@
           <a:p>
             <a:fld id="{45820E88-D671-4A9E-80AE-8C841FC0CFB6}" type="datetime1">
               <a:rPr lang="ru-RU" smtClean="0"/>
-              <a:t>02.02.2026</a:t>
+              <a:t>05.02.2026</a:t>
             </a:fld>
             <a:endParaRPr lang="ru-RU"/>
           </a:p>
@@ -5858,14 +5857,6 @@
           <a:lstStyle/>
           <a:p>
             <a:pPr algn="ctr"/>
-            <a:r>
-              <a:rPr lang="ru-RU" sz="2000" dirty="0">
-                <a:latin typeface="Times New Roman"/>
-                <a:ea typeface="Times New Roman"/>
-                <a:cs typeface="Times New Roman"/>
-              </a:rPr>
-              <a:t/>
-            </a:r>
             <a:br>
               <a:rPr lang="ru-RU" sz="2000" dirty="0">
                 <a:latin typeface="Times New Roman"/>
@@ -5874,7 +5865,7 @@
               </a:rPr>
             </a:br>
             <a:r>
-              <a:rPr lang="ru-RU" sz="2000" dirty="0" smtClean="0">
+              <a:rPr lang="ru-RU" sz="2000" dirty="0">
                 <a:latin typeface="Times New Roman"/>
                 <a:ea typeface="Times New Roman"/>
                 <a:cs typeface="Times New Roman"/>
@@ -5882,7 +5873,7 @@
               <a:t>«МНОГОПОЛЬЗОВАТЕЛЬСКАЯ </a:t>
             </a:r>
             <a:r>
-              <a:rPr lang="en-US" sz="2000" dirty="0" smtClean="0">
+              <a:rPr lang="en-US" sz="2000" dirty="0">
                 <a:latin typeface="Times New Roman"/>
                 <a:ea typeface="Times New Roman"/>
                 <a:cs typeface="Times New Roman"/>
@@ -5890,7 +5881,7 @@
               <a:t>2D</a:t>
             </a:r>
             <a:r>
-              <a:rPr lang="ru-RU" sz="2000" dirty="0" smtClean="0">
+              <a:rPr lang="ru-RU" sz="2000" dirty="0">
                 <a:latin typeface="Times New Roman"/>
                 <a:ea typeface="Times New Roman"/>
                 <a:cs typeface="Times New Roman"/>
@@ -5898,30 +5889,19 @@
               <a:t> ОНЛАЙН ИГРА </a:t>
             </a:r>
             <a:br>
-              <a:rPr lang="ru-RU" sz="2000" dirty="0" smtClean="0">
+              <a:rPr lang="ru-RU" sz="2000" dirty="0">
                 <a:latin typeface="Times New Roman"/>
                 <a:ea typeface="Times New Roman"/>
                 <a:cs typeface="Times New Roman"/>
               </a:rPr>
             </a:br>
             <a:r>
-              <a:rPr lang="ru-RU" sz="2000" dirty="0" smtClean="0">
+              <a:rPr lang="ru-RU" sz="2000" dirty="0">
                 <a:latin typeface="Times New Roman"/>
                 <a:ea typeface="Times New Roman"/>
                 <a:cs typeface="Times New Roman"/>
               </a:rPr>
               <a:t>С КЛИЕНТ-СЕРВЕРНОЙ АРХИТЕКТУРОЙ»</a:t>
-            </a:r>
-            <a:r>
-              <a:rPr lang="ru-RU" spc="-10" dirty="0">
-                <a:solidFill>
-                  <a:schemeClr val="tx1"/>
-                </a:solidFill>
-                <a:latin typeface="Times New Roman"/>
-                <a:ea typeface="Times New Roman"/>
-                <a:cs typeface="Times New Roman"/>
-              </a:rPr>
-              <a:t/>
             </a:r>
             <a:br>
               <a:rPr lang="ru-RU" spc="-10" dirty="0">
@@ -6243,13 +6223,6 @@
   <p:clrMapOvr>
     <a:masterClrMapping/>
   </p:clrMapOvr>
-  <p:timing>
-    <p:tnLst>
-      <p:par>
-        <p:cTn id="1" dur="indefinite" restart="never" nodeType="tmRoot"/>
-      </p:par>
-    </p:tnLst>
-  </p:timing>
 </p:sld>
 </file>
 
@@ -6367,13 +6340,6 @@
   <p:clrMapOvr>
     <a:masterClrMapping/>
   </p:clrMapOvr>
-  <p:timing>
-    <p:tnLst>
-      <p:par>
-        <p:cTn id="1" dur="indefinite" restart="never" nodeType="tmRoot"/>
-      </p:par>
-    </p:tnLst>
-  </p:timing>
 </p:sld>
 </file>
 
@@ -6443,213 +6409,91 @@
           <a:bodyPr/>
           <a:lstStyle/>
           <a:p>
-            <a:pPr lvl="0" algn="just">
-              <a:lnSpc>
-                <a:spcPts val="2145"/>
-              </a:lnSpc>
-              <a:spcBef>
-                <a:spcPts val="1030"/>
-              </a:spcBef>
-              <a:spcAft>
-                <a:spcPts val="1030"/>
-              </a:spcAft>
-              <a:buFont typeface="+mj-lt"/>
-              <a:buAutoNum type="arabicPeriod"/>
-            </a:pPr>
+            <a:pPr lvl="0"/>
+            <a:r>
+              <a:rPr lang="ru-RU" b="1" dirty="0"/>
+              <a:t>Leonardo.ai</a:t>
+            </a:r>
             <a:r>
               <a:rPr lang="ru-RU" dirty="0"/>
-              <a:t>Hammerwatch </a:t>
-            </a:r>
-            <a:r>
-              <a:rPr lang="ru-RU" dirty="0">
-                <a:latin typeface="Times New Roman"/>
-                <a:ea typeface="Times New Roman"/>
-                <a:cs typeface="Times New Roman"/>
-              </a:rPr>
-              <a:t>– URL:</a:t>
-            </a:r>
-            <a:r>
-              <a:rPr lang="en-US" dirty="0">
-                <a:latin typeface="Times New Roman"/>
-                <a:ea typeface="Times New Roman"/>
-                <a:cs typeface="Times New Roman"/>
-              </a:rPr>
-              <a:t> </a:t>
-            </a:r>
-            <a:r>
-              <a:rPr lang="en-US" dirty="0">
-                <a:latin typeface="Times New Roman"/>
-                <a:ea typeface="Times New Roman"/>
-                <a:cs typeface="Times New Roman"/>
+              <a:t>: нейросеть для генерации изображений искусственным интеллектом. – URL: </a:t>
+            </a:r>
+            <a:r>
+              <a:rPr lang="ru-RU" u="sng" dirty="0">
                 <a:hlinkClick r:id="rId2"/>
               </a:rPr>
-              <a:t>https://hammerwatch.com</a:t>
-            </a:r>
-            <a:endParaRPr lang="en-US" dirty="0">
-              <a:latin typeface="Times New Roman"/>
-              <a:ea typeface="Times New Roman"/>
-              <a:cs typeface="Times New Roman"/>
-            </a:endParaRPr>
-          </a:p>
-          <a:p>
-            <a:pPr lvl="0" algn="just">
-              <a:lnSpc>
-                <a:spcPts val="2145"/>
-              </a:lnSpc>
-              <a:spcBef>
-                <a:spcPts val="1030"/>
-              </a:spcBef>
-              <a:spcAft>
-                <a:spcPts val="1030"/>
-              </a:spcAft>
-              <a:buFont typeface="+mj-lt"/>
-              <a:buAutoNum type="arabicPeriod"/>
-            </a:pPr>
-            <a:r>
-              <a:rPr lang="ru-RU" dirty="0">
-                <a:latin typeface="Times New Roman"/>
-                <a:ea typeface="Times New Roman"/>
-                <a:cs typeface="Times New Roman"/>
-              </a:rPr>
-              <a:t>AI Image </a:t>
-            </a:r>
-            <a:r>
-              <a:rPr lang="ru-RU" dirty="0" err="1">
-                <a:latin typeface="Times New Roman"/>
-                <a:ea typeface="Times New Roman"/>
-                <a:cs typeface="Times New Roman"/>
-              </a:rPr>
-              <a:t>Generator</a:t>
-            </a:r>
-            <a:r>
-              <a:rPr lang="ru-RU" dirty="0">
-                <a:latin typeface="Times New Roman"/>
-                <a:ea typeface="Times New Roman"/>
-                <a:cs typeface="Times New Roman"/>
-              </a:rPr>
-              <a:t> – URL: </a:t>
+              <a:t>https://leonardo.ai/</a:t>
+            </a:r>
+            <a:r>
+              <a:rPr lang="ru-RU" dirty="0"/>
+              <a:t> (дата обращения:</a:t>
+            </a:r>
+            <a:r>
+              <a:rPr lang="ru-RU" b="1" dirty="0"/>
+              <a:t> 23.01.2026</a:t>
+            </a:r>
+            <a:r>
+              <a:rPr lang="ru-RU" dirty="0"/>
+              <a:t>).</a:t>
+            </a:r>
+          </a:p>
+          <a:p>
+            <a:pPr lvl="0"/>
+            <a:r>
+              <a:rPr lang="ru-RU" b="1" dirty="0" err="1"/>
+              <a:t>Pygame</a:t>
+            </a:r>
+            <a:r>
+              <a:rPr lang="ru-RU" dirty="0"/>
+              <a:t>: набор модулей Python для программирования видеоигр: офиц. сайт. – URL: </a:t>
             </a:r>
             <a:r>
               <a:rPr lang="ru-RU" u="sng" dirty="0">
-                <a:latin typeface="Times New Roman"/>
-                <a:ea typeface="Times New Roman"/>
-                <a:cs typeface="Times New Roman"/>
                 <a:hlinkClick r:id="rId3"/>
               </a:rPr>
-              <a:t>https://leonardo.ai</a:t>
-            </a:r>
-            <a:endParaRPr lang="en-US" u="sng" dirty="0">
-              <a:latin typeface="Times New Roman"/>
-              <a:ea typeface="Times New Roman"/>
-              <a:cs typeface="Times New Roman"/>
-            </a:endParaRPr>
-          </a:p>
-          <a:p>
-            <a:pPr lvl="0" algn="just">
-              <a:lnSpc>
-                <a:spcPts val="2145"/>
-              </a:lnSpc>
-              <a:spcBef>
-                <a:spcPts val="1030"/>
-              </a:spcBef>
-              <a:spcAft>
-                <a:spcPts val="1030"/>
-              </a:spcAft>
-              <a:buFont typeface="+mj-lt"/>
-              <a:buAutoNum type="arabicPeriod"/>
-            </a:pPr>
-            <a:r>
-              <a:rPr lang="ru-RU" dirty="0" err="1">
-                <a:latin typeface="Times New Roman"/>
-                <a:ea typeface="Times New Roman"/>
-                <a:cs typeface="Times New Roman"/>
+              <a:t>https://www.pygame.org/</a:t>
+            </a:r>
+            <a:r>
+              <a:rPr lang="ru-RU" dirty="0"/>
+              <a:t> (дата обращения: </a:t>
+            </a:r>
+            <a:r>
+              <a:rPr lang="ru-RU" b="1" dirty="0"/>
+              <a:t>30.09.2025</a:t>
+            </a:r>
+            <a:r>
+              <a:rPr lang="ru-RU" dirty="0"/>
+              <a:t>).</a:t>
+            </a:r>
+          </a:p>
+          <a:p>
+            <a:pPr lvl="0"/>
+            <a:r>
+              <a:rPr lang="ru-RU" b="1" dirty="0" err="1"/>
+              <a:t>GigaChat</a:t>
+            </a:r>
+            <a:r>
+              <a:rPr lang="ru-RU" dirty="0"/>
+              <a:t>: мультимодальная нейросеть от Сбера: офиц. сайт. – URL:  </a:t>
+            </a:r>
+            <a:r>
+              <a:rPr lang="ru-RU" u="sng" dirty="0">
+                <a:hlinkClick r:id="rId4"/>
               </a:rPr>
-              <a:t>Pygame</a:t>
-            </a:r>
-            <a:r>
-              <a:rPr lang="ru-RU" dirty="0">
-                <a:latin typeface="Times New Roman"/>
-                <a:ea typeface="Times New Roman"/>
-                <a:cs typeface="Times New Roman"/>
-              </a:rPr>
-              <a:t> </a:t>
-            </a:r>
-            <a:r>
-              <a:rPr lang="ru-RU" dirty="0" err="1">
-                <a:latin typeface="Times New Roman"/>
-                <a:ea typeface="Times New Roman"/>
-                <a:cs typeface="Times New Roman"/>
-              </a:rPr>
-              <a:t>Github</a:t>
-            </a:r>
-            <a:r>
-              <a:rPr lang="ru-RU" dirty="0">
-                <a:latin typeface="Times New Roman"/>
-                <a:ea typeface="Times New Roman"/>
-                <a:cs typeface="Times New Roman"/>
-              </a:rPr>
-              <a:t> – URL: </a:t>
-            </a:r>
-            <a:r>
-              <a:rPr lang="ru-RU" u="sng" dirty="0">
-                <a:latin typeface="Times New Roman"/>
-                <a:ea typeface="Times New Roman"/>
-                <a:cs typeface="Times New Roman"/>
-                <a:hlinkClick r:id="rId4">
-                  <a:extLst>
-                    <a:ext uri="{A12FA001-AC4F-418D-AE19-62706E023703}">
-                      <ahyp:hlinkClr xmlns="" xmlns:ahyp="http://schemas.microsoft.com/office/drawing/2018/hyperlinkcolor" val="tx"/>
-                    </a:ext>
-                  </a:extLst>
-                </a:hlinkClick>
-              </a:rPr>
-              <a:t>https://github.com/pygame/pygame</a:t>
-            </a:r>
-            <a:r>
-              <a:rPr lang="ru-RU" dirty="0">
-                <a:latin typeface="Times New Roman"/>
-                <a:ea typeface="Times New Roman"/>
-                <a:cs typeface="Times New Roman"/>
-              </a:rPr>
-              <a:t> </a:t>
-            </a:r>
-            <a:endParaRPr lang="en-US" dirty="0">
-              <a:latin typeface="Times New Roman"/>
-              <a:ea typeface="Times New Roman"/>
-              <a:cs typeface="Times New Roman"/>
-            </a:endParaRPr>
-          </a:p>
-          <a:p>
-            <a:pPr lvl="0" algn="just">
-              <a:lnSpc>
-                <a:spcPts val="2145"/>
-              </a:lnSpc>
-              <a:spcBef>
-                <a:spcPts val="1030"/>
-              </a:spcBef>
-              <a:spcAft>
-                <a:spcPts val="1030"/>
-              </a:spcAft>
-              <a:buFont typeface="+mj-lt"/>
-              <a:buAutoNum type="arabicPeriod"/>
-            </a:pPr>
-            <a:r>
-              <a:rPr lang="ru-RU" dirty="0">
-                <a:latin typeface="Times New Roman"/>
-                <a:ea typeface="Times New Roman"/>
-                <a:cs typeface="Times New Roman"/>
-              </a:rPr>
-              <a:t>Капитализация игровых издателей и компаний – URL: </a:t>
-            </a:r>
-            <a:r>
-              <a:rPr lang="ru-RU" u="sng" dirty="0">
-                <a:latin typeface="Times New Roman"/>
-                <a:ea typeface="Times New Roman"/>
-                <a:cs typeface="Times New Roman"/>
-              </a:rPr>
-              <a:t>https://companiesmarketcap.com/video-games/largest-video-game-companies-by-market-cap</a:t>
-            </a:r>
-            <a:endParaRPr lang="ru-RU" dirty="0"/>
+              <a:t>https://giga.chat/</a:t>
+            </a:r>
+            <a:r>
+              <a:rPr lang="ru-RU" dirty="0"/>
+              <a:t> (дата обращения: </a:t>
+            </a:r>
+            <a:r>
+              <a:rPr lang="ru-RU" b="1" dirty="0"/>
+              <a:t>01.02.2026</a:t>
+            </a:r>
+            <a:r>
+              <a:rPr lang="ru-RU" dirty="0"/>
+              <a:t>).</a:t>
+            </a:r>
           </a:p>
         </p:txBody>
       </p:sp>
@@ -6686,13 +6530,6 @@
   <p:clrMapOvr>
     <a:masterClrMapping/>
   </p:clrMapOvr>
-  <p:timing>
-    <p:tnLst>
-      <p:par>
-        <p:cTn id="1" dur="indefinite" restart="never" nodeType="tmRoot"/>
-      </p:par>
-    </p:tnLst>
-  </p:timing>
 </p:sld>
 </file>
 
@@ -6809,13 +6646,6 @@
   <p:clrMapOvr>
     <a:masterClrMapping/>
   </p:clrMapOvr>
-  <p:timing>
-    <p:tnLst>
-      <p:par>
-        <p:cTn id="1" dur="indefinite" restart="never" nodeType="tmRoot"/>
-      </p:par>
-    </p:tnLst>
-  </p:timing>
 </p:sld>
 </file>
 
@@ -7052,13 +6882,6 @@
   <p:clrMapOvr>
     <a:masterClrMapping/>
   </p:clrMapOvr>
-  <p:timing>
-    <p:tnLst>
-      <p:par>
-        <p:cTn id="1" dur="indefinite" restart="never" nodeType="tmRoot"/>
-      </p:par>
-    </p:tnLst>
-  </p:timing>
 </p:sld>
 </file>
 
@@ -7279,13 +7102,6 @@
   <p:clrMapOvr>
     <a:masterClrMapping/>
   </p:clrMapOvr>
-  <p:timing>
-    <p:tnLst>
-      <p:par>
-        <p:cTn id="1" dur="indefinite" restart="never" nodeType="tmRoot"/>
-      </p:par>
-    </p:tnLst>
-  </p:timing>
 </p:sld>
 </file>
 
@@ -7439,7 +7255,6 @@
           <a:effectLst>
             <a:reflection blurRad="12700" stA="38000" endPos="28000" dist="5000" dir="5400000" sy="-100000" algn="bl" rotWithShape="0"/>
           </a:effectLst>
-          <a:extLst/>
         </p:spPr>
       </p:pic>
       <p:sp>
@@ -7510,13 +7325,6 @@
   <p:clrMapOvr>
     <a:masterClrMapping/>
   </p:clrMapOvr>
-  <p:timing>
-    <p:tnLst>
-      <p:par>
-        <p:cTn id="1" dur="indefinite" restart="never" nodeType="tmRoot"/>
-      </p:par>
-    </p:tnLst>
-  </p:timing>
 </p:sld>
 </file>
 
@@ -7677,13 +7485,6 @@
   <p:clrMapOvr>
     <a:masterClrMapping/>
   </p:clrMapOvr>
-  <p:timing>
-    <p:tnLst>
-      <p:par>
-        <p:cTn id="1" dur="indefinite" restart="never" nodeType="tmRoot"/>
-      </p:par>
-    </p:tnLst>
-  </p:timing>
 </p:sld>
 </file>
 
@@ -7826,26 +7627,25 @@
           <a:lstStyle/>
           <a:p>
             <a:r>
-              <a:rPr lang="ru-RU" sz="1500" dirty="0" smtClean="0"/>
+              <a:rPr lang="ru-RU" sz="1500" dirty="0"/>
               <a:t>Рис.3 – пример обработки нажатия клавиш «</a:t>
             </a:r>
             <a:r>
-              <a:rPr lang="en-US" sz="1500" dirty="0" smtClean="0"/>
+              <a:rPr lang="en-US" sz="1500" dirty="0"/>
               <a:t>t</a:t>
             </a:r>
             <a:r>
-              <a:rPr lang="ru-RU" sz="1500" dirty="0" smtClean="0"/>
+              <a:rPr lang="ru-RU" sz="1500" dirty="0"/>
               <a:t>» и «</a:t>
             </a:r>
             <a:r>
-              <a:rPr lang="en-US" sz="1500" dirty="0" smtClean="0"/>
+              <a:rPr lang="en-US" sz="1500" dirty="0"/>
               <a:t>Esc</a:t>
             </a:r>
             <a:r>
-              <a:rPr lang="ru-RU" sz="1500" dirty="0" smtClean="0"/>
+              <a:rPr lang="ru-RU" sz="1500" dirty="0"/>
               <a:t>»</a:t>
             </a:r>
-            <a:endParaRPr lang="ru-RU" sz="1500" dirty="0"/>
           </a:p>
         </p:txBody>
       </p:sp>
@@ -7882,13 +7682,6 @@
   <p:clrMapOvr>
     <a:masterClrMapping/>
   </p:clrMapOvr>
-  <p:timing>
-    <p:tnLst>
-      <p:par>
-        <p:cTn id="1" dur="indefinite" restart="never" nodeType="tmRoot"/>
-      </p:par>
-    </p:tnLst>
-  </p:timing>
 </p:sld>
 </file>
 
@@ -7925,10 +7718,9 @@
           <a:lstStyle/>
           <a:p>
             <a:r>
-              <a:rPr lang="ru-RU" dirty="0" smtClean="0"/>
+              <a:rPr lang="ru-RU" dirty="0"/>
               <a:t>Структура игры</a:t>
             </a:r>
-            <a:endParaRPr lang="ru-RU" dirty="0"/>
           </a:p>
         </p:txBody>
       </p:sp>
@@ -7955,20 +7747,8 @@
           <a:lstStyle/>
           <a:p>
             <a:r>
-              <a:rPr lang="ru-RU" dirty="0" smtClean="0"/>
-              <a:t>На</a:t>
-            </a:r>
-            <a:r>
               <a:rPr lang="ru-RU" dirty="0"/>
-              <a:t>ш</a:t>
-            </a:r>
-            <a:r>
-              <a:rPr lang="ru-RU" dirty="0" smtClean="0"/>
-              <a:t> </a:t>
-            </a:r>
-            <a:r>
-              <a:rPr lang="ru-RU" dirty="0"/>
-              <a:t>проект состоит из трех основных компонентов:</a:t>
+              <a:t>Наш проект состоит из трех основных компонентов:</a:t>
             </a:r>
           </a:p>
           <a:p>
@@ -7997,10 +7777,10 @@
               <a:buAutoNum type="arabicPeriod"/>
             </a:pPr>
             <a:r>
-              <a:rPr lang="ru-RU" dirty="0" smtClean="0"/>
+              <a:rPr lang="ru-RU" dirty="0"/>
               <a:t>Сервер</a:t>
             </a:r>
-            <a:endParaRPr lang="en-US" dirty="0" smtClean="0"/>
+            <a:endParaRPr lang="en-US" dirty="0"/>
           </a:p>
           <a:p>
             <a:pPr lvl="1">
@@ -8074,18 +7854,17 @@
           <a:lstStyle/>
           <a:p>
             <a:r>
-              <a:rPr lang="ru-RU" dirty="0" smtClean="0"/>
+              <a:rPr lang="ru-RU" dirty="0"/>
               <a:t>Рис.3 – </a:t>
             </a:r>
             <a:r>
-              <a:rPr lang="ru-RU" dirty="0" err="1" smtClean="0"/>
+              <a:rPr lang="ru-RU" dirty="0" err="1"/>
               <a:t>лаунчер</a:t>
             </a:r>
             <a:r>
-              <a:rPr lang="ru-RU" dirty="0" smtClean="0"/>
+              <a:rPr lang="ru-RU" dirty="0"/>
               <a:t> игры</a:t>
             </a:r>
-            <a:endParaRPr lang="ru-RU" dirty="0"/>
           </a:p>
         </p:txBody>
       </p:sp>
@@ -8122,13 +7901,6 @@
   <p:clrMapOvr>
     <a:masterClrMapping/>
   </p:clrMapOvr>
-  <p:timing>
-    <p:tnLst>
-      <p:par>
-        <p:cTn id="1" dur="indefinite" restart="never" nodeType="tmRoot"/>
-      </p:par>
-    </p:tnLst>
-  </p:timing>
 </p:sld>
 </file>
 
@@ -8538,13 +8310,6 @@
   <p:clrMapOvr>
     <a:masterClrMapping/>
   </p:clrMapOvr>
-  <p:timing>
-    <p:tnLst>
-      <p:par>
-        <p:cTn id="1" dur="indefinite" restart="never" nodeType="tmRoot"/>
-      </p:par>
-    </p:tnLst>
-  </p:timing>
 </p:sld>
 </file>
 
@@ -8656,17 +8421,9 @@
                 <a:ea typeface="Times New Roman"/>
                 <a:cs typeface="Times New Roman" panose="02020603050405020304" pitchFamily="18" charset="0"/>
               </a:rPr>
-              <a:t>Полученные навыки программирования позволят нам дальше развивать свой продукт и создавать новые увлекательные игры</a:t>
-            </a:r>
-            <a:r>
-              <a:rPr lang="ru-RU" dirty="0" smtClean="0">
-                <a:latin typeface="Century Gothic (Основной текст)"/>
-                <a:ea typeface="Times New Roman"/>
-                <a:cs typeface="Times New Roman" panose="02020603050405020304" pitchFamily="18" charset="0"/>
-              </a:rPr>
-              <a:t>.</a:t>
-            </a:r>
-            <a:endParaRPr lang="en-US" dirty="0" smtClean="0">
+              <a:t>Полученные навыки программирования позволят нам дальше развивать свой продукт и создавать новые увлекательные игры.</a:t>
+            </a:r>
+            <a:endParaRPr lang="en-US" dirty="0">
               <a:latin typeface="Century Gothic (Основной текст)"/>
               <a:ea typeface="Times New Roman"/>
               <a:cs typeface="Times New Roman" panose="02020603050405020304" pitchFamily="18" charset="0"/>
@@ -8674,7 +8431,7 @@
           </a:p>
           <a:p>
             <a:r>
-              <a:rPr lang="en-US" dirty="0" smtClean="0">
+              <a:rPr lang="en-US" dirty="0">
                 <a:latin typeface="Century Gothic (Основной текст)"/>
                 <a:ea typeface="Times New Roman"/>
                 <a:cs typeface="Times New Roman" panose="02020603050405020304" pitchFamily="18" charset="0"/>
@@ -8682,7 +8439,7 @@
               <a:t>QR-</a:t>
             </a:r>
             <a:r>
-              <a:rPr lang="ru-RU" dirty="0" smtClean="0">
+              <a:rPr lang="ru-RU" dirty="0">
                 <a:latin typeface="Century Gothic (Основной текст)"/>
                 <a:ea typeface="Times New Roman"/>
                 <a:cs typeface="Times New Roman" panose="02020603050405020304" pitchFamily="18" charset="0"/>
@@ -8690,7 +8447,7 @@
               <a:t>код на репозиторий </a:t>
             </a:r>
             <a:r>
-              <a:rPr lang="en-US" dirty="0" smtClean="0">
+              <a:rPr lang="en-US" dirty="0">
                 <a:latin typeface="Century Gothic (Основной текст)"/>
                 <a:ea typeface="Times New Roman"/>
                 <a:cs typeface="Times New Roman" panose="02020603050405020304" pitchFamily="18" charset="0"/>
@@ -8791,13 +8548,6 @@
   <p:clrMapOvr>
     <a:masterClrMapping/>
   </p:clrMapOvr>
-  <p:timing>
-    <p:tnLst>
-      <p:par>
-        <p:cTn id="1" dur="indefinite" restart="never" nodeType="tmRoot"/>
-      </p:par>
-    </p:tnLst>
-  </p:timing>
 </p:sld>
 </file>
 

--- a/Документация/origin.pptx
+++ b/Документация/origin.pptx
@@ -208,7 +208,7 @@
           <a:p>
             <a:fld id="{71AEE8C5-8279-4FDE-9148-3B4506582D84}" type="datetimeFigureOut">
               <a:rPr lang="ru-RU" smtClean="0"/>
-              <a:t>02.02.2026</a:t>
+              <a:t>05.02.2026</a:t>
             </a:fld>
             <a:endParaRPr lang="ru-RU"/>
           </a:p>
@@ -272,38 +272,37 @@
           <a:p>
             <a:pPr lvl="0"/>
             <a:r>
-              <a:rPr lang="ru-RU" smtClean="0"/>
+              <a:rPr lang="ru-RU"/>
               <a:t>Образец текста</a:t>
             </a:r>
           </a:p>
           <a:p>
             <a:pPr lvl="1"/>
             <a:r>
-              <a:rPr lang="ru-RU" smtClean="0"/>
+              <a:rPr lang="ru-RU"/>
               <a:t>Второй уровень</a:t>
             </a:r>
           </a:p>
           <a:p>
             <a:pPr lvl="2"/>
             <a:r>
-              <a:rPr lang="ru-RU" smtClean="0"/>
+              <a:rPr lang="ru-RU"/>
               <a:t>Третий уровень</a:t>
             </a:r>
           </a:p>
           <a:p>
             <a:pPr lvl="3"/>
             <a:r>
-              <a:rPr lang="ru-RU" smtClean="0"/>
+              <a:rPr lang="ru-RU"/>
               <a:t>Четвертый уровень</a:t>
             </a:r>
           </a:p>
           <a:p>
             <a:pPr lvl="4"/>
             <a:r>
-              <a:rPr lang="ru-RU" smtClean="0"/>
+              <a:rPr lang="ru-RU"/>
               <a:t>Пятый уровень</a:t>
             </a:r>
-            <a:endParaRPr lang="ru-RU"/>
           </a:p>
         </p:txBody>
       </p:sp>
@@ -571,7 +570,7 @@
           <a:effectLst/>
           <a:extLst>
             <a:ext uri="{91240B29-F687-4f45-9708-019B960494DF}">
-              <a14:hiddenLine xmlns:a14="http://schemas.microsoft.com/office/drawing/2010/main" xmlns="" w="9525">
+              <a14:hiddenLine xmlns="" xmlns:a14="http://schemas.microsoft.com/office/drawing/2010/main" w="9525">
                 <a:solidFill>
                   <a:srgbClr val="000000"/>
                 </a:solidFill>
@@ -768,9 +767,9 @@
           <a:bodyPr/>
           <a:lstStyle/>
           <a:p>
-            <a:fld id="{1EC35548-4F83-49B2-A7AB-D4843DB60E91}" type="datetime1">
+            <a:fld id="{61A71F59-3127-4757-A63A-AAB453B67D83}" type="datetime1">
               <a:rPr lang="ru-RU" smtClean="0"/>
-              <a:t>02.02.2026</a:t>
+              <a:t>05.02.2026</a:t>
             </a:fld>
             <a:endParaRPr lang="ru-RU"/>
           </a:p>
@@ -1086,9 +1085,9 @@
           <a:bodyPr/>
           <a:lstStyle/>
           <a:p>
-            <a:fld id="{0A36D536-2DD5-4C39-9454-AB46C95E6941}" type="datetime1">
+            <a:fld id="{6E92CCC3-2E42-4729-9532-228BA3D72016}" type="datetime1">
               <a:rPr lang="ru-RU" smtClean="0"/>
-              <a:t>02.02.2026</a:t>
+              <a:t>05.02.2026</a:t>
             </a:fld>
             <a:endParaRPr lang="ru-RU"/>
           </a:p>
@@ -1581,9 +1580,9 @@
           <a:bodyPr/>
           <a:lstStyle/>
           <a:p>
-            <a:fld id="{F4C862DE-A2C3-4049-9C1A-6A2A9B79ACD8}" type="datetime1">
+            <a:fld id="{17BE8B74-8830-4018-A6A2-B009605D144E}" type="datetime1">
               <a:rPr lang="ru-RU" smtClean="0"/>
-              <a:t>02.02.2026</a:t>
+              <a:t>05.02.2026</a:t>
             </a:fld>
             <a:endParaRPr lang="ru-RU"/>
           </a:p>
@@ -1957,9 +1956,9 @@
           <a:bodyPr/>
           <a:lstStyle/>
           <a:p>
-            <a:fld id="{D1264567-3522-49E2-9063-427B29A8CE0A}" type="datetime1">
+            <a:fld id="{52012CA4-A079-4CC4-AF6B-41932A245552}" type="datetime1">
               <a:rPr lang="ru-RU" smtClean="0"/>
-              <a:t>02.02.2026</a:t>
+              <a:t>05.02.2026</a:t>
             </a:fld>
             <a:endParaRPr lang="ru-RU"/>
           </a:p>
@@ -2114,7 +2113,7 @@
           <a:ln/>
           <a:extLst>
             <a:ext uri="{91240B29-F687-4f45-9708-019B960494DF}">
-              <a14:hiddenLine xmlns:a14="http://schemas.microsoft.com/office/drawing/2010/main" xmlns="" w="9525">
+              <a14:hiddenLine xmlns="" xmlns:a14="http://schemas.microsoft.com/office/drawing/2010/main" w="9525">
                 <a:solidFill>
                   <a:srgbClr val="000000"/>
                 </a:solidFill>
@@ -2237,9 +2236,9 @@
           <a:bodyPr/>
           <a:lstStyle/>
           <a:p>
-            <a:fld id="{A865C36C-D19A-4863-B956-E4E02F4FE93B}" type="datetime1">
+            <a:fld id="{A79B7C4D-59D2-4729-9DB2-888AB4EC15B6}" type="datetime1">
               <a:rPr lang="ru-RU" smtClean="0"/>
-              <a:t>02.02.2026</a:t>
+              <a:t>05.02.2026</a:t>
             </a:fld>
             <a:endParaRPr lang="ru-RU"/>
           </a:p>
@@ -2396,7 +2395,7 @@
           <a:ln/>
           <a:extLst>
             <a:ext uri="{91240B29-F687-4f45-9708-019B960494DF}">
-              <a14:hiddenLine xmlns:a14="http://schemas.microsoft.com/office/drawing/2010/main" xmlns="" w="9525">
+              <a14:hiddenLine xmlns="" xmlns:a14="http://schemas.microsoft.com/office/drawing/2010/main" w="9525">
                 <a:solidFill>
                   <a:srgbClr val="000000"/>
                 </a:solidFill>
@@ -2529,9 +2528,9 @@
           <a:bodyPr/>
           <a:lstStyle/>
           <a:p>
-            <a:fld id="{101F712A-670B-4ABE-A1BD-33F99A97D204}" type="datetime1">
+            <a:fld id="{0A1F9B7E-56FA-4D28-B297-B10CA72DE6E6}" type="datetime1">
               <a:rPr lang="ru-RU" smtClean="0"/>
-              <a:t>02.02.2026</a:t>
+              <a:t>05.02.2026</a:t>
             </a:fld>
             <a:endParaRPr lang="ru-RU"/>
           </a:p>
@@ -2686,7 +2685,7 @@
           <a:ln/>
           <a:extLst>
             <a:ext uri="{91240B29-F687-4f45-9708-019B960494DF}">
-              <a14:hiddenLine xmlns:a14="http://schemas.microsoft.com/office/drawing/2010/main" xmlns="" w="9525">
+              <a14:hiddenLine xmlns="" xmlns:a14="http://schemas.microsoft.com/office/drawing/2010/main" w="9525">
                 <a:solidFill>
                   <a:srgbClr val="000000"/>
                 </a:solidFill>
@@ -2819,9 +2818,9 @@
           <a:bodyPr/>
           <a:lstStyle/>
           <a:p>
-            <a:fld id="{5F041A9C-C627-432A-8B05-89A034F6D7B4}" type="datetime1">
+            <a:fld id="{9BF119F9-E340-4266-92B8-0820BB4259F5}" type="datetime1">
               <a:rPr lang="ru-RU" smtClean="0"/>
-              <a:t>02.02.2026</a:t>
+              <a:t>05.02.2026</a:t>
             </a:fld>
             <a:endParaRPr lang="ru-RU"/>
           </a:p>
@@ -3169,9 +3168,9 @@
           <a:bodyPr/>
           <a:lstStyle/>
           <a:p>
-            <a:fld id="{0BE2CFD5-3E28-4018-BF22-1FA4E14B1436}" type="datetime1">
+            <a:fld id="{6B5F39EB-F31E-489C-A97F-AD7A520CADD5}" type="datetime1">
               <a:rPr lang="ru-RU" smtClean="0"/>
-              <a:t>02.02.2026</a:t>
+              <a:t>05.02.2026</a:t>
             </a:fld>
             <a:endParaRPr lang="ru-RU"/>
           </a:p>
@@ -3326,7 +3325,7 @@
           <a:ln/>
           <a:extLst>
             <a:ext uri="{91240B29-F687-4f45-9708-019B960494DF}">
-              <a14:hiddenLine xmlns:a14="http://schemas.microsoft.com/office/drawing/2010/main" xmlns="" w="9525">
+              <a14:hiddenLine xmlns="" xmlns:a14="http://schemas.microsoft.com/office/drawing/2010/main" w="9525">
                 <a:solidFill>
                   <a:srgbClr val="000000"/>
                 </a:solidFill>
@@ -3515,9 +3514,9 @@
           <a:bodyPr/>
           <a:lstStyle/>
           <a:p>
-            <a:fld id="{81B37B97-1415-49CB-8880-C6D78B24423E}" type="datetime1">
+            <a:fld id="{1C989BA9-C26A-4551-80E0-738107A0FE50}" type="datetime1">
               <a:rPr lang="ru-RU" smtClean="0"/>
-              <a:t>02.02.2026</a:t>
+              <a:t>05.02.2026</a:t>
             </a:fld>
             <a:endParaRPr lang="ru-RU"/>
           </a:p>
@@ -3672,7 +3671,7 @@
           <a:ln/>
           <a:extLst>
             <a:ext uri="{91240B29-F687-4f45-9708-019B960494DF}">
-              <a14:hiddenLine xmlns:a14="http://schemas.microsoft.com/office/drawing/2010/main" xmlns="" w="9525">
+              <a14:hiddenLine xmlns="" xmlns:a14="http://schemas.microsoft.com/office/drawing/2010/main" w="9525">
                 <a:solidFill>
                   <a:srgbClr val="000000"/>
                 </a:solidFill>
@@ -3999,9 +3998,9 @@
           <a:bodyPr/>
           <a:lstStyle/>
           <a:p>
-            <a:fld id="{250A7B65-7FFB-44F4-8764-3CE8F30DAE89}" type="datetime1">
+            <a:fld id="{8F4EC683-CB3C-459D-988E-2160472BA884}" type="datetime1">
               <a:rPr lang="ru-RU" smtClean="0"/>
-              <a:t>02.02.2026</a:t>
+              <a:t>05.02.2026</a:t>
             </a:fld>
             <a:endParaRPr lang="ru-RU"/>
           </a:p>
@@ -4156,7 +4155,7 @@
           <a:ln/>
           <a:extLst>
             <a:ext uri="{91240B29-F687-4f45-9708-019B960494DF}">
-              <a14:hiddenLine xmlns:a14="http://schemas.microsoft.com/office/drawing/2010/main" xmlns="" w="9525">
+              <a14:hiddenLine xmlns="" xmlns:a14="http://schemas.microsoft.com/office/drawing/2010/main" w="9525">
                 <a:solidFill>
                   <a:srgbClr val="000000"/>
                 </a:solidFill>
@@ -4227,9 +4226,9 @@
           <a:bodyPr/>
           <a:lstStyle/>
           <a:p>
-            <a:fld id="{1E31790E-27A4-447C-AEBC-BE2C20AE3D18}" type="datetime1">
+            <a:fld id="{B04DD521-DB26-41F6-8483-AB657A6A1D0C}" type="datetime1">
               <a:rPr lang="ru-RU" smtClean="0"/>
-              <a:t>02.02.2026</a:t>
+              <a:t>05.02.2026</a:t>
             </a:fld>
             <a:endParaRPr lang="ru-RU"/>
           </a:p>
@@ -4322,9 +4321,9 @@
           <a:bodyPr/>
           <a:lstStyle/>
           <a:p>
-            <a:fld id="{E1367333-94A1-4AB1-A98D-E391A09FA504}" type="datetime1">
+            <a:fld id="{96469DD3-FE8B-4E72-8CFE-001708E2FC7C}" type="datetime1">
               <a:rPr lang="ru-RU" smtClean="0"/>
-              <a:t>02.02.2026</a:t>
+              <a:t>05.02.2026</a:t>
             </a:fld>
             <a:endParaRPr lang="ru-RU"/>
           </a:p>
@@ -4592,7 +4591,7 @@
           <a:ln/>
           <a:extLst>
             <a:ext uri="{91240B29-F687-4f45-9708-019B960494DF}">
-              <a14:hiddenLine xmlns:a14="http://schemas.microsoft.com/office/drawing/2010/main" xmlns="" w="9525">
+              <a14:hiddenLine xmlns="" xmlns:a14="http://schemas.microsoft.com/office/drawing/2010/main" w="9525">
                 <a:solidFill>
                   <a:srgbClr val="000000"/>
                 </a:solidFill>
@@ -4796,9 +4795,9 @@
           <a:bodyPr/>
           <a:lstStyle/>
           <a:p>
-            <a:fld id="{72A8D224-4AB8-49FF-9C9F-8AA46DFC38A0}" type="datetime1">
+            <a:fld id="{087A1B83-B00F-4940-948F-88023B3496AC}" type="datetime1">
               <a:rPr lang="ru-RU" smtClean="0"/>
-              <a:t>02.02.2026</a:t>
+              <a:t>05.02.2026</a:t>
             </a:fld>
             <a:endParaRPr lang="ru-RU"/>
           </a:p>
@@ -5109,9 +5108,9 @@
           <a:bodyPr/>
           <a:lstStyle/>
           <a:p>
-            <a:fld id="{68858ADD-0B0F-49D7-9B32-E2636E38013B}" type="datetime1">
+            <a:fld id="{23778F88-6CFF-4336-92E6-6A88814EC16D}" type="datetime1">
               <a:rPr lang="ru-RU" smtClean="0"/>
-              <a:t>02.02.2026</a:t>
+              <a:t>05.02.2026</a:t>
             </a:fld>
             <a:endParaRPr lang="ru-RU"/>
           </a:p>
@@ -5379,9 +5378,9 @@
             </a:lvl1pPr>
           </a:lstStyle>
           <a:p>
-            <a:fld id="{45820E88-D671-4A9E-80AE-8C841FC0CFB6}" type="datetime1">
+            <a:fld id="{EFF1D0BE-CB2B-4848-82CD-7E9512932073}" type="datetime1">
               <a:rPr lang="ru-RU" smtClean="0"/>
-              <a:t>02.02.2026</a:t>
+              <a:t>05.02.2026</a:t>
             </a:fld>
             <a:endParaRPr lang="ru-RU"/>
           </a:p>
@@ -5858,77 +5857,51 @@
           <a:lstStyle/>
           <a:p>
             <a:pPr algn="ctr"/>
-            <a:r>
-              <a:rPr lang="ru-RU" sz="2000" dirty="0">
-                <a:latin typeface="Times New Roman"/>
-                <a:ea typeface="Times New Roman"/>
-                <a:cs typeface="Times New Roman"/>
-              </a:rPr>
-              <a:t/>
-            </a:r>
             <a:br>
               <a:rPr lang="ru-RU" sz="2000" dirty="0">
-                <a:latin typeface="Times New Roman"/>
                 <a:ea typeface="Times New Roman"/>
                 <a:cs typeface="Times New Roman"/>
               </a:rPr>
             </a:br>
             <a:r>
-              <a:rPr lang="ru-RU" sz="2000" dirty="0" smtClean="0">
-                <a:latin typeface="Times New Roman"/>
+              <a:rPr lang="ru-RU" sz="2000" dirty="0">
                 <a:ea typeface="Times New Roman"/>
                 <a:cs typeface="Times New Roman"/>
               </a:rPr>
               <a:t>«МНОГОПОЛЬЗОВАТЕЛЬСКАЯ </a:t>
             </a:r>
             <a:r>
-              <a:rPr lang="en-US" sz="2000" dirty="0" smtClean="0">
-                <a:latin typeface="Times New Roman"/>
+              <a:rPr lang="en-US" sz="2000" dirty="0">
                 <a:ea typeface="Times New Roman"/>
                 <a:cs typeface="Times New Roman"/>
               </a:rPr>
               <a:t>2D</a:t>
             </a:r>
             <a:r>
-              <a:rPr lang="ru-RU" sz="2000" dirty="0" smtClean="0">
-                <a:latin typeface="Times New Roman"/>
+              <a:rPr lang="ru-RU" sz="2000" dirty="0">
                 <a:ea typeface="Times New Roman"/>
                 <a:cs typeface="Times New Roman"/>
               </a:rPr>
               <a:t> ОНЛАЙН ИГРА </a:t>
             </a:r>
             <a:br>
-              <a:rPr lang="ru-RU" sz="2000" dirty="0" smtClean="0">
-                <a:latin typeface="Times New Roman"/>
+              <a:rPr lang="ru-RU" sz="2000" dirty="0">
                 <a:ea typeface="Times New Roman"/>
                 <a:cs typeface="Times New Roman"/>
               </a:rPr>
             </a:br>
             <a:r>
-              <a:rPr lang="ru-RU" sz="2000" dirty="0" smtClean="0">
-                <a:latin typeface="Times New Roman"/>
+              <a:rPr lang="ru-RU" sz="2000" dirty="0">
                 <a:ea typeface="Times New Roman"/>
                 <a:cs typeface="Times New Roman"/>
               </a:rPr>
               <a:t>С КЛИЕНТ-СЕРВЕРНОЙ АРХИТЕКТУРОЙ»</a:t>
-            </a:r>
-            <a:r>
-              <a:rPr lang="ru-RU" spc="-10" dirty="0">
-                <a:solidFill>
-                  <a:schemeClr val="tx1"/>
-                </a:solidFill>
-                <a:latin typeface="Times New Roman"/>
-                <a:ea typeface="Times New Roman"/>
-                <a:cs typeface="Times New Roman"/>
-              </a:rPr>
-              <a:t/>
             </a:r>
             <a:br>
               <a:rPr lang="ru-RU" spc="-10" dirty="0">
                 <a:solidFill>
                   <a:schemeClr val="tx1"/>
                 </a:solidFill>
-                <a:latin typeface="Times New Roman"/>
                 <a:ea typeface="Times New Roman"/>
                 <a:cs typeface="Times New Roman"/>
               </a:rPr>
@@ -5955,8 +5928,8 @@
         </p:nvSpPr>
         <p:spPr>
           <a:xfrm>
-            <a:off x="6095999" y="5128878"/>
-            <a:ext cx="6096001" cy="434974"/>
+            <a:off x="5373666" y="4813430"/>
+            <a:ext cx="6818334" cy="2255426"/>
           </a:xfrm>
         </p:spPr>
         <p:txBody>
@@ -5965,114 +5938,161 @@
           </a:bodyPr>
           <a:lstStyle/>
           <a:p>
-            <a:pPr algn="r"/>
-            <a:r>
-              <a:rPr lang="ru-RU" sz="1200" dirty="0">
-                <a:latin typeface="Times New Roman" panose="02020603050405020304" pitchFamily="18" charset="0"/>
-                <a:cs typeface="Times New Roman" panose="02020603050405020304" pitchFamily="18" charset="0"/>
+            <a:pPr>
+              <a:spcBef>
+                <a:spcPts val="0"/>
+              </a:spcBef>
+              <a:spcAft>
+                <a:spcPts val="300"/>
+              </a:spcAft>
+            </a:pPr>
+            <a:r>
+              <a:rPr lang="ru-RU" sz="1600" dirty="0">
+                <a:ea typeface="Calibri" panose="020F0502020204030204" pitchFamily="34" charset="0"/>
+                <a:cs typeface="Calibri" panose="020F0502020204030204" pitchFamily="34" charset="0"/>
               </a:rPr>
-              <a:t>Выполнили</a:t>
-            </a:r>
-            <a:r>
-              <a:rPr lang="en-US" sz="1200" dirty="0">
-                <a:latin typeface="Times New Roman" panose="02020603050405020304" pitchFamily="18" charset="0"/>
-                <a:cs typeface="Times New Roman" panose="02020603050405020304" pitchFamily="18" charset="0"/>
+              <a:t>Участники:</a:t>
+            </a:r>
+          </a:p>
+          <a:p>
+            <a:pPr>
+              <a:spcBef>
+                <a:spcPts val="0"/>
+              </a:spcBef>
+              <a:spcAft>
+                <a:spcPts val="0"/>
+              </a:spcAft>
+            </a:pPr>
+            <a:r>
+              <a:rPr lang="ru-RU" sz="1600" dirty="0">
+                <a:ea typeface="Calibri" panose="020F0502020204030204" pitchFamily="34" charset="0"/>
+                <a:cs typeface="Calibri" panose="020F0502020204030204" pitchFamily="34" charset="0"/>
               </a:rPr>
-              <a:t>:</a:t>
-            </a:r>
-          </a:p>
-          <a:p>
-            <a:pPr algn="r"/>
-            <a:r>
-              <a:rPr lang="ru-RU" sz="1200" dirty="0">
-                <a:latin typeface="Times New Roman" panose="02020603050405020304" pitchFamily="18" charset="0"/>
-                <a:cs typeface="Times New Roman" panose="02020603050405020304" pitchFamily="18" charset="0"/>
-              </a:rPr>
-              <a:t>Ученик 8 «П» класса ГБОУ школы </a:t>
-            </a:r>
-            <a:r>
-              <a:rPr lang="ru-RU" sz="1200" spc="-10" dirty="0">
-                <a:latin typeface="Times New Roman" panose="02020603050405020304" pitchFamily="18" charset="0"/>
-                <a:ea typeface="Times New Roman"/>
-                <a:cs typeface="Times New Roman" panose="02020603050405020304" pitchFamily="18" charset="0"/>
+              <a:t>Ученик 8 «П» класса ГБОУ Школа </a:t>
+            </a:r>
+            <a:r>
+              <a:rPr lang="ru-RU" sz="1600" spc="-10" dirty="0">
+                <a:ea typeface="Calibri" panose="020F0502020204030204" pitchFamily="34" charset="0"/>
+                <a:cs typeface="Calibri" panose="020F0502020204030204" pitchFamily="34" charset="0"/>
               </a:rPr>
               <a:t>№2065</a:t>
             </a:r>
             <a:r>
-              <a:rPr lang="en-US" sz="1200" spc="-10" dirty="0">
-                <a:latin typeface="Times New Roman" panose="02020603050405020304" pitchFamily="18" charset="0"/>
-                <a:ea typeface="Times New Roman"/>
-                <a:cs typeface="Times New Roman" panose="02020603050405020304" pitchFamily="18" charset="0"/>
+              <a:rPr lang="en-US" sz="1600" spc="-10" dirty="0">
+                <a:ea typeface="Calibri" panose="020F0502020204030204" pitchFamily="34" charset="0"/>
+                <a:cs typeface="Calibri" panose="020F0502020204030204" pitchFamily="34" charset="0"/>
               </a:rPr>
               <a:t> </a:t>
             </a:r>
             <a:r>
-              <a:rPr lang="ru-RU" sz="1200" spc="-10" dirty="0">
-                <a:latin typeface="Times New Roman" panose="02020603050405020304" pitchFamily="18" charset="0"/>
-                <a:ea typeface="Times New Roman"/>
-                <a:cs typeface="Times New Roman" panose="02020603050405020304" pitchFamily="18" charset="0"/>
+              <a:rPr lang="ru-RU" sz="1600" spc="-10" dirty="0">
+                <a:ea typeface="Calibri" panose="020F0502020204030204" pitchFamily="34" charset="0"/>
+                <a:cs typeface="Calibri" panose="020F0502020204030204" pitchFamily="34" charset="0"/>
               </a:rPr>
               <a:t>Леонов Ярослав Александрович</a:t>
             </a:r>
           </a:p>
           <a:p>
-            <a:pPr algn="r"/>
-            <a:r>
-              <a:rPr lang="ru-RU" sz="1200" dirty="0">
-                <a:latin typeface="Times New Roman" panose="02020603050405020304" pitchFamily="18" charset="0"/>
-                <a:cs typeface="Times New Roman" panose="02020603050405020304" pitchFamily="18" charset="0"/>
+            <a:pPr>
+              <a:spcBef>
+                <a:spcPts val="0"/>
+              </a:spcBef>
+              <a:spcAft>
+                <a:spcPts val="0"/>
+              </a:spcAft>
+            </a:pPr>
+            <a:r>
+              <a:rPr lang="ru-RU" sz="1600" dirty="0">
+                <a:ea typeface="Calibri" panose="020F0502020204030204" pitchFamily="34" charset="0"/>
+                <a:cs typeface="Calibri" panose="020F0502020204030204" pitchFamily="34" charset="0"/>
               </a:rPr>
-              <a:t>Ученик 8 «Б» класса школы </a:t>
-            </a:r>
-            <a:r>
-              <a:rPr lang="ru-RU" sz="1200" spc="-10" dirty="0">
-                <a:latin typeface="Times New Roman" panose="02020603050405020304" pitchFamily="18" charset="0"/>
-                <a:ea typeface="Times New Roman"/>
-                <a:cs typeface="Times New Roman" panose="02020603050405020304" pitchFamily="18" charset="0"/>
+              <a:t>Ученик 8 «Б» класса ГБОУ Школа </a:t>
+            </a:r>
+            <a:r>
+              <a:rPr lang="ru-RU" sz="1600" spc="-10" dirty="0">
+                <a:ea typeface="Calibri" panose="020F0502020204030204" pitchFamily="34" charset="0"/>
+                <a:cs typeface="Calibri" panose="020F0502020204030204" pitchFamily="34" charset="0"/>
               </a:rPr>
-              <a:t>№2065 Мацнев Илья Антонович</a:t>
-            </a:r>
-          </a:p>
-          <a:p>
-            <a:pPr algn="r"/>
-            <a:r>
-              <a:rPr lang="ru-RU" sz="1200" spc="-10" dirty="0">
-                <a:latin typeface="Times New Roman" panose="02020603050405020304" pitchFamily="18" charset="0"/>
-                <a:cs typeface="Times New Roman" panose="02020603050405020304" pitchFamily="18" charset="0"/>
+              <a:t>№ 2065 </a:t>
+            </a:r>
+            <a:r>
+              <a:rPr lang="ru-RU" sz="1600" spc="-10" dirty="0" err="1">
+                <a:ea typeface="Calibri" panose="020F0502020204030204" pitchFamily="34" charset="0"/>
+                <a:cs typeface="Calibri" panose="020F0502020204030204" pitchFamily="34" charset="0"/>
               </a:rPr>
-              <a:t>Руководитель проекта</a:t>
-            </a:r>
-            <a:r>
-              <a:rPr lang="en-US" sz="1200" spc="-10" dirty="0">
-                <a:latin typeface="Times New Roman" panose="02020603050405020304" pitchFamily="18" charset="0"/>
-                <a:cs typeface="Times New Roman" panose="02020603050405020304" pitchFamily="18" charset="0"/>
+              <a:t>Мацнев</a:t>
+            </a:r>
+            <a:r>
+              <a:rPr lang="ru-RU" sz="1600" spc="-10" dirty="0">
+                <a:ea typeface="Calibri" panose="020F0502020204030204" pitchFamily="34" charset="0"/>
+                <a:cs typeface="Calibri" panose="020F0502020204030204" pitchFamily="34" charset="0"/>
               </a:rPr>
-              <a:t>:</a:t>
-            </a:r>
-          </a:p>
-          <a:p>
-            <a:pPr algn="r"/>
-            <a:r>
-              <a:rPr lang="ru-RU" sz="1200" spc="-10" dirty="0">
-                <a:latin typeface="Times New Roman" panose="02020603050405020304" pitchFamily="18" charset="0"/>
-                <a:cs typeface="Times New Roman" panose="02020603050405020304" pitchFamily="18" charset="0"/>
+              <a:t> Илья Антонович</a:t>
+            </a:r>
+          </a:p>
+          <a:p>
+            <a:pPr>
+              <a:spcBef>
+                <a:spcPts val="0"/>
+              </a:spcBef>
+              <a:spcAft>
+                <a:spcPts val="300"/>
+              </a:spcAft>
+            </a:pPr>
+            <a:r>
+              <a:rPr lang="ru-RU" sz="1600" spc="-10" dirty="0">
+                <a:ea typeface="Calibri" panose="020F0502020204030204" pitchFamily="34" charset="0"/>
+                <a:cs typeface="Calibri" panose="020F0502020204030204" pitchFamily="34" charset="0"/>
               </a:rPr>
-              <a:t>Учитель информатики ГБОУ школы </a:t>
-            </a:r>
-            <a:r>
-              <a:rPr lang="ru-RU" sz="1200" spc="-10" dirty="0">
-                <a:latin typeface="Times New Roman"/>
-                <a:ea typeface="Times New Roman"/>
-                <a:cs typeface="Times New Roman"/>
+              <a:t>Руководители:</a:t>
+            </a:r>
+          </a:p>
+          <a:p>
+            <a:pPr>
+              <a:spcBef>
+                <a:spcPts val="0"/>
+              </a:spcBef>
+              <a:spcAft>
+                <a:spcPts val="0"/>
+              </a:spcAft>
+            </a:pPr>
+            <a:r>
+              <a:rPr lang="ru-RU" sz="1600" spc="-10" dirty="0">
+                <a:ea typeface="Calibri" panose="020F0502020204030204" pitchFamily="34" charset="0"/>
+                <a:cs typeface="Calibri" panose="020F0502020204030204" pitchFamily="34" charset="0"/>
               </a:rPr>
-              <a:t>№2065 Кирсанов Максим Григорьевич</a:t>
-            </a:r>
-            <a:r>
-              <a:rPr lang="ru-RU" sz="1200" dirty="0">
-                <a:latin typeface="Times New Roman" panose="02020603050405020304" pitchFamily="18" charset="0"/>
-                <a:cs typeface="Times New Roman" panose="02020603050405020304" pitchFamily="18" charset="0"/>
+              <a:t>Педагог ГБОУ Школа № 2065 Кирсанов Максим Григорьевич</a:t>
+            </a:r>
+          </a:p>
+          <a:p>
+            <a:pPr>
+              <a:spcBef>
+                <a:spcPts val="0"/>
+              </a:spcBef>
+              <a:spcAft>
+                <a:spcPts val="0"/>
+              </a:spcAft>
+            </a:pPr>
+            <a:r>
+              <a:rPr lang="ru-RU" sz="1600" spc="-10" dirty="0">
+                <a:ea typeface="Calibri" panose="020F0502020204030204" pitchFamily="34" charset="0"/>
+                <a:cs typeface="Calibri" panose="020F0502020204030204" pitchFamily="34" charset="0"/>
               </a:rPr>
-              <a:t> </a:t>
+              <a:t>Педагог ГБОУ Школа № 2065 </a:t>
+            </a:r>
+            <a:r>
+              <a:rPr lang="ru-RU" sz="1600" spc="-10" dirty="0" err="1">
+                <a:ea typeface="Calibri" panose="020F0502020204030204" pitchFamily="34" charset="0"/>
+                <a:cs typeface="Calibri" panose="020F0502020204030204" pitchFamily="34" charset="0"/>
+              </a:rPr>
+              <a:t>Амбеталь</a:t>
+            </a:r>
+            <a:r>
+              <a:rPr lang="ru-RU" sz="1600" spc="-10" dirty="0">
+                <a:ea typeface="Calibri" panose="020F0502020204030204" pitchFamily="34" charset="0"/>
+                <a:cs typeface="Calibri" panose="020F0502020204030204" pitchFamily="34" charset="0"/>
+              </a:rPr>
+              <a:t> Андрей Игоревич </a:t>
             </a:r>
           </a:p>
         </p:txBody>
@@ -6091,8 +6111,8 @@
         </p:nvSpPr>
         <p:spPr>
           <a:xfrm>
-            <a:off x="518511" y="570369"/>
-            <a:ext cx="11154977" cy="707886"/>
+            <a:off x="2247103" y="548322"/>
+            <a:ext cx="7485620" cy="1015663"/>
           </a:xfrm>
           <a:prstGeom prst="rect">
             <a:avLst/>
@@ -6100,7 +6120,7 @@
           <a:noFill/>
         </p:spPr>
         <p:txBody>
-          <a:bodyPr wrap="none" rtlCol="0">
+          <a:bodyPr wrap="square" rtlCol="0">
             <a:spAutoFit/>
           </a:bodyPr>
           <a:lstStyle/>
@@ -6108,7 +6128,7 @@
             <a:pPr algn="ctr"/>
             <a:r>
               <a:rPr lang="ru-RU" sz="2000" b="1" spc="-25" dirty="0">
-                <a:latin typeface="Times New Roman"/>
+                <a:latin typeface="+mj-lt"/>
                 <a:ea typeface="Times New Roman"/>
                 <a:cs typeface="Times New Roman"/>
               </a:rPr>
@@ -6116,7 +6136,7 @@
             </a:r>
             <a:r>
               <a:rPr lang="ru-RU" sz="2000" b="1" spc="-80" dirty="0">
-                <a:latin typeface="Times New Roman"/>
+                <a:latin typeface="+mj-lt"/>
                 <a:ea typeface="Times New Roman"/>
                 <a:cs typeface="Times New Roman"/>
               </a:rPr>
@@ -6124,7 +6144,7 @@
             </a:r>
             <a:r>
               <a:rPr lang="ru-RU" sz="2000" b="1" spc="-10" dirty="0">
-                <a:latin typeface="Times New Roman"/>
+                <a:latin typeface="+mj-lt"/>
                 <a:ea typeface="Times New Roman"/>
                 <a:cs typeface="Times New Roman"/>
               </a:rPr>
@@ -6132,7 +6152,7 @@
             </a:r>
             <a:r>
               <a:rPr lang="ru-RU" sz="2000" b="1" spc="-40" dirty="0">
-                <a:latin typeface="Times New Roman"/>
+                <a:latin typeface="+mj-lt"/>
                 <a:ea typeface="Times New Roman"/>
                 <a:cs typeface="Times New Roman"/>
               </a:rPr>
@@ -6140,7 +6160,7 @@
             </a:r>
             <a:r>
               <a:rPr lang="ru-RU" sz="2000" b="1" spc="-10" dirty="0">
-                <a:latin typeface="Times New Roman"/>
+                <a:latin typeface="+mj-lt"/>
                 <a:ea typeface="Times New Roman"/>
                 <a:cs typeface="Times New Roman"/>
               </a:rPr>
@@ -6148,7 +6168,7 @@
             </a:r>
             <a:r>
               <a:rPr lang="ru-RU" sz="2000" b="1" spc="-65" dirty="0">
-                <a:latin typeface="Times New Roman"/>
+                <a:latin typeface="+mj-lt"/>
                 <a:ea typeface="Times New Roman"/>
                 <a:cs typeface="Times New Roman"/>
               </a:rPr>
@@ -6156,7 +6176,7 @@
             </a:r>
             <a:r>
               <a:rPr lang="ru-RU" sz="2000" b="1" spc="-10" dirty="0">
-                <a:latin typeface="Times New Roman"/>
+                <a:latin typeface="+mj-lt"/>
                 <a:ea typeface="Times New Roman"/>
                 <a:cs typeface="Times New Roman"/>
               </a:rPr>
@@ -6164,7 +6184,7 @@
             </a:r>
             <a:r>
               <a:rPr lang="ru-RU" sz="2000" b="1" spc="-60" dirty="0">
-                <a:latin typeface="Times New Roman"/>
+                <a:latin typeface="+mj-lt"/>
                 <a:ea typeface="Times New Roman"/>
                 <a:cs typeface="Times New Roman"/>
               </a:rPr>
@@ -6172,7 +6192,7 @@
             </a:r>
             <a:r>
               <a:rPr lang="ru-RU" sz="2000" b="1" dirty="0">
-                <a:latin typeface="Times New Roman"/>
+                <a:latin typeface="+mj-lt"/>
                 <a:ea typeface="Times New Roman"/>
                 <a:cs typeface="Times New Roman"/>
               </a:rPr>
@@ -6180,7 +6200,7 @@
             </a:r>
             <a:r>
               <a:rPr lang="ru-RU" sz="2000" b="1" spc="-70" dirty="0">
-                <a:latin typeface="Times New Roman"/>
+                <a:latin typeface="+mj-lt"/>
                 <a:ea typeface="Times New Roman"/>
                 <a:cs typeface="Times New Roman"/>
               </a:rPr>
@@ -6188,7 +6208,7 @@
             </a:r>
             <a:r>
               <a:rPr lang="ru-RU" sz="2000" b="1" dirty="0">
-                <a:latin typeface="Times New Roman"/>
+                <a:latin typeface="+mj-lt"/>
                 <a:ea typeface="Times New Roman"/>
                 <a:cs typeface="Times New Roman"/>
               </a:rPr>
@@ -6196,7 +6216,7 @@
             </a:r>
             <a:r>
               <a:rPr lang="ru-RU" sz="2000" b="1" spc="-70" dirty="0">
-                <a:latin typeface="Times New Roman"/>
+                <a:latin typeface="+mj-lt"/>
                 <a:ea typeface="Times New Roman"/>
                 <a:cs typeface="Times New Roman"/>
               </a:rPr>
@@ -6204,7 +6224,7 @@
             </a:r>
             <a:r>
               <a:rPr lang="ru-RU" sz="2000" b="1" dirty="0">
-                <a:latin typeface="Times New Roman"/>
+                <a:latin typeface="+mj-lt"/>
                 <a:ea typeface="Times New Roman"/>
                 <a:cs typeface="Times New Roman"/>
               </a:rPr>
@@ -6212,7 +6232,7 @@
             </a:r>
             <a:r>
               <a:rPr lang="ru-RU" sz="2000" b="1" spc="-50" dirty="0">
-                <a:latin typeface="Times New Roman"/>
+                <a:latin typeface="+mj-lt"/>
                 <a:ea typeface="Times New Roman"/>
                 <a:cs typeface="Times New Roman"/>
               </a:rPr>
@@ -6220,7 +6240,7 @@
             </a:r>
             <a:r>
               <a:rPr lang="ru-RU" sz="2000" b="1" spc="-10" dirty="0">
-                <a:latin typeface="Times New Roman"/>
+                <a:latin typeface="+mj-lt"/>
                 <a:ea typeface="Times New Roman"/>
                 <a:cs typeface="Times New Roman"/>
               </a:rPr>
@@ -6229,7 +6249,9 @@
           </a:p>
           <a:p>
             <a:pPr algn="ctr"/>
-            <a:endParaRPr lang="ru-RU" sz="2000" dirty="0"/>
+            <a:endParaRPr lang="ru-RU" sz="2000" dirty="0">
+              <a:latin typeface="+mj-lt"/>
+            </a:endParaRPr>
           </a:p>
         </p:txBody>
       </p:sp>
@@ -6243,13 +6265,6 @@
   <p:clrMapOvr>
     <a:masterClrMapping/>
   </p:clrMapOvr>
-  <p:timing>
-    <p:tnLst>
-      <p:par>
-        <p:cTn id="1" dur="indefinite" restart="never" nodeType="tmRoot"/>
-      </p:par>
-    </p:tnLst>
-  </p:timing>
 </p:sld>
 </file>
 
@@ -6291,6 +6306,7 @@
           <a:bodyPr/>
           <a:lstStyle/>
           <a:p>
+            <a:pPr algn="ctr"/>
             <a:r>
               <a:rPr lang="ru-RU" dirty="0"/>
               <a:t>Дальнейшее развитие проекта</a:t>
@@ -6316,21 +6332,23 @@
         </p:nvSpPr>
         <p:spPr>
           <a:xfrm>
-            <a:off x="420359" y="1706240"/>
+            <a:off x="407833" y="2125862"/>
             <a:ext cx="10554574" cy="3636511"/>
           </a:xfrm>
         </p:spPr>
         <p:txBody>
-          <a:bodyPr/>
-          <a:lstStyle/>
-          <a:p>
-            <a:r>
-              <a:rPr lang="ru-RU" dirty="0"/>
-              <a:t>В будущем планируется продолжить разработку нашей игры. Также планируется добавить систему миссий и заданий, выполняя которые игрок будет получать игровую валюту, которую сможет обменять на улучшенную броню или оружие. </a:t>
-            </a:r>
-          </a:p>
-          <a:p>
-            <a:endParaRPr lang="ru-RU" dirty="0"/>
+          <a:bodyPr>
+            <a:normAutofit/>
+          </a:bodyPr>
+          <a:lstStyle/>
+          <a:p>
+            <a:pPr marL="0" indent="0" algn="just">
+              <a:buNone/>
+            </a:pPr>
+            <a:r>
+              <a:rPr lang="ru-RU" sz="2000" dirty="0"/>
+              <a:t>В будущем планируем продолжить разработку нашей игры. Также планируется добавить систему миссий и заданий, выполняя которые игрок будет получать игровую валюту, которую сможет обменять на улучшенную броню или оружие. </a:t>
+            </a:r>
           </a:p>
         </p:txBody>
       </p:sp>
@@ -6367,13 +6385,6 @@
   <p:clrMapOvr>
     <a:masterClrMapping/>
   </p:clrMapOvr>
-  <p:timing>
-    <p:tnLst>
-      <p:par>
-        <p:cTn id="1" dur="indefinite" restart="never" nodeType="tmRoot"/>
-      </p:par>
-    </p:tnLst>
-  </p:timing>
 </p:sld>
 </file>
 
@@ -6415,6 +6426,7 @@
           <a:bodyPr/>
           <a:lstStyle/>
           <a:p>
+            <a:pPr algn="ctr"/>
             <a:r>
               <a:rPr lang="ru-RU" dirty="0"/>
               <a:t>Список литературы</a:t>
@@ -6440,216 +6452,104 @@
         </p:nvSpPr>
         <p:spPr/>
         <p:txBody>
-          <a:bodyPr/>
-          <a:lstStyle/>
-          <a:p>
-            <a:pPr lvl="0" algn="just">
-              <a:lnSpc>
-                <a:spcPts val="2145"/>
-              </a:lnSpc>
-              <a:spcBef>
-                <a:spcPts val="1030"/>
-              </a:spcBef>
-              <a:spcAft>
-                <a:spcPts val="1030"/>
-              </a:spcAft>
-              <a:buFont typeface="+mj-lt"/>
-              <a:buAutoNum type="arabicPeriod"/>
-            </a:pPr>
-            <a:r>
-              <a:rPr lang="ru-RU" dirty="0"/>
-              <a:t>Hammerwatch </a:t>
-            </a:r>
-            <a:r>
-              <a:rPr lang="ru-RU" dirty="0">
-                <a:latin typeface="Times New Roman"/>
-                <a:ea typeface="Times New Roman"/>
-                <a:cs typeface="Times New Roman"/>
-              </a:rPr>
-              <a:t>– URL:</a:t>
-            </a:r>
-            <a:r>
-              <a:rPr lang="en-US" dirty="0">
-                <a:latin typeface="Times New Roman"/>
-                <a:ea typeface="Times New Roman"/>
-                <a:cs typeface="Times New Roman"/>
-              </a:rPr>
-              <a:t> </a:t>
-            </a:r>
-            <a:r>
-              <a:rPr lang="en-US" dirty="0">
-                <a:latin typeface="Times New Roman"/>
-                <a:ea typeface="Times New Roman"/>
-                <a:cs typeface="Times New Roman"/>
+          <a:bodyPr>
+            <a:normAutofit/>
+          </a:bodyPr>
+          <a:lstStyle/>
+          <a:p>
+            <a:pPr lvl="0"/>
+            <a:r>
+              <a:rPr lang="ru-RU" sz="2000" b="1" dirty="0"/>
+              <a:t>Leonardo.ai</a:t>
+            </a:r>
+            <a:r>
+              <a:rPr lang="ru-RU" sz="2000" dirty="0"/>
+              <a:t>: нейросеть для генерации изображений искусственным интеллектом. – URL: </a:t>
+            </a:r>
+            <a:r>
+              <a:rPr lang="ru-RU" sz="2000" u="sng" dirty="0">
                 <a:hlinkClick r:id="rId2"/>
               </a:rPr>
-              <a:t>https://hammerwatch.com</a:t>
-            </a:r>
-            <a:endParaRPr lang="en-US" dirty="0">
-              <a:latin typeface="Times New Roman"/>
-              <a:ea typeface="Times New Roman"/>
-              <a:cs typeface="Times New Roman"/>
-            </a:endParaRPr>
-          </a:p>
-          <a:p>
-            <a:pPr lvl="0" algn="just">
-              <a:lnSpc>
-                <a:spcPts val="2145"/>
-              </a:lnSpc>
-              <a:spcBef>
-                <a:spcPts val="1030"/>
-              </a:spcBef>
-              <a:spcAft>
-                <a:spcPts val="1030"/>
-              </a:spcAft>
-              <a:buFont typeface="+mj-lt"/>
-              <a:buAutoNum type="arabicPeriod"/>
-            </a:pPr>
-            <a:r>
-              <a:rPr lang="ru-RU" dirty="0">
-                <a:latin typeface="Times New Roman"/>
-                <a:ea typeface="Times New Roman"/>
-                <a:cs typeface="Times New Roman"/>
-              </a:rPr>
-              <a:t>AI Image </a:t>
-            </a:r>
-            <a:r>
-              <a:rPr lang="ru-RU" dirty="0" err="1">
-                <a:latin typeface="Times New Roman"/>
-                <a:ea typeface="Times New Roman"/>
-                <a:cs typeface="Times New Roman"/>
-              </a:rPr>
-              <a:t>Generator</a:t>
-            </a:r>
-            <a:r>
-              <a:rPr lang="ru-RU" dirty="0">
-                <a:latin typeface="Times New Roman"/>
-                <a:ea typeface="Times New Roman"/>
-                <a:cs typeface="Times New Roman"/>
-              </a:rPr>
-              <a:t> – URL: </a:t>
-            </a:r>
-            <a:r>
-              <a:rPr lang="ru-RU" u="sng" dirty="0">
-                <a:latin typeface="Times New Roman"/>
-                <a:ea typeface="Times New Roman"/>
-                <a:cs typeface="Times New Roman"/>
+              <a:t>https://leonardo.ai/</a:t>
+            </a:r>
+            <a:r>
+              <a:rPr lang="ru-RU" sz="2000" dirty="0"/>
+              <a:t> (дата обращения:</a:t>
+            </a:r>
+            <a:r>
+              <a:rPr lang="ru-RU" sz="2000" b="1" dirty="0"/>
+              <a:t> 23.01.2026</a:t>
+            </a:r>
+            <a:r>
+              <a:rPr lang="ru-RU" sz="2000" dirty="0"/>
+              <a:t>).</a:t>
+            </a:r>
+          </a:p>
+          <a:p>
+            <a:pPr lvl="0"/>
+            <a:r>
+              <a:rPr lang="ru-RU" sz="2000" b="1" dirty="0" err="1"/>
+              <a:t>Pygame</a:t>
+            </a:r>
+            <a:r>
+              <a:rPr lang="ru-RU" sz="2000" dirty="0"/>
+              <a:t>: набор модулей Python для программирования видеоигр: офиц. сайт. – URL: </a:t>
+            </a:r>
+            <a:r>
+              <a:rPr lang="ru-RU" sz="2000" u="sng" dirty="0">
                 <a:hlinkClick r:id="rId3"/>
               </a:rPr>
-              <a:t>https://leonardo.ai</a:t>
-            </a:r>
-            <a:endParaRPr lang="en-US" u="sng" dirty="0">
-              <a:latin typeface="Times New Roman"/>
-              <a:ea typeface="Times New Roman"/>
-              <a:cs typeface="Times New Roman"/>
-            </a:endParaRPr>
-          </a:p>
-          <a:p>
-            <a:pPr lvl="0" algn="just">
-              <a:lnSpc>
-                <a:spcPts val="2145"/>
-              </a:lnSpc>
-              <a:spcBef>
-                <a:spcPts val="1030"/>
-              </a:spcBef>
-              <a:spcAft>
-                <a:spcPts val="1030"/>
-              </a:spcAft>
-              <a:buFont typeface="+mj-lt"/>
-              <a:buAutoNum type="arabicPeriod"/>
-            </a:pPr>
-            <a:r>
-              <a:rPr lang="ru-RU" dirty="0" err="1">
-                <a:latin typeface="Times New Roman"/>
-                <a:ea typeface="Times New Roman"/>
-                <a:cs typeface="Times New Roman"/>
+              <a:t>https://www.pygame.org/</a:t>
+            </a:r>
+            <a:r>
+              <a:rPr lang="ru-RU" sz="2000" dirty="0"/>
+              <a:t> (дата обращения: </a:t>
+            </a:r>
+            <a:r>
+              <a:rPr lang="ru-RU" sz="2000" b="1" dirty="0"/>
+              <a:t>30.09.2025</a:t>
+            </a:r>
+            <a:r>
+              <a:rPr lang="ru-RU" sz="2000" dirty="0"/>
+              <a:t>).</a:t>
+            </a:r>
+          </a:p>
+          <a:p>
+            <a:pPr lvl="0"/>
+            <a:r>
+              <a:rPr lang="ru-RU" sz="2000" b="1" dirty="0" err="1"/>
+              <a:t>GigaChat</a:t>
+            </a:r>
+            <a:r>
+              <a:rPr lang="ru-RU" sz="2000" dirty="0"/>
+              <a:t>: мультимодальная нейросеть от </a:t>
+            </a:r>
+            <a:r>
+              <a:rPr lang="ru-RU" sz="2000" dirty="0" err="1"/>
+              <a:t>Сбера</a:t>
+            </a:r>
+            <a:r>
+              <a:rPr lang="ru-RU" sz="2000" dirty="0"/>
+              <a:t>: офиц. сайт. – URL:  </a:t>
+            </a:r>
+            <a:r>
+              <a:rPr lang="ru-RU" sz="2000" u="sng" dirty="0">
+                <a:hlinkClick r:id="rId4"/>
               </a:rPr>
-              <a:t>Pygame</a:t>
-            </a:r>
-            <a:r>
-              <a:rPr lang="ru-RU" dirty="0">
-                <a:latin typeface="Times New Roman"/>
-                <a:ea typeface="Times New Roman"/>
-                <a:cs typeface="Times New Roman"/>
-              </a:rPr>
-              <a:t> </a:t>
-            </a:r>
-            <a:r>
-              <a:rPr lang="ru-RU" dirty="0" err="1">
-                <a:latin typeface="Times New Roman"/>
-                <a:ea typeface="Times New Roman"/>
-                <a:cs typeface="Times New Roman"/>
-              </a:rPr>
-              <a:t>Github</a:t>
-            </a:r>
-            <a:r>
-              <a:rPr lang="ru-RU" dirty="0">
-                <a:latin typeface="Times New Roman"/>
-                <a:ea typeface="Times New Roman"/>
-                <a:cs typeface="Times New Roman"/>
-              </a:rPr>
-              <a:t> – URL: </a:t>
-            </a:r>
-            <a:r>
-              <a:rPr lang="ru-RU" u="sng" dirty="0">
-                <a:latin typeface="Times New Roman"/>
-                <a:ea typeface="Times New Roman"/>
-                <a:cs typeface="Times New Roman"/>
-                <a:hlinkClick r:id="rId4">
-                  <a:extLst>
-                    <a:ext uri="{A12FA001-AC4F-418D-AE19-62706E023703}">
-                      <ahyp:hlinkClr xmlns="" xmlns:ahyp="http://schemas.microsoft.com/office/drawing/2018/hyperlinkcolor" val="tx"/>
-                    </a:ext>
-                  </a:extLst>
-                </a:hlinkClick>
-              </a:rPr>
-              <a:t>https://github.com/pygame/pygame</a:t>
-            </a:r>
-            <a:r>
-              <a:rPr lang="ru-RU" dirty="0">
-                <a:latin typeface="Times New Roman"/>
-                <a:ea typeface="Times New Roman"/>
-                <a:cs typeface="Times New Roman"/>
-              </a:rPr>
-              <a:t> </a:t>
-            </a:r>
-            <a:endParaRPr lang="en-US" dirty="0">
-              <a:latin typeface="Times New Roman"/>
-              <a:ea typeface="Times New Roman"/>
-              <a:cs typeface="Times New Roman"/>
-            </a:endParaRPr>
-          </a:p>
-          <a:p>
-            <a:pPr lvl="0" algn="just">
-              <a:lnSpc>
-                <a:spcPts val="2145"/>
-              </a:lnSpc>
-              <a:spcBef>
-                <a:spcPts val="1030"/>
-              </a:spcBef>
-              <a:spcAft>
-                <a:spcPts val="1030"/>
-              </a:spcAft>
-              <a:buFont typeface="+mj-lt"/>
-              <a:buAutoNum type="arabicPeriod"/>
-            </a:pPr>
-            <a:r>
-              <a:rPr lang="ru-RU" dirty="0">
-                <a:latin typeface="Times New Roman"/>
-                <a:ea typeface="Times New Roman"/>
-                <a:cs typeface="Times New Roman"/>
-              </a:rPr>
-              <a:t>Капитализация игровых издателей и компаний – URL: </a:t>
-            </a:r>
-            <a:r>
-              <a:rPr lang="ru-RU" u="sng" dirty="0">
-                <a:latin typeface="Times New Roman"/>
-                <a:ea typeface="Times New Roman"/>
-                <a:cs typeface="Times New Roman"/>
-              </a:rPr>
-              <a:t>https://companiesmarketcap.com/video-games/largest-video-game-companies-by-market-cap</a:t>
-            </a:r>
-            <a:endParaRPr lang="ru-RU" dirty="0"/>
+              <a:t>https://giga.chat/</a:t>
+            </a:r>
+            <a:r>
+              <a:rPr lang="ru-RU" sz="2000" dirty="0"/>
+              <a:t> (дата обращения: </a:t>
+            </a:r>
+            <a:r>
+              <a:rPr lang="ru-RU" sz="2000" b="1" dirty="0"/>
+              <a:t>01.02.2026</a:t>
+            </a:r>
+            <a:r>
+              <a:rPr lang="ru-RU" sz="2000" dirty="0"/>
+              <a:t>).</a:t>
+            </a:r>
           </a:p>
         </p:txBody>
       </p:sp>
@@ -6686,13 +6586,6 @@
   <p:clrMapOvr>
     <a:masterClrMapping/>
   </p:clrMapOvr>
-  <p:timing>
-    <p:tnLst>
-      <p:par>
-        <p:cTn id="1" dur="indefinite" restart="never" nodeType="tmRoot"/>
-      </p:par>
-    </p:tnLst>
-  </p:timing>
 </p:sld>
 </file>
 
@@ -6734,6 +6627,7 @@
           <a:bodyPr/>
           <a:lstStyle/>
           <a:p>
+            <a:pPr algn="ctr"/>
             <a:r>
               <a:rPr lang="ru-RU" dirty="0"/>
               <a:t>Спасибо за внимание</a:t>
@@ -6809,13 +6703,6 @@
   <p:clrMapOvr>
     <a:masterClrMapping/>
   </p:clrMapOvr>
-  <p:timing>
-    <p:tnLst>
-      <p:par>
-        <p:cTn id="1" dur="indefinite" restart="never" nodeType="tmRoot"/>
-      </p:par>
-    </p:tnLst>
-  </p:timing>
 </p:sld>
 </file>
 
@@ -6857,6 +6744,7 @@
           <a:bodyPr/>
           <a:lstStyle/>
           <a:p>
+            <a:pPr algn="ctr"/>
             <a:r>
               <a:rPr lang="ru-RU" dirty="0"/>
               <a:t>Введение и актуальность проектной работы</a:t>
@@ -6880,141 +6768,144 @@
             <p:ph idx="1"/>
           </p:nvPr>
         </p:nvSpPr>
-        <p:spPr/>
-        <p:txBody>
-          <a:bodyPr/>
-          <a:lstStyle/>
-          <a:p>
-            <a:r>
-              <a:rPr lang="ru-RU" dirty="0"/>
+        <p:spPr>
+          <a:xfrm>
+            <a:off x="156575" y="2484120"/>
+            <a:ext cx="11207999" cy="3985259"/>
+          </a:xfrm>
+        </p:spPr>
+        <p:txBody>
+          <a:bodyPr>
+            <a:noAutofit/>
+          </a:bodyPr>
+          <a:lstStyle/>
+          <a:p>
+            <a:pPr algn="just"/>
+            <a:r>
+              <a:rPr lang="ru-RU" sz="2000" dirty="0"/>
               <a:t>Мы живем в </a:t>
             </a:r>
             <a:r>
-              <a:rPr lang="en-US" dirty="0"/>
+              <a:rPr lang="en-US" sz="2000" dirty="0"/>
               <a:t>XXI</a:t>
             </a:r>
             <a:r>
-              <a:rPr lang="ru-RU" dirty="0"/>
-              <a:t> веке – веке </a:t>
-            </a:r>
-            <a:r>
-              <a:rPr lang="ru-RU" dirty="0" err="1"/>
-              <a:t>компьюторных</a:t>
-            </a:r>
-            <a:r>
-              <a:rPr lang="ru-RU" dirty="0"/>
-              <a:t> технологий. Сейчас востребованными сферами являются разработчики приложений и игр. Одним из простых и современных языков является </a:t>
-            </a:r>
-            <a:r>
-              <a:rPr lang="en-US" dirty="0"/>
+              <a:rPr lang="ru-RU" sz="2000" dirty="0"/>
+              <a:t> веке – веке компьютерных технологий. Сейчас востребованными сферами являются разработчики приложений и игр. Одним из простых и современных языков является </a:t>
+            </a:r>
+            <a:r>
+              <a:rPr lang="en-US" sz="2000" dirty="0"/>
               <a:t>Python</a:t>
             </a:r>
             <a:r>
-              <a:rPr lang="ru-RU" dirty="0"/>
+              <a:rPr lang="ru-RU" sz="2000" dirty="0"/>
               <a:t>.</a:t>
             </a:r>
           </a:p>
           <a:p>
-            <a:r>
-              <a:rPr lang="ru-RU" dirty="0"/>
+            <a:pPr algn="just"/>
+            <a:r>
+              <a:rPr lang="ru-RU" sz="2000" dirty="0"/>
               <a:t>Язык «</a:t>
             </a:r>
             <a:r>
-              <a:rPr lang="en-US" dirty="0"/>
+              <a:rPr lang="en-US" sz="2000" dirty="0"/>
               <a:t>Go</a:t>
             </a:r>
             <a:r>
-              <a:rPr lang="ru-RU" dirty="0"/>
+              <a:rPr lang="ru-RU" sz="2000" dirty="0"/>
               <a:t>» известен своей простотой, высокой производительностью и эффективностью, что делает его идеальным для создания веб-сервисов, серверных приложений и облачной инфраструктуры.</a:t>
             </a:r>
           </a:p>
           <a:p>
-            <a:r>
-              <a:rPr lang="ru-RU" dirty="0"/>
+            <a:pPr algn="just"/>
+            <a:r>
+              <a:rPr lang="ru-RU" sz="2000" dirty="0"/>
               <a:t>Мы разработали игру «</a:t>
             </a:r>
             <a:r>
-              <a:rPr lang="en-US" dirty="0"/>
+              <a:rPr lang="en-US" sz="2000" dirty="0"/>
               <a:t>League of adventures</a:t>
             </a:r>
             <a:r>
-              <a:rPr lang="ru-RU" dirty="0"/>
+              <a:rPr lang="ru-RU" sz="2000" dirty="0"/>
               <a:t>» на языках «</a:t>
             </a:r>
             <a:r>
-              <a:rPr lang="en-US" dirty="0"/>
+              <a:rPr lang="en-US" sz="2000" dirty="0"/>
               <a:t>python</a:t>
             </a:r>
             <a:r>
-              <a:rPr lang="ru-RU" dirty="0"/>
+              <a:rPr lang="ru-RU" sz="2000" dirty="0"/>
               <a:t>» для клиента и «</a:t>
             </a:r>
             <a:r>
-              <a:rPr lang="en-US" dirty="0"/>
+              <a:rPr lang="en-US" sz="2000" dirty="0"/>
               <a:t>Go</a:t>
             </a:r>
             <a:r>
-              <a:rPr lang="ru-RU" dirty="0"/>
+              <a:rPr lang="ru-RU" sz="2000" dirty="0"/>
               <a:t>» для сервера, с использованием </a:t>
             </a:r>
             <a:r>
-              <a:rPr lang="en-US" dirty="0"/>
+              <a:rPr lang="en-US" sz="2000" dirty="0"/>
               <a:t>python </a:t>
             </a:r>
             <a:r>
-              <a:rPr lang="ru-RU" dirty="0"/>
+              <a:rPr lang="ru-RU" sz="2000" dirty="0"/>
               <a:t>библиотек «</a:t>
             </a:r>
             <a:r>
-              <a:rPr lang="en-US" dirty="0" err="1"/>
+              <a:rPr lang="en-US" sz="2000" dirty="0" err="1"/>
               <a:t>pygame</a:t>
             </a:r>
             <a:r>
-              <a:rPr lang="ru-RU" dirty="0"/>
+              <a:rPr lang="ru-RU" sz="2000" dirty="0"/>
               <a:t>», «</a:t>
             </a:r>
             <a:r>
-              <a:rPr lang="en-US" dirty="0" err="1"/>
+              <a:rPr lang="en-US" sz="2000" dirty="0" err="1"/>
               <a:t>websocket</a:t>
             </a:r>
             <a:r>
-              <a:rPr lang="ru-RU" dirty="0"/>
+              <a:rPr lang="ru-RU" sz="2000" dirty="0"/>
               <a:t>», «</a:t>
             </a:r>
             <a:r>
-              <a:rPr lang="en-US" dirty="0" err="1"/>
+              <a:rPr lang="en-US" sz="2000" dirty="0" err="1"/>
               <a:t>pytmx</a:t>
             </a:r>
             <a:r>
-              <a:rPr lang="ru-RU" dirty="0"/>
+              <a:rPr lang="ru-RU" sz="2000" dirty="0"/>
               <a:t>»; а также с использованием пользовательской библиотеки </a:t>
             </a:r>
             <a:r>
-              <a:rPr lang="en-US" dirty="0" err="1"/>
+              <a:rPr lang="en-US" sz="2000" dirty="0" err="1"/>
               <a:t>golang</a:t>
             </a:r>
             <a:r>
-              <a:rPr lang="ru-RU" dirty="0"/>
+              <a:rPr lang="ru-RU" sz="2000" dirty="0"/>
               <a:t> «</a:t>
             </a:r>
             <a:r>
-              <a:rPr lang="en-US" dirty="0"/>
+              <a:rPr lang="en-US" sz="2000" dirty="0"/>
               <a:t>gorilla</a:t>
             </a:r>
             <a:r>
-              <a:rPr lang="ru-RU" dirty="0"/>
+              <a:rPr lang="ru-RU" sz="2000" dirty="0"/>
               <a:t>/</a:t>
             </a:r>
             <a:r>
-              <a:rPr lang="en-US" dirty="0" err="1"/>
+              <a:rPr lang="en-US" sz="2000" dirty="0" err="1"/>
               <a:t>websocket</a:t>
             </a:r>
             <a:r>
-              <a:rPr lang="ru-RU" dirty="0"/>
+              <a:rPr lang="ru-RU" sz="2000" dirty="0"/>
               <a:t>» для соединения сервера с клиентами.</a:t>
             </a:r>
           </a:p>
           <a:p>
+            <a:pPr algn="just"/>
             <a:endParaRPr lang="ru-RU" dirty="0"/>
           </a:p>
         </p:txBody>
@@ -7052,13 +6943,6 @@
   <p:clrMapOvr>
     <a:masterClrMapping/>
   </p:clrMapOvr>
-  <p:timing>
-    <p:tnLst>
-      <p:par>
-        <p:cTn id="1" dur="indefinite" restart="never" nodeType="tmRoot"/>
-      </p:par>
-    </p:tnLst>
-  </p:timing>
 </p:sld>
 </file>
 
@@ -7100,6 +6984,7 @@
           <a:bodyPr/>
           <a:lstStyle/>
           <a:p>
+            <a:pPr algn="ctr"/>
             <a:r>
               <a:rPr lang="ru-RU" dirty="0"/>
               <a:t>Новизна, цель и задачи проектной работы</a:t>
@@ -7123,126 +7008,171 @@
             <p:ph idx="1"/>
           </p:nvPr>
         </p:nvSpPr>
-        <p:spPr/>
+        <p:spPr>
+          <a:xfrm>
+            <a:off x="-54265" y="2323578"/>
+            <a:ext cx="11521843" cy="4697260"/>
+          </a:xfrm>
+        </p:spPr>
         <p:txBody>
           <a:bodyPr>
-            <a:normAutofit fontScale="85000" lnSpcReduction="20000"/>
+            <a:noAutofit/>
           </a:bodyPr>
           <a:lstStyle/>
           <a:p>
-            <a:r>
-              <a:rPr lang="ru-RU" b="1" dirty="0"/>
+            <a:pPr algn="just">
+              <a:spcBef>
+                <a:spcPts val="0"/>
+              </a:spcBef>
+              <a:spcAft>
+                <a:spcPts val="300"/>
+              </a:spcAft>
+            </a:pPr>
+            <a:r>
+              <a:rPr lang="ru-RU" sz="2000" b="1" dirty="0"/>
               <a:t>Цель</a:t>
             </a:r>
             <a:r>
-              <a:rPr lang="en-US" dirty="0"/>
+              <a:rPr lang="en-US" sz="2000" dirty="0"/>
               <a:t>: </a:t>
             </a:r>
             <a:r>
-              <a:rPr lang="ru-RU" dirty="0"/>
+              <a:rPr lang="ru-RU" sz="2000" dirty="0"/>
               <a:t>Разработать прототип многопользовательской онлайн 2D-игры на «</a:t>
             </a:r>
             <a:r>
-              <a:rPr lang="en-US" dirty="0"/>
+              <a:rPr lang="en-US" sz="2000" dirty="0"/>
               <a:t>python</a:t>
             </a:r>
             <a:r>
-              <a:rPr lang="ru-RU" dirty="0"/>
+              <a:rPr lang="ru-RU" sz="2000" dirty="0"/>
               <a:t>» с клиент-серверной архитектурой, демонстрирующий реализацию сетевого взаимодействия в реальном времени, управление игровым состоянием на сервере и отзывчивый графический интерфейс в клиенте.</a:t>
             </a:r>
           </a:p>
           <a:p>
             <a:r>
-              <a:rPr lang="ru-RU" b="1" dirty="0"/>
+              <a:rPr lang="ru-RU" sz="2000" b="1" dirty="0"/>
               <a:t>Задачи</a:t>
             </a:r>
             <a:r>
-              <a:rPr lang="en-US" dirty="0"/>
+              <a:rPr lang="en-US" sz="2000" dirty="0"/>
               <a:t>: 	</a:t>
             </a:r>
           </a:p>
           <a:p>
             <a:pPr lvl="1">
+              <a:spcBef>
+                <a:spcPts val="0"/>
+              </a:spcBef>
+              <a:spcAft>
+                <a:spcPts val="200"/>
+              </a:spcAft>
               <a:buFont typeface="+mj-lt"/>
               <a:buAutoNum type="arabicPeriod"/>
             </a:pPr>
             <a:r>
-              <a:rPr lang="ru-RU" sz="1800" dirty="0"/>
-              <a:t>Изучение теоретической литературы</a:t>
+              <a:rPr lang="ru-RU" sz="2000" dirty="0"/>
+              <a:t>Изучение теоретической литературы;</a:t>
             </a:r>
           </a:p>
           <a:p>
             <a:pPr lvl="1">
+              <a:spcBef>
+                <a:spcPts val="0"/>
+              </a:spcBef>
+              <a:spcAft>
+                <a:spcPts val="200"/>
+              </a:spcAft>
               <a:buFont typeface="+mj-lt"/>
               <a:buAutoNum type="arabicPeriod"/>
             </a:pPr>
             <a:r>
-              <a:rPr lang="ru-RU" sz="1800" dirty="0"/>
-              <a:t>Разработка алгоритма работы игры</a:t>
+              <a:rPr lang="ru-RU" sz="2000" dirty="0"/>
+              <a:t>Разработка алгоритма работы игры;</a:t>
             </a:r>
           </a:p>
           <a:p>
             <a:pPr lvl="1">
+              <a:spcBef>
+                <a:spcPts val="0"/>
+              </a:spcBef>
+              <a:spcAft>
+                <a:spcPts val="200"/>
+              </a:spcAft>
               <a:buFont typeface="+mj-lt"/>
               <a:buAutoNum type="arabicPeriod"/>
             </a:pPr>
             <a:r>
-              <a:rPr lang="ru-RU" sz="1800" dirty="0"/>
-              <a:t>Написание кода игры</a:t>
+              <a:rPr lang="ru-RU" sz="2000" dirty="0"/>
+              <a:t>Написание кода игры;</a:t>
             </a:r>
           </a:p>
           <a:p>
             <a:pPr lvl="1">
+              <a:spcBef>
+                <a:spcPts val="0"/>
+              </a:spcBef>
+              <a:spcAft>
+                <a:spcPts val="200"/>
+              </a:spcAft>
               <a:buFont typeface="+mj-lt"/>
               <a:buAutoNum type="arabicPeriod"/>
             </a:pPr>
             <a:r>
-              <a:rPr lang="ru-RU" sz="1800" dirty="0"/>
+              <a:rPr lang="ru-RU" sz="2000" dirty="0"/>
               <a:t>Создание </a:t>
             </a:r>
             <a:r>
-              <a:rPr lang="en-US" sz="1800" dirty="0" err="1"/>
+              <a:rPr lang="en-US" sz="2000" dirty="0" err="1"/>
               <a:t>tmx</a:t>
             </a:r>
             <a:r>
-              <a:rPr lang="en-US" sz="1800" dirty="0"/>
+              <a:rPr lang="en-US" sz="2000" dirty="0"/>
               <a:t>-</a:t>
             </a:r>
             <a:r>
-              <a:rPr lang="ru-RU" sz="1800" dirty="0"/>
-              <a:t>карты</a:t>
+              <a:rPr lang="ru-RU" sz="2000" dirty="0"/>
+              <a:t>карты;</a:t>
             </a:r>
           </a:p>
           <a:p>
             <a:pPr lvl="1">
+              <a:spcBef>
+                <a:spcPts val="0"/>
+              </a:spcBef>
               <a:buFont typeface="+mj-lt"/>
               <a:buAutoNum type="arabicPeriod"/>
             </a:pPr>
             <a:r>
-              <a:rPr lang="ru-RU" sz="1800" dirty="0"/>
-              <a:t>Генерация картинок в нейронных сетях</a:t>
-            </a:r>
-            <a:endParaRPr lang="en-US" sz="1800" dirty="0"/>
-          </a:p>
-          <a:p>
-            <a:r>
-              <a:rPr lang="ru-RU" b="1" dirty="0"/>
+              <a:rPr lang="ru-RU" sz="2000" dirty="0"/>
+              <a:t>Генерация картинок в нейронных сетях.</a:t>
+            </a:r>
+            <a:endParaRPr lang="en-US" sz="2000" dirty="0"/>
+          </a:p>
+          <a:p>
+            <a:pPr algn="just">
+              <a:spcBef>
+                <a:spcPts val="0"/>
+              </a:spcBef>
+            </a:pPr>
+            <a:r>
+              <a:rPr lang="ru-RU" sz="2000" b="1" dirty="0"/>
               <a:t>Новизна</a:t>
             </a:r>
             <a:r>
-              <a:rPr lang="en-US" dirty="0"/>
+              <a:rPr lang="en-US" sz="2000" dirty="0"/>
               <a:t>: </a:t>
             </a:r>
             <a:r>
-              <a:rPr lang="ru-RU" dirty="0"/>
-              <a:t>Новизна проектной работы заключается в исследовании и реализации клиент-серверной архитектуры, где высокопроизводительный сервер реального времени, написанный на языке «Go» (язык, известный своей эффективностью в конкурентных сетевых задачах) взаимодействует с быстрым для прототипирования клиентом на языке «python».</a:t>
+              <a:rPr lang="ru-RU" sz="2000" dirty="0"/>
+              <a:t>Новизна проектной работы заключается в исследовании и реализации клиент-серверной архитектуры, где высокопроизводительный сервер реального времени, написанный на языке «Go» взаимодействует с быстрым для прототипирования клиентом на языке «python».</a:t>
             </a:r>
           </a:p>
           <a:p>
             <a:pPr marL="0" indent="0">
               <a:buNone/>
             </a:pPr>
-            <a:endParaRPr lang="en-US" dirty="0"/>
+            <a:endParaRPr lang="en-US" sz="2000" dirty="0"/>
           </a:p>
         </p:txBody>
       </p:sp>
@@ -7265,7 +7195,7 @@
               <a:rPr lang="ru-RU" smtClean="0"/>
               <a:t>3</a:t>
             </a:fld>
-            <a:endParaRPr lang="ru-RU"/>
+            <a:endParaRPr lang="ru-RU" dirty="0"/>
           </a:p>
         </p:txBody>
       </p:sp>
@@ -7279,13 +7209,6 @@
   <p:clrMapOvr>
     <a:masterClrMapping/>
   </p:clrMapOvr>
-  <p:timing>
-    <p:tnLst>
-      <p:par>
-        <p:cTn id="1" dur="indefinite" restart="never" nodeType="tmRoot"/>
-      </p:par>
-    </p:tnLst>
-  </p:timing>
 </p:sld>
 </file>
 
@@ -7327,6 +7250,7 @@
           <a:bodyPr/>
           <a:lstStyle/>
           <a:p>
+            <a:pPr algn="ctr"/>
             <a:r>
               <a:rPr lang="ru-RU" dirty="0"/>
               <a:t>Обзор существующих аналогов</a:t>
@@ -7353,33 +7277,36 @@
         <p:spPr>
           <a:xfrm>
             <a:off x="230236" y="2267554"/>
-            <a:ext cx="6152456" cy="3636511"/>
+            <a:ext cx="6152456" cy="4227191"/>
           </a:xfrm>
         </p:spPr>
         <p:txBody>
           <a:bodyPr>
-            <a:normAutofit lnSpcReduction="10000"/>
+            <a:normAutofit/>
           </a:bodyPr>
           <a:lstStyle/>
           <a:p>
-            <a:r>
-              <a:rPr lang="ru-RU" dirty="0"/>
+            <a:pPr marL="0" indent="0" algn="just">
+              <a:buNone/>
+            </a:pPr>
+            <a:r>
+              <a:rPr lang="ru-RU" sz="2000" dirty="0"/>
               <a:t>Один из аналогов нашего проекта – игра «Hammerwatch» </a:t>
             </a:r>
             <a:r>
-              <a:rPr lang="en-US" dirty="0"/>
+              <a:rPr lang="en-US" sz="2000" dirty="0"/>
               <a:t>[1]</a:t>
             </a:r>
             <a:r>
-              <a:rPr lang="ru-RU" dirty="0"/>
+              <a:rPr lang="ru-RU" sz="2000" dirty="0"/>
               <a:t>. Она представляет собой динамичный экшен в жанре экшен-РПГ. Игрокам предстоит исследовать мрачные подземелья, состоящие из множества комнат и уровней. В процессе прохождения игроки собирают золото и ресурсы, которые можно тратить на улучшение характеристик персонажа, покупку зелий и специальных предметов</a:t>
             </a:r>
             <a:r>
-              <a:rPr lang="en-US" dirty="0"/>
+              <a:rPr lang="en-US" sz="2000" dirty="0"/>
               <a:t>. </a:t>
             </a:r>
             <a:r>
-              <a:rPr lang="ru-RU" dirty="0"/>
+              <a:rPr lang="ru-RU" sz="2000" dirty="0"/>
               <a:t>Особенностью Hammerwatch является кооперативный мультиплеер, поддерживающий до четырех игроков одновременно.  </a:t>
             </a:r>
           </a:p>
@@ -7439,7 +7366,6 @@
           <a:effectLst>
             <a:reflection blurRad="12700" stA="38000" endPos="28000" dist="5000" dir="5400000" sy="-100000" algn="bl" rotWithShape="0"/>
           </a:effectLst>
-          <a:extLst/>
         </p:spPr>
       </p:pic>
       <p:sp>
@@ -7457,7 +7383,7 @@
         <p:spPr>
           <a:xfrm>
             <a:off x="6784064" y="5251009"/>
-            <a:ext cx="5157181" cy="369332"/>
+            <a:ext cx="4897495" cy="338554"/>
           </a:xfrm>
           <a:prstGeom prst="rect">
             <a:avLst/>
@@ -7471,8 +7397,8 @@
           <a:lstStyle/>
           <a:p>
             <a:r>
-              <a:rPr lang="ru-RU" dirty="0"/>
-              <a:t>Рис. 1 – интерфейс игры «Hammerwatch»</a:t>
+              <a:rPr lang="ru-RU" sz="1600" dirty="0"/>
+              <a:t>Рисунок 1 – интерфейс игры «Hammerwatch»</a:t>
             </a:r>
           </a:p>
         </p:txBody>
@@ -7510,13 +7436,6 @@
   <p:clrMapOvr>
     <a:masterClrMapping/>
   </p:clrMapOvr>
-  <p:timing>
-    <p:tnLst>
-      <p:par>
-        <p:cTn id="1" dur="indefinite" restart="never" nodeType="tmRoot"/>
-      </p:par>
-    </p:tnLst>
-  </p:timing>
 </p:sld>
 </file>
 
@@ -7558,6 +7477,7 @@
           <a:bodyPr/>
           <a:lstStyle/>
           <a:p>
+            <a:pPr algn="ctr"/>
             <a:r>
               <a:rPr lang="ru-RU" dirty="0"/>
               <a:t>Алгоритм работы игры</a:t>
@@ -7623,8 +7543,8 @@
         </p:nvSpPr>
         <p:spPr>
           <a:xfrm>
-            <a:off x="3447860" y="6024297"/>
-            <a:ext cx="5676523" cy="369332"/>
+            <a:off x="3206664" y="6024297"/>
+            <a:ext cx="5843392" cy="338554"/>
           </a:xfrm>
           <a:prstGeom prst="rect">
             <a:avLst/>
@@ -7638,8 +7558,8 @@
           <a:lstStyle/>
           <a:p>
             <a:r>
-              <a:rPr lang="ru-RU" dirty="0"/>
-              <a:t>Рис. 2 – блок-схема алгоритма работы игры</a:t>
+              <a:rPr lang="ru-RU" sz="1600" dirty="0"/>
+              <a:t>Рисунок 2 – блок-схема алгоритма работы игры</a:t>
             </a:r>
           </a:p>
         </p:txBody>
@@ -7677,13 +7597,6 @@
   <p:clrMapOvr>
     <a:masterClrMapping/>
   </p:clrMapOvr>
-  <p:timing>
-    <p:tnLst>
-      <p:par>
-        <p:cTn id="1" dur="indefinite" restart="never" nodeType="tmRoot"/>
-      </p:par>
-    </p:tnLst>
-  </p:timing>
 </p:sld>
 </file>
 
@@ -7725,6 +7638,7 @@
           <a:bodyPr/>
           <a:lstStyle/>
           <a:p>
+            <a:pPr algn="ctr"/>
             <a:r>
               <a:rPr lang="ru-RU" dirty="0"/>
               <a:t>Принцип работы кода</a:t>
@@ -7750,24 +7664,26 @@
         </p:nvSpPr>
         <p:spPr>
           <a:xfrm>
-            <a:off x="625282" y="2380548"/>
-            <a:ext cx="4623726" cy="3636511"/>
+            <a:off x="350729" y="2380548"/>
+            <a:ext cx="6200383" cy="4139249"/>
           </a:xfrm>
         </p:spPr>
         <p:txBody>
           <a:bodyPr>
-            <a:normAutofit fontScale="92500" lnSpcReduction="20000"/>
+            <a:noAutofit/>
           </a:bodyPr>
           <a:lstStyle/>
           <a:p>
-            <a:r>
-              <a:rPr lang="ru-RU" dirty="0"/>
+            <a:pPr algn="just"/>
+            <a:r>
+              <a:rPr lang="ru-RU" sz="2000" dirty="0"/>
               <a:t>Програмный код разработан согласно принципам объектно-ориентированного программирования и событийно-ориентированного программирования. В коде игры представлена клиент-серверная архитектура. </a:t>
             </a:r>
           </a:p>
           <a:p>
-            <a:r>
-              <a:rPr lang="ru-RU" dirty="0"/>
+            <a:pPr algn="just"/>
+            <a:r>
+              <a:rPr lang="ru-RU" sz="2000" dirty="0"/>
               <a:t>Основной цикл игры предполагает постоянную проверку и обработку событий, таких как нажатие клавиш, клики мыши. Также игровой цикл предполагает обновление состояний, таких как обновление анимации, отправка данных на сервер.</a:t>
             </a:r>
           </a:p>
@@ -7795,8 +7711,8 @@
         </p:blipFill>
         <p:spPr>
           <a:xfrm>
-            <a:off x="8127779" y="2074983"/>
-            <a:ext cx="3254219" cy="3464169"/>
+            <a:off x="7412505" y="2162472"/>
+            <a:ext cx="3572822" cy="3803327"/>
           </a:xfrm>
           <a:prstGeom prst="rect">
             <a:avLst/>
@@ -7811,8 +7727,8 @@
         </p:nvSpPr>
         <p:spPr>
           <a:xfrm>
-            <a:off x="8531191" y="5520186"/>
-            <a:ext cx="3544268" cy="553998"/>
+            <a:off x="7412505" y="5965799"/>
+            <a:ext cx="3969493" cy="584775"/>
           </a:xfrm>
           <a:prstGeom prst="rect">
             <a:avLst/>
@@ -7826,26 +7742,25 @@
           <a:lstStyle/>
           <a:p>
             <a:r>
-              <a:rPr lang="ru-RU" sz="1500" dirty="0" smtClean="0"/>
-              <a:t>Рис.3 – пример обработки нажатия клавиш «</a:t>
-            </a:r>
-            <a:r>
-              <a:rPr lang="en-US" sz="1500" dirty="0" smtClean="0"/>
+              <a:rPr lang="ru-RU" sz="1600" dirty="0"/>
+              <a:t>Рисунок 3 – пример обработки нажатия клавиш «</a:t>
+            </a:r>
+            <a:r>
+              <a:rPr lang="en-US" sz="1600" dirty="0"/>
               <a:t>t</a:t>
             </a:r>
             <a:r>
-              <a:rPr lang="ru-RU" sz="1500" dirty="0" smtClean="0"/>
+              <a:rPr lang="ru-RU" sz="1600" dirty="0"/>
               <a:t>» и «</a:t>
             </a:r>
             <a:r>
-              <a:rPr lang="en-US" sz="1500" dirty="0" smtClean="0"/>
+              <a:rPr lang="en-US" sz="1600" dirty="0"/>
               <a:t>Esc</a:t>
             </a:r>
             <a:r>
-              <a:rPr lang="ru-RU" sz="1500" dirty="0" smtClean="0"/>
+              <a:rPr lang="ru-RU" sz="1600" dirty="0"/>
               <a:t>»</a:t>
             </a:r>
-            <a:endParaRPr lang="ru-RU" sz="1500" dirty="0"/>
           </a:p>
         </p:txBody>
       </p:sp>
@@ -7882,13 +7797,6 @@
   <p:clrMapOvr>
     <a:masterClrMapping/>
   </p:clrMapOvr>
-  <p:timing>
-    <p:tnLst>
-      <p:par>
-        <p:cTn id="1" dur="indefinite" restart="never" nodeType="tmRoot"/>
-      </p:par>
-    </p:tnLst>
-  </p:timing>
 </p:sld>
 </file>
 
@@ -7924,11 +7832,11 @@
           <a:bodyPr/>
           <a:lstStyle/>
           <a:p>
-            <a:r>
-              <a:rPr lang="ru-RU" dirty="0" smtClean="0"/>
+            <a:pPr algn="ctr"/>
+            <a:r>
+              <a:rPr lang="ru-RU" dirty="0"/>
               <a:t>Структура игры</a:t>
             </a:r>
-            <a:endParaRPr lang="ru-RU" dirty="0"/>
           </a:p>
         </p:txBody>
       </p:sp>
@@ -7944,78 +7852,64 @@
         </p:nvSpPr>
         <p:spPr>
           <a:xfrm>
-            <a:off x="291174" y="2354172"/>
-            <a:ext cx="6083250" cy="3636511"/>
+            <a:off x="291173" y="2354172"/>
+            <a:ext cx="7362229" cy="4109258"/>
           </a:xfrm>
         </p:spPr>
         <p:txBody>
           <a:bodyPr>
-            <a:normAutofit fontScale="92500" lnSpcReduction="20000"/>
+            <a:noAutofit/>
           </a:bodyPr>
           <a:lstStyle/>
           <a:p>
-            <a:r>
-              <a:rPr lang="ru-RU" dirty="0" smtClean="0"/>
-              <a:t>На</a:t>
-            </a:r>
-            <a:r>
-              <a:rPr lang="ru-RU" dirty="0"/>
-              <a:t>ш</a:t>
-            </a:r>
-            <a:r>
-              <a:rPr lang="ru-RU" dirty="0" smtClean="0"/>
-              <a:t> </a:t>
-            </a:r>
-            <a:r>
-              <a:rPr lang="ru-RU" dirty="0"/>
-              <a:t>проект состоит из трех основных компонентов:</a:t>
-            </a:r>
-          </a:p>
-          <a:p>
-            <a:pPr lvl="1">
+            <a:pPr algn="just"/>
+            <a:r>
+              <a:rPr lang="ru-RU" sz="2000" dirty="0"/>
+              <a:t>Наш проект состоит из трех основных компонентов:</a:t>
+            </a:r>
+          </a:p>
+          <a:p>
+            <a:pPr lvl="1" algn="just">
               <a:buFont typeface="+mj-lt"/>
               <a:buAutoNum type="arabicPeriod"/>
             </a:pPr>
             <a:r>
-              <a:rPr lang="ru-RU" dirty="0"/>
-              <a:t>Лаунчер. </a:t>
-            </a:r>
-          </a:p>
-          <a:p>
-            <a:pPr lvl="1">
+              <a:rPr lang="ru-RU" sz="2000" dirty="0" err="1"/>
+              <a:t>Лаунчер</a:t>
+            </a:r>
+            <a:r>
+              <a:rPr lang="ru-RU" sz="2000" dirty="0"/>
+              <a:t>;</a:t>
+            </a:r>
+          </a:p>
+          <a:p>
+            <a:pPr lvl="1" algn="just">
               <a:buFont typeface="+mj-lt"/>
               <a:buAutoNum type="arabicPeriod"/>
             </a:pPr>
             <a:r>
-              <a:rPr lang="ru-RU" dirty="0"/>
-              <a:t>Клиент. </a:t>
-            </a:r>
-          </a:p>
-          <a:p>
-            <a:pPr lvl="1">
+              <a:rPr lang="ru-RU" sz="2000" dirty="0"/>
+              <a:t>Клиент;</a:t>
+            </a:r>
+          </a:p>
+          <a:p>
+            <a:pPr lvl="1" algn="just">
               <a:buFont typeface="+mj-lt"/>
               <a:buAutoNum type="arabicPeriod"/>
             </a:pPr>
             <a:r>
-              <a:rPr lang="ru-RU" dirty="0" smtClean="0"/>
-              <a:t>Сервер</a:t>
-            </a:r>
-            <a:endParaRPr lang="en-US" dirty="0" smtClean="0"/>
-          </a:p>
-          <a:p>
-            <a:pPr lvl="1">
-              <a:buFont typeface="+mj-lt"/>
-              <a:buAutoNum type="arabicPeriod"/>
-            </a:pPr>
-            <a:endParaRPr lang="ru-RU" dirty="0"/>
-          </a:p>
-          <a:p>
-            <a:r>
-              <a:rPr lang="ru-RU" b="1" dirty="0"/>
+              <a:rPr lang="ru-RU" sz="2000" dirty="0"/>
+              <a:t>Сервер.</a:t>
+            </a:r>
+          </a:p>
+          <a:p>
+            <a:pPr algn="just"/>
+            <a:r>
+              <a:rPr lang="ru-RU" sz="2000" b="1" dirty="0"/>
               <a:t>Лаунчер</a:t>
             </a:r>
             <a:r>
-              <a:rPr lang="ru-RU" dirty="0"/>
+              <a:rPr lang="ru-RU" sz="2000" dirty="0"/>
               <a:t> – это отдельное приложение, которое включает в себя регистрацию и вход с проверкой в базе данных, автоматическую проверку при каждом запуске, загрузку новых версий с прогресс-баром и отображением статуса, безопасную передачу токена авторизации в игру и запуск игры с правильными параметрами подключения</a:t>
             </a:r>
           </a:p>
@@ -8043,7 +7937,7 @@
         </p:blipFill>
         <p:spPr>
           <a:xfrm>
-            <a:off x="8337375" y="2269706"/>
+            <a:off x="8061840" y="2520227"/>
             <a:ext cx="3373979" cy="3252667"/>
           </a:xfrm>
           <a:prstGeom prst="rect">
@@ -8059,8 +7953,8 @@
         </p:nvSpPr>
         <p:spPr>
           <a:xfrm>
-            <a:off x="8862646" y="5621351"/>
-            <a:ext cx="2611612" cy="369332"/>
+            <a:off x="8061841" y="5861791"/>
+            <a:ext cx="3520184" cy="338554"/>
           </a:xfrm>
           <a:prstGeom prst="rect">
             <a:avLst/>
@@ -8068,24 +7962,23 @@
           <a:noFill/>
         </p:spPr>
         <p:txBody>
-          <a:bodyPr wrap="none" rtlCol="0">
+          <a:bodyPr wrap="square" rtlCol="0">
             <a:spAutoFit/>
           </a:bodyPr>
           <a:lstStyle/>
           <a:p>
             <a:r>
-              <a:rPr lang="ru-RU" dirty="0" smtClean="0"/>
-              <a:t>Рис.3 – </a:t>
-            </a:r>
-            <a:r>
-              <a:rPr lang="ru-RU" dirty="0" err="1" smtClean="0"/>
+              <a:rPr lang="ru-RU" sz="1600" dirty="0"/>
+              <a:t>Рисунок 4 – </a:t>
+            </a:r>
+            <a:r>
+              <a:rPr lang="ru-RU" sz="1600" dirty="0" err="1"/>
               <a:t>лаунчер</a:t>
             </a:r>
             <a:r>
-              <a:rPr lang="ru-RU" dirty="0" smtClean="0"/>
+              <a:rPr lang="ru-RU" sz="1600" dirty="0"/>
               <a:t> игры</a:t>
             </a:r>
-            <a:endParaRPr lang="ru-RU" dirty="0"/>
           </a:p>
         </p:txBody>
       </p:sp>
@@ -8122,13 +8015,6 @@
   <p:clrMapOvr>
     <a:masterClrMapping/>
   </p:clrMapOvr>
-  <p:timing>
-    <p:tnLst>
-      <p:par>
-        <p:cTn id="1" dur="indefinite" restart="never" nodeType="tmRoot"/>
-      </p:par>
-    </p:tnLst>
-  </p:timing>
 </p:sld>
 </file>
 
@@ -8170,6 +8056,7 @@
           <a:bodyPr/>
           <a:lstStyle/>
           <a:p>
+            <a:pPr algn="ctr"/>
             <a:r>
               <a:rPr lang="ru-RU" dirty="0"/>
               <a:t>Мир и графика игры</a:t>
@@ -8195,16 +8082,19 @@
         </p:nvSpPr>
         <p:spPr>
           <a:xfrm>
-            <a:off x="284557" y="2629692"/>
-            <a:ext cx="5627355" cy="3636511"/>
+            <a:off x="284557" y="2843408"/>
+            <a:ext cx="7481580" cy="3870543"/>
           </a:xfrm>
         </p:spPr>
         <p:txBody>
-          <a:bodyPr/>
-          <a:lstStyle/>
-          <a:p>
-            <a:r>
-              <a:rPr lang="ru-RU" sz="1500" dirty="0">
+          <a:bodyPr>
+            <a:noAutofit/>
+          </a:bodyPr>
+          <a:lstStyle/>
+          <a:p>
+            <a:pPr algn="just"/>
+            <a:r>
+              <a:rPr lang="ru-RU" sz="2000" dirty="0">
                 <a:latin typeface="Century Gothic (Основной текст)"/>
                 <a:ea typeface="Times New Roman"/>
                 <a:cs typeface="Times New Roman"/>
@@ -8212,7 +8102,7 @@
               <a:t>Сюжет игры повествует об одиноком путнике, который путешествует по миру, помогает страждущим и защищает слабых</a:t>
             </a:r>
             <a:r>
-              <a:rPr lang="en-US" sz="1500" dirty="0">
+              <a:rPr lang="en-US" sz="2000" dirty="0">
                 <a:latin typeface="Century Gothic (Основной текст)"/>
                 <a:ea typeface="Times New Roman"/>
                 <a:cs typeface="Times New Roman"/>
@@ -8220,22 +8110,23 @@
               <a:t>,</a:t>
             </a:r>
             <a:r>
-              <a:rPr lang="ru-RU" sz="1500" dirty="0">
+              <a:rPr lang="ru-RU" sz="2000" dirty="0">
                 <a:latin typeface="Century Gothic (Основной текст)"/>
                 <a:ea typeface="Times New Roman"/>
                 <a:cs typeface="Times New Roman"/>
               </a:rPr>
               <a:t> сражаясь с различным злом, которое наполняет темные леса и пещеры.</a:t>
             </a:r>
-            <a:endParaRPr lang="en-US" sz="1500" dirty="0">
+            <a:endParaRPr lang="en-US" sz="2000" dirty="0">
               <a:latin typeface="Century Gothic (Основной текст)"/>
               <a:ea typeface="Times New Roman"/>
               <a:cs typeface="Times New Roman"/>
             </a:endParaRPr>
           </a:p>
           <a:p>
-            <a:r>
-              <a:rPr lang="ru-RU" sz="1500" dirty="0">
+            <a:pPr algn="just"/>
+            <a:r>
+              <a:rPr lang="ru-RU" sz="2000" dirty="0">
                 <a:latin typeface="Century Gothic (Основной текст)"/>
                 <a:ea typeface="Times New Roman"/>
                 <a:cs typeface="Times New Roman"/>
@@ -8243,7 +8134,7 @@
               <a:t>Графика игры подготовлена с помощью нейросетевых сервисов для генерации изображений, таких как </a:t>
             </a:r>
             <a:r>
-              <a:rPr lang="ru-RU" sz="1500" dirty="0" err="1">
+              <a:rPr lang="ru-RU" sz="2000" dirty="0" err="1">
                 <a:latin typeface="Century Gothic (Основной текст)"/>
                 <a:ea typeface="Times New Roman"/>
                 <a:cs typeface="Times New Roman"/>
@@ -8251,7 +8142,7 @@
               <a:t>Leonardo.Ai</a:t>
             </a:r>
             <a:r>
-              <a:rPr lang="ru-RU" sz="1500" dirty="0">
+              <a:rPr lang="ru-RU" sz="2000" dirty="0">
                 <a:latin typeface="Century Gothic (Основной текст)"/>
                 <a:ea typeface="Times New Roman"/>
                 <a:cs typeface="Times New Roman"/>
@@ -8259,7 +8150,7 @@
               <a:t> [</a:t>
             </a:r>
             <a:r>
-              <a:rPr lang="en-US" sz="1500" dirty="0">
+              <a:rPr lang="en-US" sz="2000" dirty="0">
                 <a:latin typeface="Century Gothic (Основной текст)"/>
                 <a:ea typeface="Times New Roman"/>
                 <a:cs typeface="Times New Roman"/>
@@ -8267,7 +8158,7 @@
               <a:t>2</a:t>
             </a:r>
             <a:r>
-              <a:rPr lang="ru-RU" sz="1500" dirty="0">
+              <a:rPr lang="ru-RU" sz="2000" dirty="0">
                 <a:latin typeface="Century Gothic (Основной текст)"/>
                 <a:ea typeface="Times New Roman"/>
                 <a:cs typeface="Times New Roman"/>
@@ -8275,7 +8166,7 @@
               <a:t>] и Fusion </a:t>
             </a:r>
             <a:r>
-              <a:rPr lang="ru-RU" sz="1500" dirty="0" err="1">
+              <a:rPr lang="ru-RU" sz="2000" dirty="0" err="1">
                 <a:latin typeface="Century Gothic (Основной текст)"/>
                 <a:ea typeface="Times New Roman"/>
                 <a:cs typeface="Times New Roman"/>
@@ -8283,22 +8174,23 @@
               <a:t>Brain</a:t>
             </a:r>
             <a:r>
-              <a:rPr lang="ru-RU" sz="1500" dirty="0">
+              <a:rPr lang="ru-RU" sz="2000" dirty="0">
                 <a:latin typeface="Century Gothic (Основной текст)"/>
                 <a:ea typeface="Times New Roman"/>
                 <a:cs typeface="Times New Roman"/>
               </a:rPr>
               <a:t>. Такой подход к созданию изображений позволил сильно упростить процесс разработки и отказаться от необходимости в отдельном художнике.</a:t>
             </a:r>
-            <a:endParaRPr lang="en-US" sz="1500" dirty="0">
+            <a:endParaRPr lang="en-US" sz="2000" dirty="0">
               <a:latin typeface="Century Gothic (Основной текст)"/>
               <a:ea typeface="Times New Roman"/>
               <a:cs typeface="Times New Roman"/>
             </a:endParaRPr>
           </a:p>
           <a:p>
-            <a:r>
-              <a:rPr lang="ru-RU" sz="1500" dirty="0">
+            <a:pPr algn="just"/>
+            <a:r>
+              <a:rPr lang="ru-RU" sz="2000" dirty="0">
                 <a:latin typeface="Century Gothic (Основной текст)"/>
                 <a:ea typeface="Times New Roman"/>
                 <a:cs typeface="Times New Roman"/>
@@ -8306,7 +8198,7 @@
               <a:t>Также в игре представлена </a:t>
             </a:r>
             <a:r>
-              <a:rPr lang="en-US" sz="1500" dirty="0" err="1">
+              <a:rPr lang="en-US" sz="2000" dirty="0" err="1">
                 <a:latin typeface="Century Gothic (Основной текст)"/>
                 <a:ea typeface="Times New Roman"/>
                 <a:cs typeface="Times New Roman"/>
@@ -8314,7 +8206,7 @@
               <a:t>tmx</a:t>
             </a:r>
             <a:r>
-              <a:rPr lang="en-US" sz="1500" dirty="0">
+              <a:rPr lang="en-US" sz="2000" dirty="0">
                 <a:latin typeface="Century Gothic (Основной текст)"/>
                 <a:ea typeface="Times New Roman"/>
                 <a:cs typeface="Times New Roman"/>
@@ -8322,29 +8214,24 @@
               <a:t>-</a:t>
             </a:r>
             <a:r>
-              <a:rPr lang="ru-RU" sz="1500" dirty="0">
+              <a:rPr lang="ru-RU" sz="2000" dirty="0">
                 <a:latin typeface="Century Gothic (Основной текст)"/>
                 <a:ea typeface="Times New Roman"/>
                 <a:cs typeface="Times New Roman"/>
               </a:rPr>
               <a:t>карта, созданная нами.</a:t>
             </a:r>
-            <a:endParaRPr lang="en-US" sz="1500" dirty="0">
-              <a:latin typeface="Century Gothic (Основной текст)"/>
-              <a:ea typeface="Times New Roman"/>
-              <a:cs typeface="Times New Roman"/>
-            </a:endParaRPr>
-          </a:p>
-          <a:p>
-            <a:endParaRPr lang="ru-RU" sz="1500" dirty="0">
+            <a:endParaRPr lang="ru-RU" sz="2000" dirty="0">
               <a:latin typeface="Century Gothic (Основной текст)"/>
             </a:endParaRPr>
           </a:p>
           <a:p>
-            <a:endParaRPr lang="ru-RU" sz="1400" dirty="0"/>
-          </a:p>
-          <a:p>
-            <a:endParaRPr lang="ru-RU" dirty="0"/>
+            <a:pPr algn="just"/>
+            <a:endParaRPr lang="ru-RU" sz="2000" dirty="0"/>
+          </a:p>
+          <a:p>
+            <a:pPr algn="just"/>
+            <a:endParaRPr lang="ru-RU" sz="2000" dirty="0"/>
           </a:p>
         </p:txBody>
       </p:sp>
@@ -8434,8 +8321,8 @@
         </p:nvSpPr>
         <p:spPr>
           <a:xfrm>
-            <a:off x="8193386" y="3815154"/>
-            <a:ext cx="3618367" cy="553998"/>
+            <a:off x="8129392" y="3815154"/>
+            <a:ext cx="3914384" cy="584775"/>
           </a:xfrm>
           <a:prstGeom prst="rect">
             <a:avLst/>
@@ -8449,14 +8336,8 @@
           <a:lstStyle/>
           <a:p>
             <a:r>
-              <a:rPr lang="ru-RU" sz="1500" dirty="0"/>
-              <a:t>Рис.3 – пейзаж из мира игры </a:t>
-            </a:r>
-          </a:p>
-          <a:p>
-            <a:r>
-              <a:rPr lang="ru-RU" sz="1500" dirty="0"/>
-              <a:t>в светлой теме</a:t>
+              <a:rPr lang="ru-RU" sz="1600" dirty="0"/>
+              <a:t>Рисунок 5 – пейзаж из мира игры в светлой теме</a:t>
             </a:r>
           </a:p>
         </p:txBody>
@@ -8475,8 +8356,8 @@
         </p:nvSpPr>
         <p:spPr>
           <a:xfrm>
-            <a:off x="8203072" y="6140644"/>
-            <a:ext cx="3608680" cy="830997"/>
+            <a:off x="8129392" y="6140644"/>
+            <a:ext cx="3682360" cy="584775"/>
           </a:xfrm>
           <a:prstGeom prst="rect">
             <a:avLst/>
@@ -8490,19 +8371,16 @@
           <a:lstStyle/>
           <a:p>
             <a:r>
-              <a:rPr lang="ru-RU" sz="1500" dirty="0"/>
-              <a:t>Рис.3 – пейзаж из мира игры </a:t>
-            </a:r>
-          </a:p>
-          <a:p>
-            <a:r>
-              <a:rPr lang="ru-RU" sz="1500" dirty="0"/>
+              <a:rPr lang="ru-RU" sz="1600" dirty="0"/>
+              <a:t>Рисунок 6 – пейзаж из мира игры </a:t>
+            </a:r>
+          </a:p>
+          <a:p>
+            <a:r>
+              <a:rPr lang="ru-RU" sz="1600" dirty="0"/>
               <a:t>в тёмной теме</a:t>
             </a:r>
           </a:p>
-          <a:p>
-            <a:endParaRPr lang="ru-RU" dirty="0"/>
-          </a:p>
         </p:txBody>
       </p:sp>
       <p:sp>
@@ -8515,7 +8393,12 @@
             <p:ph type="sldNum" sz="quarter" idx="12"/>
           </p:nvPr>
         </p:nvSpPr>
-        <p:spPr/>
+        <p:spPr>
+          <a:xfrm>
+            <a:off x="10749597" y="6140644"/>
+            <a:ext cx="1062155" cy="490599"/>
+          </a:xfrm>
+        </p:spPr>
         <p:txBody>
           <a:bodyPr/>
           <a:lstStyle/>
@@ -8524,7 +8407,7 @@
               <a:rPr lang="ru-RU" smtClean="0"/>
               <a:t>8</a:t>
             </a:fld>
-            <a:endParaRPr lang="ru-RU"/>
+            <a:endParaRPr lang="ru-RU" dirty="0"/>
           </a:p>
         </p:txBody>
       </p:sp>
@@ -8538,13 +8421,6 @@
   <p:clrMapOvr>
     <a:masterClrMapping/>
   </p:clrMapOvr>
-  <p:timing>
-    <p:tnLst>
-      <p:par>
-        <p:cTn id="1" dur="indefinite" restart="never" nodeType="tmRoot"/>
-      </p:par>
-    </p:tnLst>
-  </p:timing>
 </p:sld>
 </file>
 
@@ -8586,6 +8462,7 @@
           <a:bodyPr/>
           <a:lstStyle/>
           <a:p>
+            <a:pPr algn="ctr"/>
             <a:r>
               <a:rPr lang="ru-RU" dirty="0"/>
               <a:t>Заключение</a:t>
@@ -8609,33 +8486,42 @@
             <p:ph idx="1"/>
           </p:nvPr>
         </p:nvSpPr>
-        <p:spPr/>
-        <p:txBody>
-          <a:bodyPr/>
-          <a:lstStyle/>
-          <a:p>
-            <a:r>
-              <a:rPr lang="ru-RU" dirty="0">
+        <p:spPr>
+          <a:xfrm>
+            <a:off x="361512" y="2198318"/>
+            <a:ext cx="7229261" cy="4020855"/>
+          </a:xfrm>
+        </p:spPr>
+        <p:txBody>
+          <a:bodyPr>
+            <a:normAutofit/>
+          </a:bodyPr>
+          <a:lstStyle/>
+          <a:p>
+            <a:pPr algn="just"/>
+            <a:r>
+              <a:rPr lang="ru-RU" sz="2000" dirty="0">
                 <a:latin typeface="Century Gothic (Основной текст)"/>
               </a:rPr>
               <a:t>В результате проделанной работы была разработана полноценная 2</a:t>
             </a:r>
             <a:r>
-              <a:rPr lang="en-US" dirty="0">
+              <a:rPr lang="en-US" sz="2000" dirty="0">
                 <a:latin typeface="Century Gothic (Основной текст)"/>
               </a:rPr>
               <a:t>d</a:t>
             </a:r>
             <a:r>
-              <a:rPr lang="ru-RU" dirty="0">
+              <a:rPr lang="ru-RU" sz="2000" dirty="0">
                 <a:latin typeface="Century Gothic (Основной текст)"/>
               </a:rPr>
               <a:t> онлайн игра с системой битв, сюжетом и изображениями. Также в игре можно открыть настройки как в меню, так и во время игры. </a:t>
             </a:r>
           </a:p>
           <a:p>
-            <a:r>
-              <a:rPr lang="ru-RU" dirty="0">
+            <a:pPr algn="just"/>
+            <a:r>
+              <a:rPr lang="ru-RU" sz="2000" dirty="0">
                 <a:latin typeface="Century Gothic (Основной текст)"/>
                 <a:ea typeface="Times New Roman"/>
                 <a:cs typeface="Times New Roman" panose="02020603050405020304" pitchFamily="18" charset="0"/>
@@ -8643,7 +8529,7 @@
               <a:t>Нами были получены знания по игровой разработке в небольшой команде, а так же мы получили большой опыт в работе с нейросетями.</a:t>
             </a:r>
             <a:r>
-              <a:rPr lang="en-US" dirty="0">
+              <a:rPr lang="en-US" sz="2000" dirty="0">
                 <a:latin typeface="Century Gothic (Основной текст)"/>
                 <a:ea typeface="Times New Roman"/>
                 <a:cs typeface="Times New Roman" panose="02020603050405020304" pitchFamily="18" charset="0"/>
@@ -8651,67 +8537,18 @@
               <a:t> </a:t>
             </a:r>
             <a:r>
-              <a:rPr lang="ru-RU" dirty="0">
+              <a:rPr lang="ru-RU" sz="2000" dirty="0">
                 <a:latin typeface="Century Gothic (Основной текст)"/>
                 <a:ea typeface="Times New Roman"/>
                 <a:cs typeface="Times New Roman" panose="02020603050405020304" pitchFamily="18" charset="0"/>
               </a:rPr>
-              <a:t>Полученные навыки программирования позволят нам дальше развивать свой продукт и создавать новые увлекательные игры</a:t>
-            </a:r>
-            <a:r>
-              <a:rPr lang="ru-RU" dirty="0" smtClean="0">
-                <a:latin typeface="Century Gothic (Основной текст)"/>
-                <a:ea typeface="Times New Roman"/>
-                <a:cs typeface="Times New Roman" panose="02020603050405020304" pitchFamily="18" charset="0"/>
-              </a:rPr>
-              <a:t>.</a:t>
-            </a:r>
-            <a:endParaRPr lang="en-US" dirty="0" smtClean="0">
+              <a:t>Полученные навыки программирования позволят нам дальше развивать свой продукт и создавать новые увлекательные игры.</a:t>
+            </a:r>
+            <a:endParaRPr lang="en-US" sz="2000" dirty="0">
               <a:latin typeface="Century Gothic (Основной текст)"/>
               <a:ea typeface="Times New Roman"/>
               <a:cs typeface="Times New Roman" panose="02020603050405020304" pitchFamily="18" charset="0"/>
             </a:endParaRPr>
-          </a:p>
-          <a:p>
-            <a:r>
-              <a:rPr lang="en-US" dirty="0" smtClean="0">
-                <a:latin typeface="Century Gothic (Основной текст)"/>
-                <a:ea typeface="Times New Roman"/>
-                <a:cs typeface="Times New Roman" panose="02020603050405020304" pitchFamily="18" charset="0"/>
-              </a:rPr>
-              <a:t>QR-</a:t>
-            </a:r>
-            <a:r>
-              <a:rPr lang="ru-RU" dirty="0" smtClean="0">
-                <a:latin typeface="Century Gothic (Основной текст)"/>
-                <a:ea typeface="Times New Roman"/>
-                <a:cs typeface="Times New Roman" panose="02020603050405020304" pitchFamily="18" charset="0"/>
-              </a:rPr>
-              <a:t>код на репозиторий </a:t>
-            </a:r>
-            <a:r>
-              <a:rPr lang="en-US" dirty="0" smtClean="0">
-                <a:latin typeface="Century Gothic (Основной текст)"/>
-                <a:ea typeface="Times New Roman"/>
-                <a:cs typeface="Times New Roman" panose="02020603050405020304" pitchFamily="18" charset="0"/>
-              </a:rPr>
-              <a:t>Github:</a:t>
-            </a:r>
-            <a:endParaRPr lang="ru-RU" dirty="0">
-              <a:latin typeface="Century Gothic (Основной текст)"/>
-              <a:ea typeface="Times New Roman"/>
-              <a:cs typeface="Times New Roman" panose="02020603050405020304" pitchFamily="18" charset="0"/>
-            </a:endParaRPr>
-          </a:p>
-          <a:p>
-            <a:endParaRPr lang="ru-RU" dirty="0">
-              <a:latin typeface="Times New Roman" panose="02020603050405020304" pitchFamily="18" charset="0"/>
-              <a:ea typeface="Times New Roman"/>
-              <a:cs typeface="Times New Roman" panose="02020603050405020304" pitchFamily="18" charset="0"/>
-            </a:endParaRPr>
-          </a:p>
-          <a:p>
-            <a:endParaRPr lang="ru-RU" dirty="0"/>
           </a:p>
         </p:txBody>
       </p:sp>
@@ -8737,8 +8574,8 @@
         </p:blipFill>
         <p:spPr>
           <a:xfrm>
-            <a:off x="4765431" y="4515192"/>
-            <a:ext cx="1858108" cy="1858108"/>
+            <a:off x="8505066" y="2479852"/>
+            <a:ext cx="2173265" cy="2173265"/>
           </a:xfrm>
           <a:prstGeom prst="roundRect">
             <a:avLst>
@@ -8781,6 +8618,69 @@
           </a:p>
         </p:txBody>
       </p:sp>
+      <p:sp>
+        <p:nvSpPr>
+          <p:cNvPr id="6" name="TextBox 5">
+            <a:extLst>
+              <a:ext uri="{FF2B5EF4-FFF2-40B4-BE49-F238E27FC236}">
+                <a16:creationId xmlns:a16="http://schemas.microsoft.com/office/drawing/2014/main" id="{3AEB7E5A-0F0F-421F-959F-0F3545411928}"/>
+              </a:ext>
+            </a:extLst>
+          </p:cNvPr>
+          <p:cNvSpPr txBox="1"/>
+          <p:nvPr/>
+        </p:nvSpPr>
+        <p:spPr>
+          <a:xfrm>
+            <a:off x="8386175" y="4856303"/>
+            <a:ext cx="2542784" cy="584775"/>
+          </a:xfrm>
+          <a:prstGeom prst="rect">
+            <a:avLst/>
+          </a:prstGeom>
+          <a:noFill/>
+        </p:spPr>
+        <p:txBody>
+          <a:bodyPr wrap="square" rtlCol="0">
+            <a:spAutoFit/>
+          </a:bodyPr>
+          <a:lstStyle/>
+          <a:p>
+            <a:r>
+              <a:rPr lang="ru-RU" sz="1600" dirty="0"/>
+              <a:t>Рисунок 7 – </a:t>
+            </a:r>
+            <a:r>
+              <a:rPr lang="en-US" sz="1600" dirty="0">
+                <a:latin typeface="Century Gothic (Основной текст)"/>
+                <a:ea typeface="Times New Roman"/>
+                <a:cs typeface="Times New Roman" panose="02020603050405020304" pitchFamily="18" charset="0"/>
+              </a:rPr>
+              <a:t>QR-</a:t>
+            </a:r>
+            <a:r>
+              <a:rPr lang="ru-RU" sz="1600" dirty="0">
+                <a:latin typeface="Century Gothic (Основной текст)"/>
+                <a:ea typeface="Times New Roman"/>
+                <a:cs typeface="Times New Roman" panose="02020603050405020304" pitchFamily="18" charset="0"/>
+              </a:rPr>
+              <a:t>код на репозиторий </a:t>
+            </a:r>
+            <a:r>
+              <a:rPr lang="en-US" sz="1600" dirty="0" err="1">
+                <a:latin typeface="Century Gothic (Основной текст)"/>
+                <a:ea typeface="Times New Roman"/>
+                <a:cs typeface="Times New Roman" panose="02020603050405020304" pitchFamily="18" charset="0"/>
+              </a:rPr>
+              <a:t>Github</a:t>
+            </a:r>
+            <a:r>
+              <a:rPr lang="ru-RU" sz="1600" dirty="0"/>
+              <a:t> </a:t>
+            </a:r>
+          </a:p>
+        </p:txBody>
+      </p:sp>
     </p:spTree>
     <p:extLst>
       <p:ext uri="{BB962C8B-B14F-4D97-AF65-F5344CB8AC3E}">
@@ -8791,13 +8691,6 @@
   <p:clrMapOvr>
     <a:masterClrMapping/>
   </p:clrMapOvr>
-  <p:timing>
-    <p:tnLst>
-      <p:par>
-        <p:cTn id="1" dur="indefinite" restart="never" nodeType="tmRoot"/>
-      </p:par>
-    </p:tnLst>
-  </p:timing>
 </p:sld>
 </file>
 

--- a/Документация/origin.pptx
+++ b/Документация/origin.pptx
@@ -5,21 +5,22 @@
     <p:sldMasterId id="2147483678" r:id="rId1"/>
   </p:sldMasterIdLst>
   <p:notesMasterIdLst>
-    <p:notesMasterId r:id="rId14"/>
+    <p:notesMasterId r:id="rId15"/>
   </p:notesMasterIdLst>
   <p:sldIdLst>
     <p:sldId id="256" r:id="rId2"/>
     <p:sldId id="257" r:id="rId3"/>
     <p:sldId id="258" r:id="rId4"/>
-    <p:sldId id="259" r:id="rId5"/>
-    <p:sldId id="260" r:id="rId6"/>
-    <p:sldId id="261" r:id="rId7"/>
-    <p:sldId id="267" r:id="rId8"/>
-    <p:sldId id="262" r:id="rId9"/>
-    <p:sldId id="263" r:id="rId10"/>
-    <p:sldId id="264" r:id="rId11"/>
-    <p:sldId id="265" r:id="rId12"/>
-    <p:sldId id="266" r:id="rId13"/>
+    <p:sldId id="268" r:id="rId5"/>
+    <p:sldId id="259" r:id="rId6"/>
+    <p:sldId id="260" r:id="rId7"/>
+    <p:sldId id="261" r:id="rId8"/>
+    <p:sldId id="267" r:id="rId9"/>
+    <p:sldId id="262" r:id="rId10"/>
+    <p:sldId id="263" r:id="rId11"/>
+    <p:sldId id="264" r:id="rId12"/>
+    <p:sldId id="265" r:id="rId13"/>
+    <p:sldId id="266" r:id="rId14"/>
   </p:sldIdLst>
   <p:sldSz cx="12192000" cy="6858000"/>
   <p:notesSz cx="6858000" cy="9144000"/>
@@ -208,7 +209,7 @@
           <a:p>
             <a:fld id="{71AEE8C5-8279-4FDE-9148-3B4506582D84}" type="datetimeFigureOut">
               <a:rPr lang="ru-RU" smtClean="0"/>
-              <a:t>05.02.2026</a:t>
+              <a:t>09.02.2026</a:t>
             </a:fld>
             <a:endParaRPr lang="ru-RU"/>
           </a:p>
@@ -570,7 +571,7 @@
           <a:effectLst/>
           <a:extLst>
             <a:ext uri="{91240B29-F687-4f45-9708-019B960494DF}">
-              <a14:hiddenLine xmlns="" xmlns:a14="http://schemas.microsoft.com/office/drawing/2010/main" w="9525">
+              <a14:hiddenLine xmlns:a14="http://schemas.microsoft.com/office/drawing/2010/main" xmlns="" w="9525">
                 <a:solidFill>
                   <a:srgbClr val="000000"/>
                 </a:solidFill>
@@ -769,7 +770,7 @@
           <a:p>
             <a:fld id="{61A71F59-3127-4757-A63A-AAB453B67D83}" type="datetime1">
               <a:rPr lang="ru-RU" smtClean="0"/>
-              <a:t>05.02.2026</a:t>
+              <a:t>09.02.2026</a:t>
             </a:fld>
             <a:endParaRPr lang="ru-RU"/>
           </a:p>
@@ -1087,7 +1088,7 @@
           <a:p>
             <a:fld id="{6E92CCC3-2E42-4729-9532-228BA3D72016}" type="datetime1">
               <a:rPr lang="ru-RU" smtClean="0"/>
-              <a:t>05.02.2026</a:t>
+              <a:t>09.02.2026</a:t>
             </a:fld>
             <a:endParaRPr lang="ru-RU"/>
           </a:p>
@@ -1582,7 +1583,7 @@
           <a:p>
             <a:fld id="{17BE8B74-8830-4018-A6A2-B009605D144E}" type="datetime1">
               <a:rPr lang="ru-RU" smtClean="0"/>
-              <a:t>05.02.2026</a:t>
+              <a:t>09.02.2026</a:t>
             </a:fld>
             <a:endParaRPr lang="ru-RU"/>
           </a:p>
@@ -1958,7 +1959,7 @@
           <a:p>
             <a:fld id="{52012CA4-A079-4CC4-AF6B-41932A245552}" type="datetime1">
               <a:rPr lang="ru-RU" smtClean="0"/>
-              <a:t>05.02.2026</a:t>
+              <a:t>09.02.2026</a:t>
             </a:fld>
             <a:endParaRPr lang="ru-RU"/>
           </a:p>
@@ -2113,7 +2114,7 @@
           <a:ln/>
           <a:extLst>
             <a:ext uri="{91240B29-F687-4f45-9708-019B960494DF}">
-              <a14:hiddenLine xmlns="" xmlns:a14="http://schemas.microsoft.com/office/drawing/2010/main" w="9525">
+              <a14:hiddenLine xmlns:a14="http://schemas.microsoft.com/office/drawing/2010/main" xmlns="" w="9525">
                 <a:solidFill>
                   <a:srgbClr val="000000"/>
                 </a:solidFill>
@@ -2238,7 +2239,7 @@
           <a:p>
             <a:fld id="{A79B7C4D-59D2-4729-9DB2-888AB4EC15B6}" type="datetime1">
               <a:rPr lang="ru-RU" smtClean="0"/>
-              <a:t>05.02.2026</a:t>
+              <a:t>09.02.2026</a:t>
             </a:fld>
             <a:endParaRPr lang="ru-RU"/>
           </a:p>
@@ -2395,7 +2396,7 @@
           <a:ln/>
           <a:extLst>
             <a:ext uri="{91240B29-F687-4f45-9708-019B960494DF}">
-              <a14:hiddenLine xmlns="" xmlns:a14="http://schemas.microsoft.com/office/drawing/2010/main" w="9525">
+              <a14:hiddenLine xmlns:a14="http://schemas.microsoft.com/office/drawing/2010/main" xmlns="" w="9525">
                 <a:solidFill>
                   <a:srgbClr val="000000"/>
                 </a:solidFill>
@@ -2530,7 +2531,7 @@
           <a:p>
             <a:fld id="{0A1F9B7E-56FA-4D28-B297-B10CA72DE6E6}" type="datetime1">
               <a:rPr lang="ru-RU" smtClean="0"/>
-              <a:t>05.02.2026</a:t>
+              <a:t>09.02.2026</a:t>
             </a:fld>
             <a:endParaRPr lang="ru-RU"/>
           </a:p>
@@ -2685,7 +2686,7 @@
           <a:ln/>
           <a:extLst>
             <a:ext uri="{91240B29-F687-4f45-9708-019B960494DF}">
-              <a14:hiddenLine xmlns="" xmlns:a14="http://schemas.microsoft.com/office/drawing/2010/main" w="9525">
+              <a14:hiddenLine xmlns:a14="http://schemas.microsoft.com/office/drawing/2010/main" xmlns="" w="9525">
                 <a:solidFill>
                   <a:srgbClr val="000000"/>
                 </a:solidFill>
@@ -2820,7 +2821,7 @@
           <a:p>
             <a:fld id="{9BF119F9-E340-4266-92B8-0820BB4259F5}" type="datetime1">
               <a:rPr lang="ru-RU" smtClean="0"/>
-              <a:t>05.02.2026</a:t>
+              <a:t>09.02.2026</a:t>
             </a:fld>
             <a:endParaRPr lang="ru-RU"/>
           </a:p>
@@ -3170,7 +3171,7 @@
           <a:p>
             <a:fld id="{6B5F39EB-F31E-489C-A97F-AD7A520CADD5}" type="datetime1">
               <a:rPr lang="ru-RU" smtClean="0"/>
-              <a:t>05.02.2026</a:t>
+              <a:t>09.02.2026</a:t>
             </a:fld>
             <a:endParaRPr lang="ru-RU"/>
           </a:p>
@@ -3325,7 +3326,7 @@
           <a:ln/>
           <a:extLst>
             <a:ext uri="{91240B29-F687-4f45-9708-019B960494DF}">
-              <a14:hiddenLine xmlns="" xmlns:a14="http://schemas.microsoft.com/office/drawing/2010/main" w="9525">
+              <a14:hiddenLine xmlns:a14="http://schemas.microsoft.com/office/drawing/2010/main" xmlns="" w="9525">
                 <a:solidFill>
                   <a:srgbClr val="000000"/>
                 </a:solidFill>
@@ -3516,7 +3517,7 @@
           <a:p>
             <a:fld id="{1C989BA9-C26A-4551-80E0-738107A0FE50}" type="datetime1">
               <a:rPr lang="ru-RU" smtClean="0"/>
-              <a:t>05.02.2026</a:t>
+              <a:t>09.02.2026</a:t>
             </a:fld>
             <a:endParaRPr lang="ru-RU"/>
           </a:p>
@@ -3671,7 +3672,7 @@
           <a:ln/>
           <a:extLst>
             <a:ext uri="{91240B29-F687-4f45-9708-019B960494DF}">
-              <a14:hiddenLine xmlns="" xmlns:a14="http://schemas.microsoft.com/office/drawing/2010/main" w="9525">
+              <a14:hiddenLine xmlns:a14="http://schemas.microsoft.com/office/drawing/2010/main" xmlns="" w="9525">
                 <a:solidFill>
                   <a:srgbClr val="000000"/>
                 </a:solidFill>
@@ -4000,7 +4001,7 @@
           <a:p>
             <a:fld id="{8F4EC683-CB3C-459D-988E-2160472BA884}" type="datetime1">
               <a:rPr lang="ru-RU" smtClean="0"/>
-              <a:t>05.02.2026</a:t>
+              <a:t>09.02.2026</a:t>
             </a:fld>
             <a:endParaRPr lang="ru-RU"/>
           </a:p>
@@ -4155,7 +4156,7 @@
           <a:ln/>
           <a:extLst>
             <a:ext uri="{91240B29-F687-4f45-9708-019B960494DF}">
-              <a14:hiddenLine xmlns="" xmlns:a14="http://schemas.microsoft.com/office/drawing/2010/main" w="9525">
+              <a14:hiddenLine xmlns:a14="http://schemas.microsoft.com/office/drawing/2010/main" xmlns="" w="9525">
                 <a:solidFill>
                   <a:srgbClr val="000000"/>
                 </a:solidFill>
@@ -4228,7 +4229,7 @@
           <a:p>
             <a:fld id="{B04DD521-DB26-41F6-8483-AB657A6A1D0C}" type="datetime1">
               <a:rPr lang="ru-RU" smtClean="0"/>
-              <a:t>05.02.2026</a:t>
+              <a:t>09.02.2026</a:t>
             </a:fld>
             <a:endParaRPr lang="ru-RU"/>
           </a:p>
@@ -4323,7 +4324,7 @@
           <a:p>
             <a:fld id="{96469DD3-FE8B-4E72-8CFE-001708E2FC7C}" type="datetime1">
               <a:rPr lang="ru-RU" smtClean="0"/>
-              <a:t>05.02.2026</a:t>
+              <a:t>09.02.2026</a:t>
             </a:fld>
             <a:endParaRPr lang="ru-RU"/>
           </a:p>
@@ -4591,7 +4592,7 @@
           <a:ln/>
           <a:extLst>
             <a:ext uri="{91240B29-F687-4f45-9708-019B960494DF}">
-              <a14:hiddenLine xmlns="" xmlns:a14="http://schemas.microsoft.com/office/drawing/2010/main" w="9525">
+              <a14:hiddenLine xmlns:a14="http://schemas.microsoft.com/office/drawing/2010/main" xmlns="" w="9525">
                 <a:solidFill>
                   <a:srgbClr val="000000"/>
                 </a:solidFill>
@@ -4797,7 +4798,7 @@
           <a:p>
             <a:fld id="{087A1B83-B00F-4940-948F-88023B3496AC}" type="datetime1">
               <a:rPr lang="ru-RU" smtClean="0"/>
-              <a:t>05.02.2026</a:t>
+              <a:t>09.02.2026</a:t>
             </a:fld>
             <a:endParaRPr lang="ru-RU"/>
           </a:p>
@@ -5110,7 +5111,7 @@
           <a:p>
             <a:fld id="{23778F88-6CFF-4336-92E6-6A88814EC16D}" type="datetime1">
               <a:rPr lang="ru-RU" smtClean="0"/>
-              <a:t>05.02.2026</a:t>
+              <a:t>09.02.2026</a:t>
             </a:fld>
             <a:endParaRPr lang="ru-RU"/>
           </a:p>
@@ -5380,7 +5381,7 @@
           <a:p>
             <a:fld id="{EFF1D0BE-CB2B-4848-82CD-7E9512932073}" type="datetime1">
               <a:rPr lang="ru-RU" smtClean="0"/>
-              <a:t>05.02.2026</a:t>
+              <a:t>09.02.2026</a:t>
             </a:fld>
             <a:endParaRPr lang="ru-RU"/>
           </a:p>
@@ -5848,7 +5849,7 @@
         </p:nvSpPr>
         <p:spPr>
           <a:xfrm>
-            <a:off x="0" y="78460"/>
+            <a:off x="-106087" y="548322"/>
             <a:ext cx="12192000" cy="2971051"/>
           </a:xfrm>
         </p:spPr>
@@ -5856,7 +5857,18 @@
           <a:bodyPr/>
           <a:lstStyle/>
           <a:p>
-            <a:pPr algn="ctr"/>
+            <a:pPr algn="ctr">
+              <a:lnSpc>
+                <a:spcPct val="150000"/>
+              </a:lnSpc>
+            </a:pPr>
+            <a:r>
+              <a:rPr lang="ru-RU" sz="2000" dirty="0">
+                <a:ea typeface="Times New Roman"/>
+                <a:cs typeface="Times New Roman"/>
+              </a:rPr>
+              <a:t/>
+            </a:r>
             <a:br>
               <a:rPr lang="ru-RU" sz="2000" dirty="0">
                 <a:ea typeface="Times New Roman"/>
@@ -5896,6 +5908,16 @@
                 <a:cs typeface="Times New Roman"/>
               </a:rPr>
               <a:t>С КЛИЕНТ-СЕРВЕРНОЙ АРХИТЕКТУРОЙ»</a:t>
+            </a:r>
+            <a:r>
+              <a:rPr lang="ru-RU" spc="-10" dirty="0">
+                <a:solidFill>
+                  <a:schemeClr val="tx1"/>
+                </a:solidFill>
+                <a:ea typeface="Times New Roman"/>
+                <a:cs typeface="Times New Roman"/>
+              </a:rPr>
+              <a:t/>
             </a:r>
             <a:br>
               <a:rPr lang="ru-RU" spc="-10" dirty="0">
@@ -6290,7 +6312,7 @@
           <p:cNvPr id="2" name="Заголовок 1">
             <a:extLst>
               <a:ext uri="{FF2B5EF4-FFF2-40B4-BE49-F238E27FC236}">
-                <a16:creationId xmlns:a16="http://schemas.microsoft.com/office/drawing/2014/main" id="{1DB0DD21-71E9-BE84-8E00-9CE16289D288}"/>
+                <a16:creationId xmlns:a16="http://schemas.microsoft.com/office/drawing/2014/main" id="{F806401E-A251-F1E3-CF12-471095BD7730}"/>
               </a:ext>
             </a:extLst>
           </p:cNvPr>
@@ -6309,7 +6331,7 @@
             <a:pPr algn="ctr"/>
             <a:r>
               <a:rPr lang="ru-RU" dirty="0"/>
-              <a:t>Дальнейшее развитие проекта</a:t>
+              <a:t>Заключение</a:t>
             </a:r>
           </a:p>
         </p:txBody>
@@ -6319,7 +6341,7 @@
           <p:cNvPr id="3" name="Объект 2">
             <a:extLst>
               <a:ext uri="{FF2B5EF4-FFF2-40B4-BE49-F238E27FC236}">
-                <a16:creationId xmlns:a16="http://schemas.microsoft.com/office/drawing/2014/main" id="{07BF2EF1-F377-C4F2-FC96-4B0A712EE747}"/>
+                <a16:creationId xmlns:a16="http://schemas.microsoft.com/office/drawing/2014/main" id="{1CC2F877-A019-C601-8155-8423107E1A9B}"/>
               </a:ext>
             </a:extLst>
           </p:cNvPr>
@@ -6332,8 +6354,8 @@
         </p:nvSpPr>
         <p:spPr>
           <a:xfrm>
-            <a:off x="407833" y="2125862"/>
-            <a:ext cx="10554574" cy="3636511"/>
+            <a:off x="361512" y="2198318"/>
+            <a:ext cx="7229261" cy="4020855"/>
           </a:xfrm>
         </p:spPr>
         <p:txBody>
@@ -6342,19 +6364,106 @@
           </a:bodyPr>
           <a:lstStyle/>
           <a:p>
-            <a:pPr marL="0" indent="0" algn="just">
-              <a:buNone/>
-            </a:pPr>
-            <a:r>
-              <a:rPr lang="ru-RU" sz="2000" dirty="0"/>
-              <a:t>В будущем планируем продолжить разработку нашей игры. Также планируется добавить систему миссий и заданий, выполняя которые игрок будет получать игровую валюту, которую сможет обменять на улучшенную броню или оружие. </a:t>
-            </a:r>
-          </a:p>
-        </p:txBody>
-      </p:sp>
-      <p:sp>
-        <p:nvSpPr>
-          <p:cNvPr id="4" name="Номер слайда 3"/>
+            <a:pPr algn="just"/>
+            <a:r>
+              <a:rPr lang="ru-RU" sz="2000" dirty="0">
+                <a:latin typeface="Century Gothic (Основной текст)"/>
+              </a:rPr>
+              <a:t>В результате проделанной работы была разработана полноценная 2</a:t>
+            </a:r>
+            <a:r>
+              <a:rPr lang="en-US" sz="2000" dirty="0">
+                <a:latin typeface="Century Gothic (Основной текст)"/>
+              </a:rPr>
+              <a:t>d</a:t>
+            </a:r>
+            <a:r>
+              <a:rPr lang="ru-RU" sz="2000" dirty="0">
+                <a:latin typeface="Century Gothic (Основной текст)"/>
+              </a:rPr>
+              <a:t> онлайн игра с системой битв, сюжетом и изображениями. Также в игре можно открыть настройки как в меню, так и во время игры. </a:t>
+            </a:r>
+          </a:p>
+          <a:p>
+            <a:pPr algn="just"/>
+            <a:r>
+              <a:rPr lang="ru-RU" sz="2000" dirty="0">
+                <a:latin typeface="Century Gothic (Основной текст)"/>
+                <a:ea typeface="Times New Roman"/>
+                <a:cs typeface="Times New Roman" panose="02020603050405020304" pitchFamily="18" charset="0"/>
+              </a:rPr>
+              <a:t>Нами были получены знания по игровой разработке в небольшой команде, а так же мы получили большой опыт в работе с нейросетями.</a:t>
+            </a:r>
+            <a:r>
+              <a:rPr lang="en-US" sz="2000" dirty="0">
+                <a:latin typeface="Century Gothic (Основной текст)"/>
+                <a:ea typeface="Times New Roman"/>
+                <a:cs typeface="Times New Roman" panose="02020603050405020304" pitchFamily="18" charset="0"/>
+              </a:rPr>
+              <a:t> </a:t>
+            </a:r>
+            <a:r>
+              <a:rPr lang="ru-RU" sz="2000" dirty="0">
+                <a:latin typeface="Century Gothic (Основной текст)"/>
+                <a:ea typeface="Times New Roman"/>
+                <a:cs typeface="Times New Roman" panose="02020603050405020304" pitchFamily="18" charset="0"/>
+              </a:rPr>
+              <a:t>Полученные навыки программирования позволят нам дальше развивать свой продукт и создавать новые увлекательные игры.</a:t>
+            </a:r>
+            <a:endParaRPr lang="en-US" sz="2000" dirty="0">
+              <a:latin typeface="Century Gothic (Основной текст)"/>
+              <a:ea typeface="Times New Roman"/>
+              <a:cs typeface="Times New Roman" panose="02020603050405020304" pitchFamily="18" charset="0"/>
+            </a:endParaRPr>
+          </a:p>
+        </p:txBody>
+      </p:sp>
+      <p:pic>
+        <p:nvPicPr>
+          <p:cNvPr id="4" name="Рисунок 3"/>
+          <p:cNvPicPr>
+            <a:picLocks noChangeAspect="1"/>
+          </p:cNvPicPr>
+          <p:nvPr/>
+        </p:nvPicPr>
+        <p:blipFill>
+          <a:blip r:embed="rId2" cstate="hqprint">
+            <a:extLst>
+              <a:ext uri="{28A0092B-C50C-407E-A947-70E740481C1C}">
+                <a14:useLocalDpi xmlns:a14="http://schemas.microsoft.com/office/drawing/2010/main" val="0"/>
+              </a:ext>
+            </a:extLst>
+          </a:blip>
+          <a:stretch>
+            <a:fillRect/>
+          </a:stretch>
+        </p:blipFill>
+        <p:spPr>
+          <a:xfrm>
+            <a:off x="8505066" y="2479852"/>
+            <a:ext cx="2173265" cy="2173265"/>
+          </a:xfrm>
+          <a:prstGeom prst="roundRect">
+            <a:avLst>
+              <a:gd name="adj" fmla="val 8594"/>
+            </a:avLst>
+          </a:prstGeom>
+          <a:solidFill>
+            <a:srgbClr val="FFFFFF">
+              <a:shade val="85000"/>
+            </a:srgbClr>
+          </a:solidFill>
+          <a:ln>
+            <a:noFill/>
+          </a:ln>
+          <a:effectLst>
+            <a:reflection blurRad="12700" stA="38000" endPos="28000" dist="5000" dir="5400000" sy="-100000" algn="bl" rotWithShape="0"/>
+          </a:effectLst>
+        </p:spPr>
+      </p:pic>
+      <p:sp>
+        <p:nvSpPr>
+          <p:cNvPr id="5" name="Номер слайда 4"/>
           <p:cNvSpPr>
             <a:spLocks noGrp="1"/>
           </p:cNvSpPr>
@@ -6375,10 +6484,73 @@
           </a:p>
         </p:txBody>
       </p:sp>
+      <p:sp>
+        <p:nvSpPr>
+          <p:cNvPr id="6" name="TextBox 5">
+            <a:extLst>
+              <a:ext uri="{FF2B5EF4-FFF2-40B4-BE49-F238E27FC236}">
+                <a16:creationId xmlns:a16="http://schemas.microsoft.com/office/drawing/2014/main" id="{3AEB7E5A-0F0F-421F-959F-0F3545411928}"/>
+              </a:ext>
+            </a:extLst>
+          </p:cNvPr>
+          <p:cNvSpPr txBox="1"/>
+          <p:nvPr/>
+        </p:nvSpPr>
+        <p:spPr>
+          <a:xfrm>
+            <a:off x="8386175" y="4856303"/>
+            <a:ext cx="2542784" cy="584775"/>
+          </a:xfrm>
+          <a:prstGeom prst="rect">
+            <a:avLst/>
+          </a:prstGeom>
+          <a:noFill/>
+        </p:spPr>
+        <p:txBody>
+          <a:bodyPr wrap="square" rtlCol="0">
+            <a:spAutoFit/>
+          </a:bodyPr>
+          <a:lstStyle/>
+          <a:p>
+            <a:r>
+              <a:rPr lang="ru-RU" sz="1600" dirty="0"/>
+              <a:t>Рисунок 7 – </a:t>
+            </a:r>
+            <a:r>
+              <a:rPr lang="en-US" sz="1600" dirty="0">
+                <a:latin typeface="Century Gothic (Основной текст)"/>
+                <a:ea typeface="Times New Roman"/>
+                <a:cs typeface="Times New Roman" panose="02020603050405020304" pitchFamily="18" charset="0"/>
+              </a:rPr>
+              <a:t>QR-</a:t>
+            </a:r>
+            <a:r>
+              <a:rPr lang="ru-RU" sz="1600" dirty="0">
+                <a:latin typeface="Century Gothic (Основной текст)"/>
+                <a:ea typeface="Times New Roman"/>
+                <a:cs typeface="Times New Roman" panose="02020603050405020304" pitchFamily="18" charset="0"/>
+              </a:rPr>
+              <a:t>код на репозиторий </a:t>
+            </a:r>
+            <a:r>
+              <a:rPr lang="en-US" sz="1600" dirty="0" err="1">
+                <a:latin typeface="Century Gothic (Основной текст)"/>
+                <a:ea typeface="Times New Roman"/>
+                <a:cs typeface="Times New Roman" panose="02020603050405020304" pitchFamily="18" charset="0"/>
+              </a:rPr>
+              <a:t>Github</a:t>
+            </a:r>
+            <a:r>
+              <a:rPr lang="ru-RU" sz="1600" dirty="0"/>
+              <a:t> </a:t>
+            </a:r>
+          </a:p>
+        </p:txBody>
+      </p:sp>
     </p:spTree>
     <p:extLst>
       <p:ext uri="{BB962C8B-B14F-4D97-AF65-F5344CB8AC3E}">
-        <p14:creationId xmlns:p14="http://schemas.microsoft.com/office/powerpoint/2010/main" val="1433178001"/>
+        <p14:creationId xmlns:p14="http://schemas.microsoft.com/office/powerpoint/2010/main" val="2255097546"/>
       </p:ext>
     </p:extLst>
   </p:cSld>
@@ -6410,7 +6582,7 @@
           <p:cNvPr id="2" name="Заголовок 1">
             <a:extLst>
               <a:ext uri="{FF2B5EF4-FFF2-40B4-BE49-F238E27FC236}">
-                <a16:creationId xmlns:a16="http://schemas.microsoft.com/office/drawing/2014/main" id="{267A4D73-96C1-92C1-C364-962CC71115E2}"/>
+                <a16:creationId xmlns:a16="http://schemas.microsoft.com/office/drawing/2014/main" id="{1DB0DD21-71E9-BE84-8E00-9CE16289D288}"/>
               </a:ext>
             </a:extLst>
           </p:cNvPr>
@@ -6429,7 +6601,7 @@
             <a:pPr algn="ctr"/>
             <a:r>
               <a:rPr lang="ru-RU" dirty="0"/>
-              <a:t>Список литературы</a:t>
+              <a:t>Дальнейшее развитие проекта</a:t>
             </a:r>
           </a:p>
         </p:txBody>
@@ -6439,7 +6611,7 @@
           <p:cNvPr id="3" name="Объект 2">
             <a:extLst>
               <a:ext uri="{FF2B5EF4-FFF2-40B4-BE49-F238E27FC236}">
-                <a16:creationId xmlns:a16="http://schemas.microsoft.com/office/drawing/2014/main" id="{97E72383-4E70-4F03-5CF2-9772EEB509D5}"/>
+                <a16:creationId xmlns:a16="http://schemas.microsoft.com/office/drawing/2014/main" id="{07BF2EF1-F377-C4F2-FC96-4B0A712EE747}"/>
               </a:ext>
             </a:extLst>
           </p:cNvPr>
@@ -6450,105 +6622,24 @@
             <p:ph idx="1"/>
           </p:nvPr>
         </p:nvSpPr>
-        <p:spPr/>
+        <p:spPr>
+          <a:xfrm>
+            <a:off x="407833" y="2125862"/>
+            <a:ext cx="10554574" cy="3636511"/>
+          </a:xfrm>
+        </p:spPr>
         <p:txBody>
           <a:bodyPr>
             <a:normAutofit/>
           </a:bodyPr>
           <a:lstStyle/>
           <a:p>
-            <a:pPr lvl="0"/>
-            <a:r>
-              <a:rPr lang="ru-RU" sz="2000" b="1" dirty="0"/>
-              <a:t>Leonardo.ai</a:t>
-            </a:r>
+            <a:pPr marL="0" indent="0" algn="just">
+              <a:buNone/>
+            </a:pPr>
             <a:r>
               <a:rPr lang="ru-RU" sz="2000" dirty="0"/>
-              <a:t>: нейросеть для генерации изображений искусственным интеллектом. – URL: </a:t>
-            </a:r>
-            <a:r>
-              <a:rPr lang="ru-RU" sz="2000" u="sng" dirty="0">
-                <a:hlinkClick r:id="rId2"/>
-              </a:rPr>
-              <a:t>https://leonardo.ai/</a:t>
-            </a:r>
-            <a:r>
-              <a:rPr lang="ru-RU" sz="2000" dirty="0"/>
-              <a:t> (дата обращения:</a:t>
-            </a:r>
-            <a:r>
-              <a:rPr lang="ru-RU" sz="2000" b="1" dirty="0"/>
-              <a:t> 23.01.2026</a:t>
-            </a:r>
-            <a:r>
-              <a:rPr lang="ru-RU" sz="2000" dirty="0"/>
-              <a:t>).</a:t>
-            </a:r>
-          </a:p>
-          <a:p>
-            <a:pPr lvl="0"/>
-            <a:r>
-              <a:rPr lang="ru-RU" sz="2000" b="1" dirty="0" err="1"/>
-              <a:t>Pygame</a:t>
-            </a:r>
-            <a:r>
-              <a:rPr lang="ru-RU" sz="2000" dirty="0"/>
-              <a:t>: набор модулей Python для программирования видеоигр: офиц. сайт. – URL: </a:t>
-            </a:r>
-            <a:r>
-              <a:rPr lang="ru-RU" sz="2000" u="sng" dirty="0">
-                <a:hlinkClick r:id="rId3"/>
-              </a:rPr>
-              <a:t>https://www.pygame.org/</a:t>
-            </a:r>
-            <a:r>
-              <a:rPr lang="ru-RU" sz="2000" dirty="0"/>
-              <a:t> (дата обращения: </a:t>
-            </a:r>
-            <a:r>
-              <a:rPr lang="ru-RU" sz="2000" b="1" dirty="0"/>
-              <a:t>30.09.2025</a:t>
-            </a:r>
-            <a:r>
-              <a:rPr lang="ru-RU" sz="2000" dirty="0"/>
-              <a:t>).</a:t>
-            </a:r>
-          </a:p>
-          <a:p>
-            <a:pPr lvl="0"/>
-            <a:r>
-              <a:rPr lang="ru-RU" sz="2000" b="1" dirty="0" err="1"/>
-              <a:t>GigaChat</a:t>
-            </a:r>
-            <a:r>
-              <a:rPr lang="ru-RU" sz="2000" dirty="0"/>
-              <a:t>: мультимодальная нейросеть от </a:t>
-            </a:r>
-            <a:r>
-              <a:rPr lang="ru-RU" sz="2000" dirty="0" err="1"/>
-              <a:t>Сбера</a:t>
-            </a:r>
-            <a:r>
-              <a:rPr lang="ru-RU" sz="2000" dirty="0"/>
-              <a:t>: офиц. сайт. – URL:  </a:t>
-            </a:r>
-            <a:r>
-              <a:rPr lang="ru-RU" sz="2000" u="sng" dirty="0">
-                <a:hlinkClick r:id="rId4"/>
-              </a:rPr>
-              <a:t>https://giga.chat/</a:t>
-            </a:r>
-            <a:r>
-              <a:rPr lang="ru-RU" sz="2000" dirty="0"/>
-              <a:t> (дата обращения: </a:t>
-            </a:r>
-            <a:r>
-              <a:rPr lang="ru-RU" sz="2000" b="1" dirty="0"/>
-              <a:t>01.02.2026</a:t>
-            </a:r>
-            <a:r>
-              <a:rPr lang="ru-RU" sz="2000" dirty="0"/>
-              <a:t>).</a:t>
+              <a:t>В будущем планируем продолжить разработку нашей игры. Также планируется добавить систему миссий и заданий, выполняя которые игрок будет получать игровую валюту, которую сможет обменять на улучшенную броню или оружие. </a:t>
             </a:r>
           </a:p>
         </p:txBody>
@@ -6579,7 +6670,7 @@
     </p:spTree>
     <p:extLst>
       <p:ext uri="{BB962C8B-B14F-4D97-AF65-F5344CB8AC3E}">
-        <p14:creationId xmlns:p14="http://schemas.microsoft.com/office/powerpoint/2010/main" val="2822117623"/>
+        <p14:creationId xmlns:p14="http://schemas.microsoft.com/office/powerpoint/2010/main" val="1433178001"/>
       </p:ext>
     </p:extLst>
   </p:cSld>
@@ -6611,6 +6702,207 @@
           <p:cNvPr id="2" name="Заголовок 1">
             <a:extLst>
               <a:ext uri="{FF2B5EF4-FFF2-40B4-BE49-F238E27FC236}">
+                <a16:creationId xmlns:a16="http://schemas.microsoft.com/office/drawing/2014/main" id="{267A4D73-96C1-92C1-C364-962CC71115E2}"/>
+              </a:ext>
+            </a:extLst>
+          </p:cNvPr>
+          <p:cNvSpPr>
+            <a:spLocks noGrp="1"/>
+          </p:cNvSpPr>
+          <p:nvPr>
+            <p:ph type="title"/>
+          </p:nvPr>
+        </p:nvSpPr>
+        <p:spPr/>
+        <p:txBody>
+          <a:bodyPr/>
+          <a:lstStyle/>
+          <a:p>
+            <a:pPr algn="ctr"/>
+            <a:r>
+              <a:rPr lang="ru-RU" dirty="0"/>
+              <a:t>Список литературы</a:t>
+            </a:r>
+          </a:p>
+        </p:txBody>
+      </p:sp>
+      <p:sp>
+        <p:nvSpPr>
+          <p:cNvPr id="3" name="Объект 2">
+            <a:extLst>
+              <a:ext uri="{FF2B5EF4-FFF2-40B4-BE49-F238E27FC236}">
+                <a16:creationId xmlns:a16="http://schemas.microsoft.com/office/drawing/2014/main" id="{97E72383-4E70-4F03-5CF2-9772EEB509D5}"/>
+              </a:ext>
+            </a:extLst>
+          </p:cNvPr>
+          <p:cNvSpPr>
+            <a:spLocks noGrp="1"/>
+          </p:cNvSpPr>
+          <p:nvPr>
+            <p:ph idx="1"/>
+          </p:nvPr>
+        </p:nvSpPr>
+        <p:spPr/>
+        <p:txBody>
+          <a:bodyPr>
+            <a:normAutofit/>
+          </a:bodyPr>
+          <a:lstStyle/>
+          <a:p>
+            <a:pPr lvl="0"/>
+            <a:r>
+              <a:rPr lang="ru-RU" sz="2000" b="1" dirty="0"/>
+              <a:t>Leonardo.ai</a:t>
+            </a:r>
+            <a:r>
+              <a:rPr lang="ru-RU" sz="2000" dirty="0"/>
+              <a:t>: нейросеть для генерации изображений искусственным интеллектом. – URL: </a:t>
+            </a:r>
+            <a:r>
+              <a:rPr lang="ru-RU" sz="2000" u="sng" dirty="0">
+                <a:hlinkClick r:id="rId2"/>
+              </a:rPr>
+              <a:t>https://leonardo.ai/</a:t>
+            </a:r>
+            <a:r>
+              <a:rPr lang="ru-RU" sz="2000" dirty="0"/>
+              <a:t> (дата обращения:</a:t>
+            </a:r>
+            <a:r>
+              <a:rPr lang="ru-RU" sz="2000" b="1" dirty="0"/>
+              <a:t> 23.01.2026</a:t>
+            </a:r>
+            <a:r>
+              <a:rPr lang="ru-RU" sz="2000" dirty="0"/>
+              <a:t>).</a:t>
+            </a:r>
+          </a:p>
+          <a:p>
+            <a:pPr lvl="0"/>
+            <a:r>
+              <a:rPr lang="ru-RU" sz="2000" b="1" dirty="0" err="1"/>
+              <a:t>Pygame</a:t>
+            </a:r>
+            <a:r>
+              <a:rPr lang="ru-RU" sz="2000" dirty="0"/>
+              <a:t>: набор модулей Python для программирования видеоигр: офиц. сайт. – URL: </a:t>
+            </a:r>
+            <a:r>
+              <a:rPr lang="ru-RU" sz="2000" u="sng" dirty="0">
+                <a:hlinkClick r:id="rId3"/>
+              </a:rPr>
+              <a:t>https://www.pygame.org/</a:t>
+            </a:r>
+            <a:r>
+              <a:rPr lang="ru-RU" sz="2000" dirty="0"/>
+              <a:t> (дата обращения: </a:t>
+            </a:r>
+            <a:r>
+              <a:rPr lang="ru-RU" sz="2000" b="1" dirty="0"/>
+              <a:t>30.09.2025</a:t>
+            </a:r>
+            <a:r>
+              <a:rPr lang="ru-RU" sz="2000" dirty="0"/>
+              <a:t>).</a:t>
+            </a:r>
+          </a:p>
+          <a:p>
+            <a:pPr lvl="0"/>
+            <a:r>
+              <a:rPr lang="ru-RU" sz="2000" b="1" dirty="0" err="1"/>
+              <a:t>GigaChat</a:t>
+            </a:r>
+            <a:r>
+              <a:rPr lang="ru-RU" sz="2000" dirty="0"/>
+              <a:t>: мультимодальная нейросеть от </a:t>
+            </a:r>
+            <a:r>
+              <a:rPr lang="ru-RU" sz="2000" dirty="0" err="1"/>
+              <a:t>Сбера</a:t>
+            </a:r>
+            <a:r>
+              <a:rPr lang="ru-RU" sz="2000" dirty="0"/>
+              <a:t>: офиц. сайт. – URL:  </a:t>
+            </a:r>
+            <a:r>
+              <a:rPr lang="ru-RU" sz="2000" u="sng" dirty="0">
+                <a:hlinkClick r:id="rId4"/>
+              </a:rPr>
+              <a:t>https://giga.chat/</a:t>
+            </a:r>
+            <a:r>
+              <a:rPr lang="ru-RU" sz="2000" dirty="0"/>
+              <a:t> (дата обращения: </a:t>
+            </a:r>
+            <a:r>
+              <a:rPr lang="ru-RU" sz="2000" b="1" dirty="0"/>
+              <a:t>01.02.2026</a:t>
+            </a:r>
+            <a:r>
+              <a:rPr lang="ru-RU" sz="2000" dirty="0"/>
+              <a:t>).</a:t>
+            </a:r>
+          </a:p>
+        </p:txBody>
+      </p:sp>
+      <p:sp>
+        <p:nvSpPr>
+          <p:cNvPr id="4" name="Номер слайда 3"/>
+          <p:cNvSpPr>
+            <a:spLocks noGrp="1"/>
+          </p:cNvSpPr>
+          <p:nvPr>
+            <p:ph type="sldNum" sz="quarter" idx="12"/>
+          </p:nvPr>
+        </p:nvSpPr>
+        <p:spPr/>
+        <p:txBody>
+          <a:bodyPr/>
+          <a:lstStyle/>
+          <a:p>
+            <a:fld id="{CE008903-557F-423E-A0C0-FB243518669E}" type="slidenum">
+              <a:rPr lang="ru-RU" smtClean="0"/>
+              <a:t>12</a:t>
+            </a:fld>
+            <a:endParaRPr lang="ru-RU"/>
+          </a:p>
+        </p:txBody>
+      </p:sp>
+    </p:spTree>
+    <p:extLst>
+      <p:ext uri="{BB962C8B-B14F-4D97-AF65-F5344CB8AC3E}">
+        <p14:creationId xmlns:p14="http://schemas.microsoft.com/office/powerpoint/2010/main" val="2822117623"/>
+      </p:ext>
+    </p:extLst>
+  </p:cSld>
+  <p:clrMapOvr>
+    <a:masterClrMapping/>
+  </p:clrMapOvr>
+</p:sld>
+</file>
+
+<file path=ppt/slides/slide13.xml><?xml version="1.0" encoding="utf-8"?>
+<p:sld xmlns:a="http://schemas.openxmlformats.org/drawingml/2006/main" xmlns:r="http://schemas.openxmlformats.org/officeDocument/2006/relationships" xmlns:p="http://schemas.openxmlformats.org/presentationml/2006/main">
+  <p:cSld>
+    <p:spTree>
+      <p:nvGrpSpPr>
+        <p:cNvPr id="1" name=""/>
+        <p:cNvGrpSpPr/>
+        <p:nvPr/>
+      </p:nvGrpSpPr>
+      <p:grpSpPr>
+        <a:xfrm>
+          <a:off x="0" y="0"/>
+          <a:ext cx="0" cy="0"/>
+          <a:chOff x="0" y="0"/>
+          <a:chExt cx="0" cy="0"/>
+        </a:xfrm>
+      </p:grpSpPr>
+      <p:sp>
+        <p:nvSpPr>
+          <p:cNvPr id="2" name="Заголовок 1">
+            <a:extLst>
+              <a:ext uri="{FF2B5EF4-FFF2-40B4-BE49-F238E27FC236}">
                 <a16:creationId xmlns:a16="http://schemas.microsoft.com/office/drawing/2014/main" id="{EECEAB89-91F4-8CDF-990B-80055D724CD4}"/>
               </a:ext>
             </a:extLst>
@@ -6687,7 +6979,7 @@
           <a:p>
             <a:fld id="{CE008903-557F-423E-A0C0-FB243518669E}" type="slidenum">
               <a:rPr lang="ru-RU" smtClean="0"/>
-              <a:t>12</a:t>
+              <a:t>13</a:t>
             </a:fld>
             <a:endParaRPr lang="ru-RU"/>
           </a:p>
@@ -6770,7 +7062,7 @@
         </p:nvSpPr>
         <p:spPr>
           <a:xfrm>
-            <a:off x="156575" y="2484120"/>
+            <a:off x="173999" y="2317066"/>
             <a:ext cx="11207999" cy="3985259"/>
           </a:xfrm>
         </p:spPr>
@@ -6780,7 +7072,11 @@
           </a:bodyPr>
           <a:lstStyle/>
           <a:p>
-            <a:pPr algn="just"/>
+            <a:pPr algn="just">
+              <a:lnSpc>
+                <a:spcPct val="130000"/>
+              </a:lnSpc>
+            </a:pPr>
             <a:r>
               <a:rPr lang="ru-RU" sz="2000" dirty="0"/>
               <a:t>Мы живем в </a:t>
@@ -6803,7 +7099,11 @@
             </a:r>
           </a:p>
           <a:p>
-            <a:pPr algn="just"/>
+            <a:pPr algn="just">
+              <a:lnSpc>
+                <a:spcPct val="130000"/>
+              </a:lnSpc>
+            </a:pPr>
             <a:r>
               <a:rPr lang="ru-RU" sz="2000" dirty="0"/>
               <a:t>Язык «</a:t>
@@ -6818,7 +7118,11 @@
             </a:r>
           </a:p>
           <a:p>
-            <a:pPr algn="just"/>
+            <a:pPr algn="just">
+              <a:lnSpc>
+                <a:spcPct val="130000"/>
+              </a:lnSpc>
+            </a:pPr>
             <a:r>
               <a:rPr lang="ru-RU" sz="2000" dirty="0"/>
               <a:t>Мы разработали игру «</a:t>
@@ -6901,12 +7205,13 @@
             </a:r>
             <a:r>
               <a:rPr lang="ru-RU" sz="2000" dirty="0"/>
-              <a:t>» для соединения сервера с клиентами.</a:t>
-            </a:r>
-          </a:p>
-          <a:p>
-            <a:pPr algn="just"/>
-            <a:endParaRPr lang="ru-RU" dirty="0"/>
+              <a:t>» для соединения сервера с клиентами</a:t>
+            </a:r>
+            <a:r>
+              <a:rPr lang="ru-RU" sz="2000" dirty="0" smtClean="0"/>
+              <a:t>.</a:t>
+            </a:r>
+            <a:endParaRPr lang="ru-RU" sz="2000" dirty="0"/>
           </a:p>
         </p:txBody>
       </p:sp>
@@ -7213,6 +7518,272 @@
 </file>
 
 <file path=ppt/slides/slide4.xml><?xml version="1.0" encoding="utf-8"?>
+<p:sld xmlns:a="http://schemas.openxmlformats.org/drawingml/2006/main" xmlns:r="http://schemas.openxmlformats.org/officeDocument/2006/relationships" xmlns:p="http://schemas.openxmlformats.org/presentationml/2006/main">
+  <p:cSld>
+    <p:spTree>
+      <p:nvGrpSpPr>
+        <p:cNvPr id="1" name=""/>
+        <p:cNvGrpSpPr/>
+        <p:nvPr/>
+      </p:nvGrpSpPr>
+      <p:grpSpPr>
+        <a:xfrm>
+          <a:off x="0" y="0"/>
+          <a:ext cx="0" cy="0"/>
+          <a:chOff x="0" y="0"/>
+          <a:chExt cx="0" cy="0"/>
+        </a:xfrm>
+      </p:grpSpPr>
+      <p:sp>
+        <p:nvSpPr>
+          <p:cNvPr id="2" name="Заголовок 1">
+            <a:extLst>
+              <a:ext uri="{FF2B5EF4-FFF2-40B4-BE49-F238E27FC236}">
+                <a16:creationId xmlns:a16="http://schemas.microsoft.com/office/drawing/2014/main" id="{4F22483B-90ED-08EE-53AA-77FC3BC13AF8}"/>
+              </a:ext>
+            </a:extLst>
+          </p:cNvPr>
+          <p:cNvSpPr>
+            <a:spLocks noGrp="1"/>
+          </p:cNvSpPr>
+          <p:nvPr>
+            <p:ph type="title"/>
+          </p:nvPr>
+        </p:nvSpPr>
+        <p:spPr/>
+        <p:txBody>
+          <a:bodyPr/>
+          <a:lstStyle/>
+          <a:p>
+            <a:pPr algn="ctr"/>
+            <a:r>
+              <a:rPr lang="ru-RU" dirty="0"/>
+              <a:t>Новизна, цель и задачи проектной работы</a:t>
+            </a:r>
+          </a:p>
+        </p:txBody>
+      </p:sp>
+      <p:sp>
+        <p:nvSpPr>
+          <p:cNvPr id="3" name="Объект 2">
+            <a:extLst>
+              <a:ext uri="{FF2B5EF4-FFF2-40B4-BE49-F238E27FC236}">
+                <a16:creationId xmlns:a16="http://schemas.microsoft.com/office/drawing/2014/main" id="{20EED16F-6FF6-8A2E-3D3E-D5FA9E81F565}"/>
+              </a:ext>
+            </a:extLst>
+          </p:cNvPr>
+          <p:cNvSpPr>
+            <a:spLocks noGrp="1"/>
+          </p:cNvSpPr>
+          <p:nvPr>
+            <p:ph idx="1"/>
+          </p:nvPr>
+        </p:nvSpPr>
+        <p:spPr>
+          <a:xfrm>
+            <a:off x="-54265" y="2323578"/>
+            <a:ext cx="11521843" cy="4697260"/>
+          </a:xfrm>
+        </p:spPr>
+        <p:txBody>
+          <a:bodyPr>
+            <a:noAutofit/>
+          </a:bodyPr>
+          <a:lstStyle/>
+          <a:p>
+            <a:pPr algn="just">
+              <a:spcBef>
+                <a:spcPts val="0"/>
+              </a:spcBef>
+              <a:spcAft>
+                <a:spcPts val="300"/>
+              </a:spcAft>
+            </a:pPr>
+            <a:r>
+              <a:rPr lang="ru-RU" sz="2000" b="1" dirty="0"/>
+              <a:t>Цель</a:t>
+            </a:r>
+            <a:r>
+              <a:rPr lang="en-US" sz="2000" dirty="0"/>
+              <a:t>: </a:t>
+            </a:r>
+            <a:r>
+              <a:rPr lang="ru-RU" sz="2000" dirty="0"/>
+              <a:t>Разработать прототип многопользовательской онлайн 2D-игры на «</a:t>
+            </a:r>
+            <a:r>
+              <a:rPr lang="en-US" sz="2000" dirty="0"/>
+              <a:t>python</a:t>
+            </a:r>
+            <a:r>
+              <a:rPr lang="ru-RU" sz="2000" dirty="0"/>
+              <a:t>» с клиент-серверной архитектурой, демонстрирующий реализацию сетевого взаимодействия в реальном времени, управление игровым состоянием на сервере и отзывчивый графический интерфейс в клиенте.</a:t>
+            </a:r>
+          </a:p>
+          <a:p>
+            <a:r>
+              <a:rPr lang="ru-RU" sz="2000" b="1" dirty="0"/>
+              <a:t>Задачи</a:t>
+            </a:r>
+            <a:r>
+              <a:rPr lang="en-US" sz="2000" dirty="0"/>
+              <a:t>: 	</a:t>
+            </a:r>
+          </a:p>
+          <a:p>
+            <a:pPr lvl="1">
+              <a:spcBef>
+                <a:spcPts val="0"/>
+              </a:spcBef>
+              <a:spcAft>
+                <a:spcPts val="200"/>
+              </a:spcAft>
+              <a:buFont typeface="+mj-lt"/>
+              <a:buAutoNum type="arabicPeriod"/>
+            </a:pPr>
+            <a:r>
+              <a:rPr lang="ru-RU" sz="2000" dirty="0"/>
+              <a:t>Изучение теоретической литературы;</a:t>
+            </a:r>
+          </a:p>
+          <a:p>
+            <a:pPr lvl="1">
+              <a:spcBef>
+                <a:spcPts val="0"/>
+              </a:spcBef>
+              <a:spcAft>
+                <a:spcPts val="200"/>
+              </a:spcAft>
+              <a:buFont typeface="+mj-lt"/>
+              <a:buAutoNum type="arabicPeriod"/>
+            </a:pPr>
+            <a:r>
+              <a:rPr lang="ru-RU" sz="2000" dirty="0"/>
+              <a:t>Разработка алгоритма работы игры;</a:t>
+            </a:r>
+          </a:p>
+          <a:p>
+            <a:pPr lvl="1">
+              <a:spcBef>
+                <a:spcPts val="0"/>
+              </a:spcBef>
+              <a:spcAft>
+                <a:spcPts val="200"/>
+              </a:spcAft>
+              <a:buFont typeface="+mj-lt"/>
+              <a:buAutoNum type="arabicPeriod"/>
+            </a:pPr>
+            <a:r>
+              <a:rPr lang="ru-RU" sz="2000" dirty="0"/>
+              <a:t>Написание кода игры;</a:t>
+            </a:r>
+          </a:p>
+          <a:p>
+            <a:pPr lvl="1">
+              <a:spcBef>
+                <a:spcPts val="0"/>
+              </a:spcBef>
+              <a:spcAft>
+                <a:spcPts val="200"/>
+              </a:spcAft>
+              <a:buFont typeface="+mj-lt"/>
+              <a:buAutoNum type="arabicPeriod"/>
+            </a:pPr>
+            <a:r>
+              <a:rPr lang="ru-RU" sz="2000" dirty="0"/>
+              <a:t>Создание </a:t>
+            </a:r>
+            <a:r>
+              <a:rPr lang="en-US" sz="2000" dirty="0" err="1"/>
+              <a:t>tmx</a:t>
+            </a:r>
+            <a:r>
+              <a:rPr lang="en-US" sz="2000" dirty="0"/>
+              <a:t>-</a:t>
+            </a:r>
+            <a:r>
+              <a:rPr lang="ru-RU" sz="2000" dirty="0"/>
+              <a:t>карты;</a:t>
+            </a:r>
+          </a:p>
+          <a:p>
+            <a:pPr lvl="1">
+              <a:spcBef>
+                <a:spcPts val="0"/>
+              </a:spcBef>
+              <a:buFont typeface="+mj-lt"/>
+              <a:buAutoNum type="arabicPeriod"/>
+            </a:pPr>
+            <a:r>
+              <a:rPr lang="ru-RU" sz="2000" dirty="0"/>
+              <a:t>Генерация картинок в нейронных сетях.</a:t>
+            </a:r>
+            <a:endParaRPr lang="en-US" sz="2000" dirty="0"/>
+          </a:p>
+          <a:p>
+            <a:pPr algn="just">
+              <a:spcBef>
+                <a:spcPts val="0"/>
+              </a:spcBef>
+            </a:pPr>
+            <a:r>
+              <a:rPr lang="ru-RU" sz="2000" b="1" dirty="0"/>
+              <a:t>Новизна</a:t>
+            </a:r>
+            <a:r>
+              <a:rPr lang="en-US" sz="2000" dirty="0"/>
+              <a:t>: </a:t>
+            </a:r>
+            <a:r>
+              <a:rPr lang="ru-RU" sz="2000" dirty="0"/>
+              <a:t>Новизна проектной работы заключается в исследовании и реализации клиент-серверной архитектуры, где высокопроизводительный сервер реального времени, написанный на языке «Go» взаимодействует с быстрым для прототипирования клиентом на языке «python».</a:t>
+            </a:r>
+          </a:p>
+          <a:p>
+            <a:pPr marL="0" indent="0">
+              <a:buNone/>
+            </a:pPr>
+            <a:endParaRPr lang="en-US" sz="2000" dirty="0"/>
+          </a:p>
+        </p:txBody>
+      </p:sp>
+      <p:sp>
+        <p:nvSpPr>
+          <p:cNvPr id="4" name="Номер слайда 3"/>
+          <p:cNvSpPr>
+            <a:spLocks noGrp="1"/>
+          </p:cNvSpPr>
+          <p:nvPr>
+            <p:ph type="sldNum" sz="quarter" idx="12"/>
+          </p:nvPr>
+        </p:nvSpPr>
+        <p:spPr/>
+        <p:txBody>
+          <a:bodyPr/>
+          <a:lstStyle/>
+          <a:p>
+            <a:fld id="{CE008903-557F-423E-A0C0-FB243518669E}" type="slidenum">
+              <a:rPr lang="ru-RU" smtClean="0"/>
+              <a:t>4</a:t>
+            </a:fld>
+            <a:endParaRPr lang="ru-RU" dirty="0"/>
+          </a:p>
+        </p:txBody>
+      </p:sp>
+    </p:spTree>
+    <p:extLst>
+      <p:ext uri="{BB962C8B-B14F-4D97-AF65-F5344CB8AC3E}">
+        <p14:creationId xmlns:p14="http://schemas.microsoft.com/office/powerpoint/2010/main" val="1024141528"/>
+      </p:ext>
+    </p:extLst>
+  </p:cSld>
+  <p:clrMapOvr>
+    <a:masterClrMapping/>
+  </p:clrMapOvr>
+</p:sld>
+</file>
+
+<file path=ppt/slides/slide5.xml><?xml version="1.0" encoding="utf-8"?>
 <p:sld xmlns:a="http://schemas.openxmlformats.org/drawingml/2006/main" xmlns:r="http://schemas.openxmlformats.org/officeDocument/2006/relationships" xmlns:p="http://schemas.openxmlformats.org/presentationml/2006/main">
   <p:cSld>
     <p:spTree>
@@ -7420,7 +7991,7 @@
           <a:p>
             <a:fld id="{CE008903-557F-423E-A0C0-FB243518669E}" type="slidenum">
               <a:rPr lang="ru-RU" smtClean="0"/>
-              <a:t>4</a:t>
+              <a:t>5</a:t>
             </a:fld>
             <a:endParaRPr lang="ru-RU"/>
           </a:p>
@@ -7439,7 +8010,7 @@
 </p:sld>
 </file>
 
-<file path=ppt/slides/slide5.xml><?xml version="1.0" encoding="utf-8"?>
+<file path=ppt/slides/slide6.xml><?xml version="1.0" encoding="utf-8"?>
 <p:sld xmlns:a="http://schemas.openxmlformats.org/drawingml/2006/main" xmlns:r="http://schemas.openxmlformats.org/officeDocument/2006/relationships" xmlns:p="http://schemas.openxmlformats.org/presentationml/2006/main">
   <p:cSld>
     <p:spTree>
@@ -7581,7 +8152,7 @@
           <a:p>
             <a:fld id="{CE008903-557F-423E-A0C0-FB243518669E}" type="slidenum">
               <a:rPr lang="ru-RU" smtClean="0"/>
-              <a:t>5</a:t>
+              <a:t>6</a:t>
             </a:fld>
             <a:endParaRPr lang="ru-RU"/>
           </a:p>
@@ -7600,7 +8171,7 @@
 </p:sld>
 </file>
 
-<file path=ppt/slides/slide6.xml><?xml version="1.0" encoding="utf-8"?>
+<file path=ppt/slides/slide7.xml><?xml version="1.0" encoding="utf-8"?>
 <p:sld xmlns:a="http://schemas.openxmlformats.org/drawingml/2006/main" xmlns:r="http://schemas.openxmlformats.org/officeDocument/2006/relationships" xmlns:p="http://schemas.openxmlformats.org/presentationml/2006/main">
   <p:cSld>
     <p:spTree>
@@ -7781,7 +8352,7 @@
           <a:p>
             <a:fld id="{CE008903-557F-423E-A0C0-FB243518669E}" type="slidenum">
               <a:rPr lang="ru-RU" smtClean="0"/>
-              <a:t>6</a:t>
+              <a:t>7</a:t>
             </a:fld>
             <a:endParaRPr lang="ru-RU"/>
           </a:p>
@@ -7800,7 +8371,7 @@
 </p:sld>
 </file>
 
-<file path=ppt/slides/slide7.xml><?xml version="1.0" encoding="utf-8"?>
+<file path=ppt/slides/slide8.xml><?xml version="1.0" encoding="utf-8"?>
 <p:sld xmlns:a="http://schemas.openxmlformats.org/drawingml/2006/main" xmlns:r="http://schemas.openxmlformats.org/officeDocument/2006/relationships" xmlns:p="http://schemas.openxmlformats.org/presentationml/2006/main">
   <p:cSld>
     <p:spTree>
@@ -7999,7 +8570,7 @@
           <a:p>
             <a:fld id="{CE008903-557F-423E-A0C0-FB243518669E}" type="slidenum">
               <a:rPr lang="ru-RU" smtClean="0"/>
-              <a:t>7</a:t>
+              <a:t>8</a:t>
             </a:fld>
             <a:endParaRPr lang="ru-RU"/>
           </a:p>
@@ -8018,7 +8589,7 @@
 </p:sld>
 </file>
 
-<file path=ppt/slides/slide8.xml><?xml version="1.0" encoding="utf-8"?>
+<file path=ppt/slides/slide9.xml><?xml version="1.0" encoding="utf-8"?>
 <p:sld xmlns:a="http://schemas.openxmlformats.org/drawingml/2006/main" xmlns:r="http://schemas.openxmlformats.org/officeDocument/2006/relationships" xmlns:p="http://schemas.openxmlformats.org/presentationml/2006/main">
   <p:cSld>
     <p:spTree>
@@ -8405,7 +8976,7 @@
           <a:p>
             <a:fld id="{CE008903-557F-423E-A0C0-FB243518669E}" type="slidenum">
               <a:rPr lang="ru-RU" smtClean="0"/>
-              <a:t>8</a:t>
+              <a:t>9</a:t>
             </a:fld>
             <a:endParaRPr lang="ru-RU" dirty="0"/>
           </a:p>
@@ -8415,276 +8986,6 @@
     <p:extLst>
       <p:ext uri="{BB962C8B-B14F-4D97-AF65-F5344CB8AC3E}">
         <p14:creationId xmlns:p14="http://schemas.microsoft.com/office/powerpoint/2010/main" val="2087852851"/>
-      </p:ext>
-    </p:extLst>
-  </p:cSld>
-  <p:clrMapOvr>
-    <a:masterClrMapping/>
-  </p:clrMapOvr>
-</p:sld>
-</file>
-
-<file path=ppt/slides/slide9.xml><?xml version="1.0" encoding="utf-8"?>
-<p:sld xmlns:a="http://schemas.openxmlformats.org/drawingml/2006/main" xmlns:r="http://schemas.openxmlformats.org/officeDocument/2006/relationships" xmlns:p="http://schemas.openxmlformats.org/presentationml/2006/main">
-  <p:cSld>
-    <p:spTree>
-      <p:nvGrpSpPr>
-        <p:cNvPr id="1" name=""/>
-        <p:cNvGrpSpPr/>
-        <p:nvPr/>
-      </p:nvGrpSpPr>
-      <p:grpSpPr>
-        <a:xfrm>
-          <a:off x="0" y="0"/>
-          <a:ext cx="0" cy="0"/>
-          <a:chOff x="0" y="0"/>
-          <a:chExt cx="0" cy="0"/>
-        </a:xfrm>
-      </p:grpSpPr>
-      <p:sp>
-        <p:nvSpPr>
-          <p:cNvPr id="2" name="Заголовок 1">
-            <a:extLst>
-              <a:ext uri="{FF2B5EF4-FFF2-40B4-BE49-F238E27FC236}">
-                <a16:creationId xmlns:a16="http://schemas.microsoft.com/office/drawing/2014/main" id="{F806401E-A251-F1E3-CF12-471095BD7730}"/>
-              </a:ext>
-            </a:extLst>
-          </p:cNvPr>
-          <p:cNvSpPr>
-            <a:spLocks noGrp="1"/>
-          </p:cNvSpPr>
-          <p:nvPr>
-            <p:ph type="title"/>
-          </p:nvPr>
-        </p:nvSpPr>
-        <p:spPr/>
-        <p:txBody>
-          <a:bodyPr/>
-          <a:lstStyle/>
-          <a:p>
-            <a:pPr algn="ctr"/>
-            <a:r>
-              <a:rPr lang="ru-RU" dirty="0"/>
-              <a:t>Заключение</a:t>
-            </a:r>
-          </a:p>
-        </p:txBody>
-      </p:sp>
-      <p:sp>
-        <p:nvSpPr>
-          <p:cNvPr id="3" name="Объект 2">
-            <a:extLst>
-              <a:ext uri="{FF2B5EF4-FFF2-40B4-BE49-F238E27FC236}">
-                <a16:creationId xmlns:a16="http://schemas.microsoft.com/office/drawing/2014/main" id="{1CC2F877-A019-C601-8155-8423107E1A9B}"/>
-              </a:ext>
-            </a:extLst>
-          </p:cNvPr>
-          <p:cNvSpPr>
-            <a:spLocks noGrp="1"/>
-          </p:cNvSpPr>
-          <p:nvPr>
-            <p:ph idx="1"/>
-          </p:nvPr>
-        </p:nvSpPr>
-        <p:spPr>
-          <a:xfrm>
-            <a:off x="361512" y="2198318"/>
-            <a:ext cx="7229261" cy="4020855"/>
-          </a:xfrm>
-        </p:spPr>
-        <p:txBody>
-          <a:bodyPr>
-            <a:normAutofit/>
-          </a:bodyPr>
-          <a:lstStyle/>
-          <a:p>
-            <a:pPr algn="just"/>
-            <a:r>
-              <a:rPr lang="ru-RU" sz="2000" dirty="0">
-                <a:latin typeface="Century Gothic (Основной текст)"/>
-              </a:rPr>
-              <a:t>В результате проделанной работы была разработана полноценная 2</a:t>
-            </a:r>
-            <a:r>
-              <a:rPr lang="en-US" sz="2000" dirty="0">
-                <a:latin typeface="Century Gothic (Основной текст)"/>
-              </a:rPr>
-              <a:t>d</a:t>
-            </a:r>
-            <a:r>
-              <a:rPr lang="ru-RU" sz="2000" dirty="0">
-                <a:latin typeface="Century Gothic (Основной текст)"/>
-              </a:rPr>
-              <a:t> онлайн игра с системой битв, сюжетом и изображениями. Также в игре можно открыть настройки как в меню, так и во время игры. </a:t>
-            </a:r>
-          </a:p>
-          <a:p>
-            <a:pPr algn="just"/>
-            <a:r>
-              <a:rPr lang="ru-RU" sz="2000" dirty="0">
-                <a:latin typeface="Century Gothic (Основной текст)"/>
-                <a:ea typeface="Times New Roman"/>
-                <a:cs typeface="Times New Roman" panose="02020603050405020304" pitchFamily="18" charset="0"/>
-              </a:rPr>
-              <a:t>Нами были получены знания по игровой разработке в небольшой команде, а так же мы получили большой опыт в работе с нейросетями.</a:t>
-            </a:r>
-            <a:r>
-              <a:rPr lang="en-US" sz="2000" dirty="0">
-                <a:latin typeface="Century Gothic (Основной текст)"/>
-                <a:ea typeface="Times New Roman"/>
-                <a:cs typeface="Times New Roman" panose="02020603050405020304" pitchFamily="18" charset="0"/>
-              </a:rPr>
-              <a:t> </a:t>
-            </a:r>
-            <a:r>
-              <a:rPr lang="ru-RU" sz="2000" dirty="0">
-                <a:latin typeface="Century Gothic (Основной текст)"/>
-                <a:ea typeface="Times New Roman"/>
-                <a:cs typeface="Times New Roman" panose="02020603050405020304" pitchFamily="18" charset="0"/>
-              </a:rPr>
-              <a:t>Полученные навыки программирования позволят нам дальше развивать свой продукт и создавать новые увлекательные игры.</a:t>
-            </a:r>
-            <a:endParaRPr lang="en-US" sz="2000" dirty="0">
-              <a:latin typeface="Century Gothic (Основной текст)"/>
-              <a:ea typeface="Times New Roman"/>
-              <a:cs typeface="Times New Roman" panose="02020603050405020304" pitchFamily="18" charset="0"/>
-            </a:endParaRPr>
-          </a:p>
-        </p:txBody>
-      </p:sp>
-      <p:pic>
-        <p:nvPicPr>
-          <p:cNvPr id="4" name="Рисунок 3"/>
-          <p:cNvPicPr>
-            <a:picLocks noChangeAspect="1"/>
-          </p:cNvPicPr>
-          <p:nvPr/>
-        </p:nvPicPr>
-        <p:blipFill>
-          <a:blip r:embed="rId2" cstate="hqprint">
-            <a:extLst>
-              <a:ext uri="{28A0092B-C50C-407E-A947-70E740481C1C}">
-                <a14:useLocalDpi xmlns:a14="http://schemas.microsoft.com/office/drawing/2010/main" val="0"/>
-              </a:ext>
-            </a:extLst>
-          </a:blip>
-          <a:stretch>
-            <a:fillRect/>
-          </a:stretch>
-        </p:blipFill>
-        <p:spPr>
-          <a:xfrm>
-            <a:off x="8505066" y="2479852"/>
-            <a:ext cx="2173265" cy="2173265"/>
-          </a:xfrm>
-          <a:prstGeom prst="roundRect">
-            <a:avLst>
-              <a:gd name="adj" fmla="val 8594"/>
-            </a:avLst>
-          </a:prstGeom>
-          <a:solidFill>
-            <a:srgbClr val="FFFFFF">
-              <a:shade val="85000"/>
-            </a:srgbClr>
-          </a:solidFill>
-          <a:ln>
-            <a:noFill/>
-          </a:ln>
-          <a:effectLst>
-            <a:reflection blurRad="12700" stA="38000" endPos="28000" dist="5000" dir="5400000" sy="-100000" algn="bl" rotWithShape="0"/>
-          </a:effectLst>
-        </p:spPr>
-      </p:pic>
-      <p:sp>
-        <p:nvSpPr>
-          <p:cNvPr id="5" name="Номер слайда 4"/>
-          <p:cNvSpPr>
-            <a:spLocks noGrp="1"/>
-          </p:cNvSpPr>
-          <p:nvPr>
-            <p:ph type="sldNum" sz="quarter" idx="12"/>
-          </p:nvPr>
-        </p:nvSpPr>
-        <p:spPr/>
-        <p:txBody>
-          <a:bodyPr/>
-          <a:lstStyle/>
-          <a:p>
-            <a:fld id="{CE008903-557F-423E-A0C0-FB243518669E}" type="slidenum">
-              <a:rPr lang="ru-RU" smtClean="0"/>
-              <a:t>9</a:t>
-            </a:fld>
-            <a:endParaRPr lang="ru-RU"/>
-          </a:p>
-        </p:txBody>
-      </p:sp>
-      <p:sp>
-        <p:nvSpPr>
-          <p:cNvPr id="6" name="TextBox 5">
-            <a:extLst>
-              <a:ext uri="{FF2B5EF4-FFF2-40B4-BE49-F238E27FC236}">
-                <a16:creationId xmlns:a16="http://schemas.microsoft.com/office/drawing/2014/main" id="{3AEB7E5A-0F0F-421F-959F-0F3545411928}"/>
-              </a:ext>
-            </a:extLst>
-          </p:cNvPr>
-          <p:cNvSpPr txBox="1"/>
-          <p:nvPr/>
-        </p:nvSpPr>
-        <p:spPr>
-          <a:xfrm>
-            <a:off x="8386175" y="4856303"/>
-            <a:ext cx="2542784" cy="584775"/>
-          </a:xfrm>
-          <a:prstGeom prst="rect">
-            <a:avLst/>
-          </a:prstGeom>
-          <a:noFill/>
-        </p:spPr>
-        <p:txBody>
-          <a:bodyPr wrap="square" rtlCol="0">
-            <a:spAutoFit/>
-          </a:bodyPr>
-          <a:lstStyle/>
-          <a:p>
-            <a:r>
-              <a:rPr lang="ru-RU" sz="1600" dirty="0"/>
-              <a:t>Рисунок 7 – </a:t>
-            </a:r>
-            <a:r>
-              <a:rPr lang="en-US" sz="1600" dirty="0">
-                <a:latin typeface="Century Gothic (Основной текст)"/>
-                <a:ea typeface="Times New Roman"/>
-                <a:cs typeface="Times New Roman" panose="02020603050405020304" pitchFamily="18" charset="0"/>
-              </a:rPr>
-              <a:t>QR-</a:t>
-            </a:r>
-            <a:r>
-              <a:rPr lang="ru-RU" sz="1600" dirty="0">
-                <a:latin typeface="Century Gothic (Основной текст)"/>
-                <a:ea typeface="Times New Roman"/>
-                <a:cs typeface="Times New Roman" panose="02020603050405020304" pitchFamily="18" charset="0"/>
-              </a:rPr>
-              <a:t>код на репозиторий </a:t>
-            </a:r>
-            <a:r>
-              <a:rPr lang="en-US" sz="1600" dirty="0" err="1">
-                <a:latin typeface="Century Gothic (Основной текст)"/>
-                <a:ea typeface="Times New Roman"/>
-                <a:cs typeface="Times New Roman" panose="02020603050405020304" pitchFamily="18" charset="0"/>
-              </a:rPr>
-              <a:t>Github</a:t>
-            </a:r>
-            <a:r>
-              <a:rPr lang="ru-RU" sz="1600" dirty="0"/>
-              <a:t> </a:t>
-            </a:r>
-          </a:p>
-        </p:txBody>
-      </p:sp>
-    </p:spTree>
-    <p:extLst>
-      <p:ext uri="{BB962C8B-B14F-4D97-AF65-F5344CB8AC3E}">
-        <p14:creationId xmlns:p14="http://schemas.microsoft.com/office/powerpoint/2010/main" val="2255097546"/>
       </p:ext>
     </p:extLst>
   </p:cSld>

--- a/Документация/origin.pptx
+++ b/Документация/origin.pptx
@@ -571,7 +571,7 @@
           <a:effectLst/>
           <a:extLst>
             <a:ext uri="{91240B29-F687-4f45-9708-019B960494DF}">
-              <a14:hiddenLine xmlns:a14="http://schemas.microsoft.com/office/drawing/2010/main" xmlns="" w="9525">
+              <a14:hiddenLine xmlns="" xmlns:a14="http://schemas.microsoft.com/office/drawing/2010/main" w="9525">
                 <a:solidFill>
                   <a:srgbClr val="000000"/>
                 </a:solidFill>
@@ -2114,7 +2114,7 @@
           <a:ln/>
           <a:extLst>
             <a:ext uri="{91240B29-F687-4f45-9708-019B960494DF}">
-              <a14:hiddenLine xmlns:a14="http://schemas.microsoft.com/office/drawing/2010/main" xmlns="" w="9525">
+              <a14:hiddenLine xmlns="" xmlns:a14="http://schemas.microsoft.com/office/drawing/2010/main" w="9525">
                 <a:solidFill>
                   <a:srgbClr val="000000"/>
                 </a:solidFill>
@@ -2396,7 +2396,7 @@
           <a:ln/>
           <a:extLst>
             <a:ext uri="{91240B29-F687-4f45-9708-019B960494DF}">
-              <a14:hiddenLine xmlns:a14="http://schemas.microsoft.com/office/drawing/2010/main" xmlns="" w="9525">
+              <a14:hiddenLine xmlns="" xmlns:a14="http://schemas.microsoft.com/office/drawing/2010/main" w="9525">
                 <a:solidFill>
                   <a:srgbClr val="000000"/>
                 </a:solidFill>
@@ -2686,7 +2686,7 @@
           <a:ln/>
           <a:extLst>
             <a:ext uri="{91240B29-F687-4f45-9708-019B960494DF}">
-              <a14:hiddenLine xmlns:a14="http://schemas.microsoft.com/office/drawing/2010/main" xmlns="" w="9525">
+              <a14:hiddenLine xmlns="" xmlns:a14="http://schemas.microsoft.com/office/drawing/2010/main" w="9525">
                 <a:solidFill>
                   <a:srgbClr val="000000"/>
                 </a:solidFill>
@@ -3326,7 +3326,7 @@
           <a:ln/>
           <a:extLst>
             <a:ext uri="{91240B29-F687-4f45-9708-019B960494DF}">
-              <a14:hiddenLine xmlns:a14="http://schemas.microsoft.com/office/drawing/2010/main" xmlns="" w="9525">
+              <a14:hiddenLine xmlns="" xmlns:a14="http://schemas.microsoft.com/office/drawing/2010/main" w="9525">
                 <a:solidFill>
                   <a:srgbClr val="000000"/>
                 </a:solidFill>
@@ -3672,7 +3672,7 @@
           <a:ln/>
           <a:extLst>
             <a:ext uri="{91240B29-F687-4f45-9708-019B960494DF}">
-              <a14:hiddenLine xmlns:a14="http://schemas.microsoft.com/office/drawing/2010/main" xmlns="" w="9525">
+              <a14:hiddenLine xmlns="" xmlns:a14="http://schemas.microsoft.com/office/drawing/2010/main" w="9525">
                 <a:solidFill>
                   <a:srgbClr val="000000"/>
                 </a:solidFill>
@@ -4156,7 +4156,7 @@
           <a:ln/>
           <a:extLst>
             <a:ext uri="{91240B29-F687-4f45-9708-019B960494DF}">
-              <a14:hiddenLine xmlns:a14="http://schemas.microsoft.com/office/drawing/2010/main" xmlns="" w="9525">
+              <a14:hiddenLine xmlns="" xmlns:a14="http://schemas.microsoft.com/office/drawing/2010/main" w="9525">
                 <a:solidFill>
                   <a:srgbClr val="000000"/>
                 </a:solidFill>
@@ -4592,7 +4592,7 @@
           <a:ln/>
           <a:extLst>
             <a:ext uri="{91240B29-F687-4f45-9708-019B960494DF}">
-              <a14:hiddenLine xmlns:a14="http://schemas.microsoft.com/office/drawing/2010/main" xmlns="" w="9525">
+              <a14:hiddenLine xmlns="" xmlns:a14="http://schemas.microsoft.com/office/drawing/2010/main" w="9525">
                 <a:solidFill>
                   <a:srgbClr val="000000"/>
                 </a:solidFill>
@@ -5862,13 +5862,6 @@
                 <a:spcPct val="150000"/>
               </a:lnSpc>
             </a:pPr>
-            <a:r>
-              <a:rPr lang="ru-RU" sz="2000" dirty="0">
-                <a:ea typeface="Times New Roman"/>
-                <a:cs typeface="Times New Roman"/>
-              </a:rPr>
-              <a:t/>
-            </a:r>
             <a:br>
               <a:rPr lang="ru-RU" sz="2000" dirty="0">
                 <a:ea typeface="Times New Roman"/>
@@ -5908,16 +5901,6 @@
                 <a:cs typeface="Times New Roman"/>
               </a:rPr>
               <a:t>С КЛИЕНТ-СЕРВЕРНОЙ АРХИТЕКТУРОЙ»</a:t>
-            </a:r>
-            <a:r>
-              <a:rPr lang="ru-RU" spc="-10" dirty="0">
-                <a:solidFill>
-                  <a:schemeClr val="tx1"/>
-                </a:solidFill>
-                <a:ea typeface="Times New Roman"/>
-                <a:cs typeface="Times New Roman"/>
-              </a:rPr>
-              <a:t/>
             </a:r>
             <a:br>
               <a:rPr lang="ru-RU" spc="-10" dirty="0">
@@ -7205,13 +7188,8 @@
             </a:r>
             <a:r>
               <a:rPr lang="ru-RU" sz="2000" dirty="0"/>
-              <a:t>» для соединения сервера с клиентами</a:t>
-            </a:r>
-            <a:r>
-              <a:rPr lang="ru-RU" sz="2000" dirty="0" smtClean="0"/>
-              <a:t>.</a:t>
-            </a:r>
-            <a:endParaRPr lang="ru-RU" sz="2000" dirty="0"/>
+              <a:t>» для соединения сервера с клиентами.</a:t>
+            </a:r>
           </a:p>
         </p:txBody>
       </p:sp>
@@ -8056,50 +8034,6 @@
           </a:p>
         </p:txBody>
       </p:sp>
-      <p:pic>
-        <p:nvPicPr>
-          <p:cNvPr id="5" name="Объект 4">
-            <a:extLst>
-              <a:ext uri="{FF2B5EF4-FFF2-40B4-BE49-F238E27FC236}">
-                <a16:creationId xmlns:a16="http://schemas.microsoft.com/office/drawing/2014/main" id="{0583E016-C172-4FFE-48C6-5021A9E08943}"/>
-              </a:ext>
-            </a:extLst>
-          </p:cNvPr>
-          <p:cNvPicPr>
-            <a:picLocks noGrp="1" noChangeAspect="1"/>
-          </p:cNvPicPr>
-          <p:nvPr>
-            <p:ph idx="1"/>
-          </p:nvPr>
-        </p:nvPicPr>
-        <p:blipFill>
-          <a:blip r:embed="rId2">
-            <a:extLst>
-              <a:ext uri="{28A0092B-C50C-407E-A947-70E740481C1C}">
-                <a14:useLocalDpi xmlns:a14="http://schemas.microsoft.com/office/drawing/2010/main" val="0"/>
-              </a:ext>
-            </a:extLst>
-          </a:blip>
-          <a:stretch>
-            <a:fillRect/>
-          </a:stretch>
-        </p:blipFill>
-        <p:spPr>
-          <a:xfrm>
-            <a:off x="3257736" y="2412623"/>
-            <a:ext cx="5676523" cy="3636963"/>
-          </a:xfrm>
-          <a:prstGeom prst="rect">
-            <a:avLst/>
-          </a:prstGeom>
-          <a:ln>
-            <a:noFill/>
-          </a:ln>
-          <a:effectLst>
-            <a:softEdge rad="112500"/>
-          </a:effectLst>
-        </p:spPr>
-      </p:pic>
       <p:sp>
         <p:nvSpPr>
           <p:cNvPr id="6" name="TextBox 5">
@@ -8158,6 +8092,72 @@
           </a:p>
         </p:txBody>
       </p:sp>
+      <p:sp>
+        <p:nvSpPr>
+          <p:cNvPr id="7" name="Объект 6">
+            <a:extLst>
+              <a:ext uri="{FF2B5EF4-FFF2-40B4-BE49-F238E27FC236}">
+                <a16:creationId xmlns:a16="http://schemas.microsoft.com/office/drawing/2014/main" id="{266EF762-A5B5-679D-A349-22623475EBA4}"/>
+              </a:ext>
+            </a:extLst>
+          </p:cNvPr>
+          <p:cNvSpPr>
+            <a:spLocks noGrp="1"/>
+          </p:cNvSpPr>
+          <p:nvPr>
+            <p:ph idx="1"/>
+          </p:nvPr>
+        </p:nvSpPr>
+        <p:spPr/>
+        <p:txBody>
+          <a:bodyPr/>
+          <a:lstStyle/>
+          <a:p>
+            <a:endParaRPr lang="ru-RU"/>
+          </a:p>
+        </p:txBody>
+      </p:sp>
+      <p:pic>
+        <p:nvPicPr>
+          <p:cNvPr id="8" name="Рисунок 7">
+            <a:extLst>
+              <a:ext uri="{FF2B5EF4-FFF2-40B4-BE49-F238E27FC236}">
+                <a16:creationId xmlns:a16="http://schemas.microsoft.com/office/drawing/2014/main" id="{E77E8D60-A3F0-2DDF-C147-26262202B47C}"/>
+              </a:ext>
+            </a:extLst>
+          </p:cNvPr>
+          <p:cNvPicPr>
+            <a:picLocks noChangeAspect="1"/>
+          </p:cNvPicPr>
+          <p:nvPr/>
+        </p:nvPicPr>
+        <p:blipFill>
+          <a:blip r:embed="rId2">
+            <a:extLst>
+              <a:ext uri="{28A0092B-C50C-407E-A947-70E740481C1C}">
+                <a14:useLocalDpi xmlns:a14="http://schemas.microsoft.com/office/drawing/2010/main" val="0"/>
+              </a:ext>
+            </a:extLst>
+          </a:blip>
+          <a:srcRect/>
+          <a:stretch>
+            <a:fillRect/>
+          </a:stretch>
+        </p:blipFill>
+        <p:spPr bwMode="auto">
+          <a:xfrm>
+            <a:off x="3002503" y="2222287"/>
+            <a:ext cx="5805520" cy="3802010"/>
+          </a:xfrm>
+          <a:prstGeom prst="rect">
+            <a:avLst/>
+          </a:prstGeom>
+          <a:noFill/>
+          <a:ln>
+            <a:noFill/>
+          </a:ln>
+        </p:spPr>
+      </p:pic>
     </p:spTree>
     <p:extLst>
       <p:ext uri="{BB962C8B-B14F-4D97-AF65-F5344CB8AC3E}">
